--- a/doc/IAOBRA_Apresentacao.pptx
+++ b/doc/IAOBRA_Apresentacao.pptx
@@ -4,6 +4,9 @@
   <p:sldMasterIdLst>
     <p:sldMasterId id="2147483648" r:id="rId1"/>
   </p:sldMasterIdLst>
+  <p:notesMasterIdLst>
+    <p:notesMasterId r:id="rId13"/>
+  </p:notesMasterIdLst>
   <p:sldIdLst>
     <p:sldId id="256" r:id="rId2"/>
     <p:sldId id="257" r:id="rId3"/>
@@ -12,10 +15,11 @@
     <p:sldId id="260" r:id="rId6"/>
     <p:sldId id="261" r:id="rId7"/>
     <p:sldId id="262" r:id="rId8"/>
+    <p:sldId id="263" r:id="rId9"/>
+    <p:sldId id="264" r:id="rId10"/>
+    <p:sldId id="265" r:id="rId11"/>
+    <p:sldId id="266" r:id="rId12"/>
   </p:sldIdLst>
-  <p:notesMasterIdLst>
-    <p:notesMasterId r:id="rId9"/>
-  </p:notesMasterIdLst>
   <p:sldSz cx="12192000" cy="6858000"/>
   <p:notesSz cx="6858000" cy="12192000"/>
   <p:defaultTextStyle>
@@ -110,7 +114,20 @@
       </a:defRPr>
     </a:lvl9pPr>
   </p:defaultTextStyle>
+  <p:extLst>
+    <p:ext uri="{EFAFB233-063F-42B5-8137-9DF3F51BA10A}">
+      <p15:sldGuideLst xmlns:p15="http://schemas.microsoft.com/office/powerpoint/2012/main"/>
+    </p:ext>
+  </p:extLst>
 </p:presentation>
+</file>
+
+<file path=ppt/revisionInfo.xml><?xml version="1.0" encoding="utf-8"?>
+<p1510:revInfo xmlns:a="http://schemas.openxmlformats.org/drawingml/2006/main" xmlns:r="http://schemas.openxmlformats.org/officeDocument/2006/relationships" xmlns:p1510="http://schemas.microsoft.com/office/powerpoint/2015/10/main">
+  <p1510:revLst>
+    <p1510:client id="{672D6477-9941-335D-F280-DD5D8AB30088}" v="12" dt="2026-07-06T05:17:06.438"/>
+  </p1510:revLst>
+</p1510:revInfo>
 </file>
 
 <file path=ppt/notesMasters/notesMaster1.xml><?xml version="1.0" encoding="utf-8"?>
@@ -137,7 +154,7 @@
       </p:grpSpPr>
       <p:sp>
         <p:nvSpPr>
-          <p:cNvPr id="2" name="Header Placeholder 1"/>
+          <p:cNvPr id="2" name="Espaço Reservado para Cabeçalho 1"/>
           <p:cNvSpPr>
             <a:spLocks noGrp="1"/>
           </p:cNvSpPr>
@@ -148,7 +165,7 @@
         <p:spPr>
           <a:xfrm>
             <a:off x="0" y="0"/>
-            <a:ext cx="2971800" cy="458788"/>
+            <a:ext cx="2971800" cy="611188"/>
           </a:xfrm>
           <a:prstGeom prst="rect">
             <a:avLst/>
@@ -162,13 +179,13 @@
             </a:lvl1pPr>
           </a:lstStyle>
           <a:p>
-            <a:endParaRPr lang="en-US"/>
-          </a:p>
-        </p:txBody>
-      </p:sp>
-      <p:sp>
-        <p:nvSpPr>
-          <p:cNvPr id="3" name="Date Placeholder 2"/>
+            <a:endParaRPr lang="pt-BR"/>
+          </a:p>
+        </p:txBody>
+      </p:sp>
+      <p:sp>
+        <p:nvSpPr>
+          <p:cNvPr id="3" name="Espaço Reservado para Data 2"/>
           <p:cNvSpPr>
             <a:spLocks noGrp="1"/>
           </p:cNvSpPr>
@@ -179,7 +196,7 @@
         <p:spPr>
           <a:xfrm>
             <a:off x="3884613" y="0"/>
-            <a:ext cx="2971800" cy="458788"/>
+            <a:ext cx="2971800" cy="611188"/>
           </a:xfrm>
           <a:prstGeom prst="rect">
             <a:avLst/>
@@ -193,17 +210,16 @@
             </a:lvl1pPr>
           </a:lstStyle>
           <a:p>
-            <a:fld id="{5282F153-3F37-0F45-9E97-73ACFA13230C}" type="datetimeFigureOut">
-              <a:rPr lang="en-US"/>
-              <a:t>7/23/19</a:t>
+            <a:fld id="{03CCCA71-9233-48CF-851D-C69FD159EF52}" type="datetimeFigureOut">
+              <a:t>06/07/2026</a:t>
             </a:fld>
-            <a:endParaRPr lang="en-US"/>
-          </a:p>
-        </p:txBody>
-      </p:sp>
-      <p:sp>
-        <p:nvSpPr>
-          <p:cNvPr id="4" name="Slide Image Placeholder 3"/>
+            <a:endParaRPr lang="pt-BR"/>
+          </a:p>
+        </p:txBody>
+      </p:sp>
+      <p:sp>
+        <p:nvSpPr>
+          <p:cNvPr id="4" name="Espaço Reservado para Imagem de Slide 3"/>
           <p:cNvSpPr>
             <a:spLocks noGrp="1" noRot="1" noChangeAspect="1"/>
           </p:cNvSpPr>
@@ -213,8 +229,8 @@
         </p:nvSpPr>
         <p:spPr>
           <a:xfrm>
-            <a:off x="685800" y="1143000"/>
-            <a:ext cx="5486400" cy="3086100"/>
+            <a:off x="-228600" y="1524000"/>
+            <a:ext cx="7315200" cy="4114800"/>
           </a:xfrm>
           <a:prstGeom prst="rect">
             <a:avLst/>
@@ -230,13 +246,13 @@
           <a:bodyPr vert="horz" lIns="91440" tIns="45720" rIns="91440" bIns="45720" rtlCol="0" anchor="ctr"/>
           <a:lstStyle/>
           <a:p>
-            <a:endParaRPr lang="en-US"/>
-          </a:p>
-        </p:txBody>
-      </p:sp>
-      <p:sp>
-        <p:nvSpPr>
-          <p:cNvPr id="5" name="Notes Placeholder 4"/>
+            <a:endParaRPr lang="pt-BR"/>
+          </a:p>
+        </p:txBody>
+      </p:sp>
+      <p:sp>
+        <p:nvSpPr>
+          <p:cNvPr id="5" name="Espaço Reservado para Anotações 4"/>
           <p:cNvSpPr>
             <a:spLocks noGrp="1"/>
           </p:cNvSpPr>
@@ -246,8 +262,8 @@
         </p:nvSpPr>
         <p:spPr>
           <a:xfrm>
-            <a:off x="685800" y="4400550"/>
-            <a:ext cx="5486400" cy="3600450"/>
+            <a:off x="685800" y="5867400"/>
+            <a:ext cx="5486400" cy="4800600"/>
           </a:xfrm>
           <a:prstGeom prst="rect">
             <a:avLst/>
@@ -259,43 +275,43 @@
           <a:p>
             <a:pPr lvl="0"/>
             <a:r>
-              <a:rPr lang="en-US"/>
-              <a:t>Click to edit Master text styles</a:t>
+              <a:rPr lang="pt-BR"/>
+              <a:t>Clique para editar os estilos de texto Mestres</a:t>
             </a:r>
           </a:p>
           <a:p>
             <a:pPr lvl="1"/>
             <a:r>
-              <a:rPr lang="en-US"/>
-              <a:t>Second level</a:t>
+              <a:rPr lang="pt-BR"/>
+              <a:t>Segundo nível</a:t>
             </a:r>
           </a:p>
           <a:p>
             <a:pPr lvl="2"/>
             <a:r>
-              <a:rPr lang="en-US"/>
-              <a:t>Third level</a:t>
+              <a:rPr lang="pt-BR"/>
+              <a:t>Terceiro nível</a:t>
             </a:r>
           </a:p>
           <a:p>
             <a:pPr lvl="3"/>
             <a:r>
-              <a:rPr lang="en-US"/>
-              <a:t>Fourth level</a:t>
+              <a:rPr lang="pt-BR"/>
+              <a:t>Quarto nível</a:t>
             </a:r>
           </a:p>
           <a:p>
             <a:pPr lvl="4"/>
             <a:r>
-              <a:rPr lang="en-US"/>
-              <a:t>Fifth level</a:t>
-            </a:r>
-          </a:p>
-        </p:txBody>
-      </p:sp>
-      <p:sp>
-        <p:nvSpPr>
-          <p:cNvPr id="6" name="Footer Placeholder 5"/>
+              <a:rPr lang="pt-BR"/>
+              <a:t>Quinto nível</a:t>
+            </a:r>
+          </a:p>
+        </p:txBody>
+      </p:sp>
+      <p:sp>
+        <p:nvSpPr>
+          <p:cNvPr id="6" name="Espaço Reservado para Rodapé 5"/>
           <p:cNvSpPr>
             <a:spLocks noGrp="1"/>
           </p:cNvSpPr>
@@ -305,8 +321,8 @@
         </p:nvSpPr>
         <p:spPr>
           <a:xfrm>
-            <a:off x="0" y="8685213"/>
-            <a:ext cx="2971800" cy="458787"/>
+            <a:off x="0" y="11580813"/>
+            <a:ext cx="2971800" cy="611187"/>
           </a:xfrm>
           <a:prstGeom prst="rect">
             <a:avLst/>
@@ -320,13 +336,13 @@
             </a:lvl1pPr>
           </a:lstStyle>
           <a:p>
-            <a:endParaRPr lang="en-US"/>
-          </a:p>
-        </p:txBody>
-      </p:sp>
-      <p:sp>
-        <p:nvSpPr>
-          <p:cNvPr id="7" name="Slide Number Placeholder 6"/>
+            <a:endParaRPr lang="pt-BR"/>
+          </a:p>
+        </p:txBody>
+      </p:sp>
+      <p:sp>
+        <p:nvSpPr>
+          <p:cNvPr id="7" name="Espaço Reservado para Número de Slide 6"/>
           <p:cNvSpPr>
             <a:spLocks noGrp="1"/>
           </p:cNvSpPr>
@@ -336,8 +352,8 @@
         </p:nvSpPr>
         <p:spPr>
           <a:xfrm>
-            <a:off x="3884613" y="8685213"/>
-            <a:ext cx="2971800" cy="458787"/>
+            <a:off x="3884613" y="11580813"/>
+            <a:ext cx="2971800" cy="611187"/>
           </a:xfrm>
           <a:prstGeom prst="rect">
             <a:avLst/>
@@ -351,18 +367,17 @@
             </a:lvl1pPr>
           </a:lstStyle>
           <a:p>
-            <a:fld id="{CE5E9CC1-C706-0F49-92D6-E571CC5EEA8F}" type="slidenum">
-              <a:rPr lang="en-US"/>
-              <a:t>‹#›</a:t>
+            <a:fld id="{C54ACE25-F8C1-4E9F-9F01-C5FCE67C44EC}" type="slidenum">
+              <a:t>‹nº›</a:t>
             </a:fld>
-            <a:endParaRPr lang="en-US"/>
+            <a:endParaRPr lang="pt-BR"/>
           </a:p>
         </p:txBody>
       </p:sp>
     </p:spTree>
     <p:extLst>
       <p:ext uri="{BB962C8B-B14F-4D97-AF65-F5344CB8AC3E}">
-        <p14:creationId xmlns:p14="http://schemas.microsoft.com/office/powerpoint/2010/main" val="1024086991"/>
+        <p14:creationId xmlns:p14="http://schemas.microsoft.com/office/powerpoint/2010/main" val="2110875398"/>
       </p:ext>
     </p:extLst>
   </p:cSld>
@@ -510,7 +525,6 @@
               <a:rPr lang="en-US" dirty="0"/>
               <a:t>TEMPO: 15 segundos. Cumprimentar a banca/turma, dizer o nome do projeto (IAOBRA) e o nome do apresentador. Ser direto, sem se alongar.</a:t>
             </a:r>
-            <a:endParaRPr lang="en-US" dirty="0"/>
           </a:p>
         </p:txBody>
       </p:sp>
@@ -532,6 +546,180 @@
             <a:fld id="{F7021451-1387-4CA6-816F-3879F97B5CBC}" type="slidenum">
               <a:rPr lang="en-US"/>
               <a:t>1</a:t>
+            </a:fld>
+            <a:endParaRPr lang="en-US"/>
+          </a:p>
+        </p:txBody>
+      </p:sp>
+    </p:spTree>
+    <p:extLst>
+      <p:ext uri="{BB962C8B-B14F-4D97-AF65-F5344CB8AC3E}">
+        <p14:creationId xmlns:p14="http://schemas.microsoft.com/office/powerpoint/2010/main" val="1024086991"/>
+      </p:ext>
+    </p:extLst>
+  </p:cSld>
+  <p:clrMapOvr>
+    <a:masterClrMapping/>
+  </p:clrMapOvr>
+</p:notes>
+</file>
+
+<file path=ppt/notesSlides/notesSlide10.xml><?xml version="1.0" encoding="utf-8"?>
+<p:notes xmlns:a="http://schemas.openxmlformats.org/drawingml/2006/main" xmlns:r="http://schemas.openxmlformats.org/officeDocument/2006/relationships" xmlns:p="http://schemas.openxmlformats.org/presentationml/2006/main">
+  <p:cSld>
+    <p:spTree>
+      <p:nvGrpSpPr>
+        <p:cNvPr id="1" name=""/>
+        <p:cNvGrpSpPr/>
+        <p:nvPr/>
+      </p:nvGrpSpPr>
+      <p:grpSpPr>
+        <a:xfrm>
+          <a:off x="0" y="0"/>
+          <a:ext cx="0" cy="0"/>
+          <a:chOff x="0" y="0"/>
+          <a:chExt cx="0" cy="0"/>
+        </a:xfrm>
+      </p:grpSpPr>
+      <p:sp>
+        <p:nvSpPr>
+          <p:cNvPr id="2" name="Slide Image Placeholder 1"/>
+          <p:cNvSpPr>
+            <a:spLocks noGrp="1" noRot="1" noChangeAspect="1"/>
+          </p:cNvSpPr>
+          <p:nvPr>
+            <p:ph type="sldImg"/>
+          </p:nvPr>
+        </p:nvSpPr>
+        <p:spPr/>
+      </p:sp>
+      <p:sp>
+        <p:nvSpPr>
+          <p:cNvPr id="3" name="Notes Placeholder 2"/>
+          <p:cNvSpPr>
+            <a:spLocks noGrp="1"/>
+          </p:cNvSpPr>
+          <p:nvPr>
+            <p:ph type="body" idx="1"/>
+          </p:nvPr>
+        </p:nvSpPr>
+        <p:spPr/>
+        <p:txBody>
+          <a:bodyPr/>
+          <a:lstStyle/>
+          <a:p>
+            <a:r>
+              <a:rPr lang="en-US" dirty="0"/>
+              <a:t>Ponto 4 da demonstração: formulário de contato com os desenvolvedores. Nome, email, assunto e mensagem; o admin visualiza as mensagens recebidas.</a:t>
+            </a:r>
+          </a:p>
+        </p:txBody>
+      </p:sp>
+      <p:sp>
+        <p:nvSpPr>
+          <p:cNvPr id="4" name="Slide Number Placeholder 3"/>
+          <p:cNvSpPr>
+            <a:spLocks noGrp="1"/>
+          </p:cNvSpPr>
+          <p:nvPr>
+            <p:ph type="sldNum" sz="quarter" idx="10"/>
+          </p:nvPr>
+        </p:nvSpPr>
+        <p:spPr/>
+        <p:txBody>
+          <a:bodyPr/>
+          <a:lstStyle/>
+          <a:p>
+            <a:fld id="{F7021451-1387-4CA6-816F-3879F97B5CBC}" type="slidenum">
+              <a:rPr lang="en-US"/>
+              <a:t>10</a:t>
+            </a:fld>
+            <a:endParaRPr lang="en-US"/>
+          </a:p>
+        </p:txBody>
+      </p:sp>
+    </p:spTree>
+    <p:extLst>
+      <p:ext uri="{BB962C8B-B14F-4D97-AF65-F5344CB8AC3E}">
+        <p14:creationId xmlns:p14="http://schemas.microsoft.com/office/powerpoint/2010/main" val="1024086991"/>
+      </p:ext>
+    </p:extLst>
+  </p:cSld>
+  <p:clrMapOvr>
+    <a:masterClrMapping/>
+  </p:clrMapOvr>
+</p:notes>
+</file>
+
+<file path=ppt/notesSlides/notesSlide11.xml><?xml version="1.0" encoding="utf-8"?>
+<p:notes xmlns:a="http://schemas.openxmlformats.org/drawingml/2006/main" xmlns:r="http://schemas.openxmlformats.org/officeDocument/2006/relationships" xmlns:p="http://schemas.openxmlformats.org/presentationml/2006/main">
+  <p:cSld>
+    <p:spTree>
+      <p:nvGrpSpPr>
+        <p:cNvPr id="1" name=""/>
+        <p:cNvGrpSpPr/>
+        <p:nvPr/>
+      </p:nvGrpSpPr>
+      <p:grpSpPr>
+        <a:xfrm>
+          <a:off x="0" y="0"/>
+          <a:ext cx="0" cy="0"/>
+          <a:chOff x="0" y="0"/>
+          <a:chExt cx="0" cy="0"/>
+        </a:xfrm>
+      </p:grpSpPr>
+      <p:sp>
+        <p:nvSpPr>
+          <p:cNvPr id="2" name="Slide Image Placeholder 1"/>
+          <p:cNvSpPr>
+            <a:spLocks noGrp="1" noRot="1" noChangeAspect="1"/>
+          </p:cNvSpPr>
+          <p:nvPr>
+            <p:ph type="sldImg"/>
+          </p:nvPr>
+        </p:nvSpPr>
+        <p:spPr/>
+      </p:sp>
+      <p:sp>
+        <p:nvSpPr>
+          <p:cNvPr id="3" name="Notes Placeholder 2"/>
+          <p:cNvSpPr>
+            <a:spLocks noGrp="1"/>
+          </p:cNvSpPr>
+          <p:nvPr>
+            <p:ph type="body" idx="1"/>
+          </p:nvPr>
+        </p:nvSpPr>
+        <p:spPr/>
+        <p:txBody>
+          <a:bodyPr/>
+          <a:lstStyle/>
+          <a:p>
+            <a:r>
+              <a:rPr lang="en-US" dirty="0"/>
+              <a:t>Encerramento: agradecer a atenção da turma/banca, reforçar o nome do projeto e disponibilizar contato para dúvidas. Abrir espaço para perguntas.</a:t>
+            </a:r>
+          </a:p>
+        </p:txBody>
+      </p:sp>
+      <p:sp>
+        <p:nvSpPr>
+          <p:cNvPr id="4" name="Slide Number Placeholder 3"/>
+          <p:cNvSpPr>
+            <a:spLocks noGrp="1"/>
+          </p:cNvSpPr>
+          <p:nvPr>
+            <p:ph type="sldNum" sz="quarter" idx="10"/>
+          </p:nvPr>
+        </p:nvSpPr>
+        <p:spPr/>
+        <p:txBody>
+          <a:bodyPr/>
+          <a:lstStyle/>
+          <a:p>
+            <a:fld id="{F7021451-1387-4CA6-816F-3879F97B5CBC}" type="slidenum">
+              <a:rPr lang="en-US"/>
+              <a:t>11</a:t>
             </a:fld>
             <a:endParaRPr lang="en-US"/>
           </a:p>
@@ -598,7 +786,6 @@
               <a:rPr lang="en-US" dirty="0"/>
               <a:t>TEMPO: 30 segundos. Retomar rapidamente o problema já apresentado nas Práticas 1 e 2: gestão de obras feita de forma manual e informal, dificultando o acompanhamento pelo cliente e o controle de custos/material.</a:t>
             </a:r>
-            <a:endParaRPr lang="en-US" dirty="0"/>
           </a:p>
         </p:txBody>
       </p:sp>
@@ -686,7 +873,6 @@
               <a:rPr lang="en-US" dirty="0"/>
               <a:t>TEMPO: 30 segundos. Apresentar a proposta computacional definida nas Práticas 1 e 2: uma plataforma web que digitaliza o diário de obra e usa IA para gerar cronograma, analisar progresso e orçar materiais.</a:t>
             </a:r>
-            <a:endParaRPr lang="en-US" dirty="0"/>
           </a:p>
         </p:txBody>
       </p:sp>
@@ -774,7 +960,6 @@
               <a:rPr lang="en-US" dirty="0"/>
               <a:t>TEMPO: 1 minuto. Mostrar o DER atualizado após a Entrega 1: entidades USUARIO, OBRA, REGISTRO (diário), ORCAMENTO, CRONOGRAMA e SOBRAS, destacando o relacionamento entre mestre de obras, cliente e obra.</a:t>
             </a:r>
-            <a:endParaRPr lang="en-US" dirty="0"/>
           </a:p>
         </p:txBody>
       </p:sp>
@@ -862,7 +1047,6 @@
               <a:rPr lang="en-US" dirty="0"/>
               <a:t>TEMPO: 1 minuto. Explicar os três atores — Mestre de Obras, Cliente/Proprietário e Comprador de sobras — e os principais casos de uso: cadastrar obra, registrar progresso, anexar fotos/vídeos, consultar preços, publicar e buscar sobras, estudar com IA.</a:t>
             </a:r>
-            <a:endParaRPr lang="en-US" dirty="0"/>
           </a:p>
         </p:txBody>
       </p:sp>
@@ -950,7 +1134,6 @@
               <a:rPr lang="en-US" dirty="0"/>
               <a:t>TEMPO: 5 minutos (fora dos slides). Sair da apresentação e abrir a aplicação rodando. Mostrar, nesta ordem: (1) interface principal/dashboard; (2) uma tela de CRUD (ex.: cadastro de obras); (3) uma tela de consulta/pesquisa/relatório (ex.: análise de dados); (4) o formulário de contato com os desenvolvedores. Voltar aos slides para o encerramento.</a:t>
             </a:r>
-            <a:endParaRPr lang="en-US" dirty="0"/>
           </a:p>
         </p:txBody>
       </p:sp>
@@ -1036,9 +1219,8 @@
           <a:p>
             <a:r>
               <a:rPr lang="en-US" dirty="0"/>
-              <a:t>Encerramento: agradecer a atenção da turma/banca, reforçar o nome do projeto e disponibilizar contato para dúvidas. Abrir espaço para perguntas.</a:t>
-            </a:r>
-            <a:endParaRPr lang="en-US" dirty="0"/>
+              <a:t>Ponto 1 da demonstração: interface principal (dashboard). Mostrar as métricas de obras e o menu lateral com todos os módulos.</a:t>
+            </a:r>
           </a:p>
         </p:txBody>
       </p:sp>
@@ -1060,6 +1242,180 @@
             <a:fld id="{F7021451-1387-4CA6-816F-3879F97B5CBC}" type="slidenum">
               <a:rPr lang="en-US"/>
               <a:t>7</a:t>
+            </a:fld>
+            <a:endParaRPr lang="en-US"/>
+          </a:p>
+        </p:txBody>
+      </p:sp>
+    </p:spTree>
+    <p:extLst>
+      <p:ext uri="{BB962C8B-B14F-4D97-AF65-F5344CB8AC3E}">
+        <p14:creationId xmlns:p14="http://schemas.microsoft.com/office/powerpoint/2010/main" val="1024086991"/>
+      </p:ext>
+    </p:extLst>
+  </p:cSld>
+  <p:clrMapOvr>
+    <a:masterClrMapping/>
+  </p:clrMapOvr>
+</p:notes>
+</file>
+
+<file path=ppt/notesSlides/notesSlide8.xml><?xml version="1.0" encoding="utf-8"?>
+<p:notes xmlns:a="http://schemas.openxmlformats.org/drawingml/2006/main" xmlns:r="http://schemas.openxmlformats.org/officeDocument/2006/relationships" xmlns:p="http://schemas.openxmlformats.org/presentationml/2006/main">
+  <p:cSld>
+    <p:spTree>
+      <p:nvGrpSpPr>
+        <p:cNvPr id="1" name=""/>
+        <p:cNvGrpSpPr/>
+        <p:nvPr/>
+      </p:nvGrpSpPr>
+      <p:grpSpPr>
+        <a:xfrm>
+          <a:off x="0" y="0"/>
+          <a:ext cx="0" cy="0"/>
+          <a:chOff x="0" y="0"/>
+          <a:chExt cx="0" cy="0"/>
+        </a:xfrm>
+      </p:grpSpPr>
+      <p:sp>
+        <p:nvSpPr>
+          <p:cNvPr id="2" name="Slide Image Placeholder 1"/>
+          <p:cNvSpPr>
+            <a:spLocks noGrp="1" noRot="1" noChangeAspect="1"/>
+          </p:cNvSpPr>
+          <p:nvPr>
+            <p:ph type="sldImg"/>
+          </p:nvPr>
+        </p:nvSpPr>
+        <p:spPr/>
+      </p:sp>
+      <p:sp>
+        <p:nvSpPr>
+          <p:cNvPr id="3" name="Notes Placeholder 2"/>
+          <p:cNvSpPr>
+            <a:spLocks noGrp="1"/>
+          </p:cNvSpPr>
+          <p:nvPr>
+            <p:ph type="body" idx="1"/>
+          </p:nvPr>
+        </p:nvSpPr>
+        <p:spPr/>
+        <p:txBody>
+          <a:bodyPr/>
+          <a:lstStyle/>
+          <a:p>
+            <a:r>
+              <a:rPr lang="en-US" dirty="0"/>
+              <a:t>Ponto 2 da demonstração: interface de CRUD. Formulário de cadastro de obra; a aba 'Lista de Obras' mostra os registros já criados.</a:t>
+            </a:r>
+          </a:p>
+        </p:txBody>
+      </p:sp>
+      <p:sp>
+        <p:nvSpPr>
+          <p:cNvPr id="4" name="Slide Number Placeholder 3"/>
+          <p:cNvSpPr>
+            <a:spLocks noGrp="1"/>
+          </p:cNvSpPr>
+          <p:nvPr>
+            <p:ph type="sldNum" sz="quarter" idx="10"/>
+          </p:nvPr>
+        </p:nvSpPr>
+        <p:spPr/>
+        <p:txBody>
+          <a:bodyPr/>
+          <a:lstStyle/>
+          <a:p>
+            <a:fld id="{F7021451-1387-4CA6-816F-3879F97B5CBC}" type="slidenum">
+              <a:rPr lang="en-US"/>
+              <a:t>8</a:t>
+            </a:fld>
+            <a:endParaRPr lang="en-US"/>
+          </a:p>
+        </p:txBody>
+      </p:sp>
+    </p:spTree>
+    <p:extLst>
+      <p:ext uri="{BB962C8B-B14F-4D97-AF65-F5344CB8AC3E}">
+        <p14:creationId xmlns:p14="http://schemas.microsoft.com/office/powerpoint/2010/main" val="1024086991"/>
+      </p:ext>
+    </p:extLst>
+  </p:cSld>
+  <p:clrMapOvr>
+    <a:masterClrMapping/>
+  </p:clrMapOvr>
+</p:notes>
+</file>
+
+<file path=ppt/notesSlides/notesSlide9.xml><?xml version="1.0" encoding="utf-8"?>
+<p:notes xmlns:a="http://schemas.openxmlformats.org/drawingml/2006/main" xmlns:r="http://schemas.openxmlformats.org/officeDocument/2006/relationships" xmlns:p="http://schemas.openxmlformats.org/presentationml/2006/main">
+  <p:cSld>
+    <p:spTree>
+      <p:nvGrpSpPr>
+        <p:cNvPr id="1" name=""/>
+        <p:cNvGrpSpPr/>
+        <p:nvPr/>
+      </p:nvGrpSpPr>
+      <p:grpSpPr>
+        <a:xfrm>
+          <a:off x="0" y="0"/>
+          <a:ext cx="0" cy="0"/>
+          <a:chOff x="0" y="0"/>
+          <a:chExt cx="0" cy="0"/>
+        </a:xfrm>
+      </p:grpSpPr>
+      <p:sp>
+        <p:nvSpPr>
+          <p:cNvPr id="2" name="Slide Image Placeholder 1"/>
+          <p:cNvSpPr>
+            <a:spLocks noGrp="1" noRot="1" noChangeAspect="1"/>
+          </p:cNvSpPr>
+          <p:nvPr>
+            <p:ph type="sldImg"/>
+          </p:nvPr>
+        </p:nvSpPr>
+        <p:spPr/>
+      </p:sp>
+      <p:sp>
+        <p:nvSpPr>
+          <p:cNvPr id="3" name="Notes Placeholder 2"/>
+          <p:cNvSpPr>
+            <a:spLocks noGrp="1"/>
+          </p:cNvSpPr>
+          <p:nvPr>
+            <p:ph type="body" idx="1"/>
+          </p:nvPr>
+        </p:nvSpPr>
+        <p:spPr/>
+        <p:txBody>
+          <a:bodyPr/>
+          <a:lstStyle/>
+          <a:p>
+            <a:r>
+              <a:rPr lang="en-US" dirty="0"/>
+              <a:t>Ponto 3 da demonstração: interface de consulta/pesquisa/relatório. Relatório de orçamento com total e itens; o Mercado de Sobras também oferece pesquisa de materiais.</a:t>
+            </a:r>
+          </a:p>
+        </p:txBody>
+      </p:sp>
+      <p:sp>
+        <p:nvSpPr>
+          <p:cNvPr id="4" name="Slide Number Placeholder 3"/>
+          <p:cNvSpPr>
+            <a:spLocks noGrp="1"/>
+          </p:cNvSpPr>
+          <p:nvPr>
+            <p:ph type="sldNum" sz="quarter" idx="10"/>
+          </p:nvPr>
+        </p:nvSpPr>
+        <p:spPr/>
+        <p:txBody>
+          <a:bodyPr/>
+          <a:lstStyle/>
+          <a:p>
+            <a:fld id="{F7021451-1387-4CA6-816F-3879F97B5CBC}" type="slidenum">
+              <a:rPr lang="en-US"/>
+              <a:t>9</a:t>
             </a:fld>
             <a:endParaRPr lang="en-US"/>
           </a:p>
@@ -1111,6 +1467,11 @@
 <file path=ppt/slideMasters/slideMaster1.xml><?xml version="1.0" encoding="utf-8"?>
 <p:sldMaster xmlns:a="http://schemas.openxmlformats.org/drawingml/2006/main" xmlns:r="http://schemas.openxmlformats.org/officeDocument/2006/relationships" xmlns:p="http://schemas.openxmlformats.org/presentationml/2006/main">
   <p:cSld>
+    <p:bg>
+      <p:bgRef idx="1001">
+        <a:schemeClr val="bg1"/>
+      </p:bgRef>
+    </p:bg>
     <p:spTree>
       <p:nvGrpSpPr>
         <p:cNvPr id="1" name=""/>
@@ -1393,6 +1754,7 @@
         <a:solidFill>
           <a:srgbClr val="1B1E24"/>
         </a:solidFill>
+        <a:effectLst/>
       </p:bgPr>
     </p:bg>
     <p:spTree>
@@ -1474,11 +1836,11 @@
           <a:bodyPr wrap="square" lIns="0" tIns="0" rIns="0" bIns="0" rtlCol="0" anchor="ctr"/>
           <a:lstStyle/>
           <a:p>
-            <a:pPr algn="l" indent="0" marL="0">
-              <a:buNone/>
-            </a:pPr>
-            <a:r>
-              <a:rPr lang="en-US" sz="1300" b="1" spc="300" kern="0" dirty="0">
+            <a:pPr marL="0" indent="0" algn="l">
+              <a:buNone/>
+            </a:pPr>
+            <a:r>
+              <a:rPr lang="en-US" sz="1300" b="1" kern="0" spc="300" dirty="0">
                 <a:solidFill>
                   <a:srgbClr val="E8590C"/>
                 </a:solidFill>
@@ -1513,7 +1875,7 @@
           <a:bodyPr wrap="square" lIns="0" tIns="0" rIns="0" bIns="0" rtlCol="0" anchor="ctr"/>
           <a:lstStyle/>
           <a:p>
-            <a:pPr algn="l" indent="0" marL="0">
+            <a:pPr marL="0" indent="0" algn="l">
               <a:buNone/>
             </a:pPr>
             <a:r>
@@ -1552,7 +1914,7 @@
           <a:bodyPr wrap="square" lIns="0" tIns="0" rIns="0" bIns="0" rtlCol="0" anchor="ctr"/>
           <a:lstStyle/>
           <a:p>
-            <a:pPr algn="l" indent="0" marL="0">
+            <a:pPr marL="0" indent="0" algn="l">
               <a:buNone/>
             </a:pPr>
             <a:r>
@@ -1578,12 +1940,12 @@
         </p:nvSpPr>
         <p:spPr>
           <a:xfrm>
-            <a:off x="822960" y="5349240"/>
-            <a:ext cx="5120640" cy="960120"/>
+            <a:off x="822960" y="5212080"/>
+            <a:ext cx="7680960" cy="1097280"/>
           </a:xfrm>
           <a:prstGeom prst="roundRect">
             <a:avLst>
-              <a:gd name="adj" fmla="val 7619"/>
+              <a:gd name="adj" fmla="val 6667"/>
             </a:avLst>
           </a:prstGeom>
           <a:solidFill>
@@ -1600,8 +1962,8 @@
         </p:nvSpPr>
         <p:spPr>
           <a:xfrm>
-            <a:off x="1097280" y="5349240"/>
-            <a:ext cx="4572000" cy="960120"/>
+            <a:off x="1097280" y="5212080"/>
+            <a:ext cx="7223760" cy="1097280"/>
           </a:xfrm>
           <a:prstGeom prst="rect">
             <a:avLst/>
@@ -1613,14 +1975,14 @@
           <a:bodyPr wrap="square" lIns="0" tIns="0" rIns="0" bIns="0" rtlCol="0" anchor="ctr"/>
           <a:lstStyle/>
           <a:p>
-            <a:pPr algn="l" indent="0" marL="0">
+            <a:pPr marL="0" indent="0" algn="l">
               <a:spcAft>
-                <a:spcPts val="200"/>
+                <a:spcPts val="300"/>
               </a:spcAft>
               <a:buNone/>
             </a:pPr>
             <a:r>
-              <a:rPr lang="en-US" sz="1400" b="1" dirty="0">
+              <a:rPr lang="en-US" sz="1600" b="1" dirty="0">
                 <a:solidFill>
                   <a:srgbClr val="FFFFFF"/>
                 </a:solidFill>
@@ -1630,27 +1992,27 @@
               </a:rPr>
               <a:t>Wagner Machado dos Santos</a:t>
             </a:r>
-            <a:endParaRPr lang="en-US" sz="1400" dirty="0"/>
-          </a:p>
-          <a:p>
-            <a:pPr algn="l" indent="0" marL="0">
+            <a:endParaRPr lang="en-US" sz="1600" dirty="0"/>
+          </a:p>
+          <a:p>
+            <a:pPr marL="0" indent="0" algn="l">
               <a:spcAft>
-                <a:spcPts val="200"/>
+                <a:spcPts val="300"/>
               </a:spcAft>
               <a:buNone/>
             </a:pPr>
             <a:r>
-              <a:rPr lang="en-US" sz="1400" dirty="0">
-                <a:solidFill>
-                  <a:srgbClr val="FFFFFF"/>
+              <a:rPr lang="en-US" sz="1250" dirty="0">
+                <a:solidFill>
+                  <a:srgbClr val="A9AFB8"/>
                 </a:solidFill>
                 <a:latin typeface="Calibri" pitchFamily="34" charset="0"/>
                 <a:ea typeface="Calibri" pitchFamily="34" charset="-122"/>
                 <a:cs typeface="Calibri" pitchFamily="34" charset="-120"/>
               </a:rPr>
-              <a:t>Tecnologia em Ciência de Dados</a:t>
-            </a:r>
-            <a:endParaRPr lang="en-US" sz="1400" dirty="0"/>
+              <a:t>Acadêmico de Ciência de Dados e Inteligência Artificial</a:t>
+            </a:r>
+            <a:endParaRPr lang="en-US" sz="1600" dirty="0"/>
           </a:p>
         </p:txBody>
       </p:sp>
@@ -1662,14 +2024,15 @@
 </p:sld>
 </file>
 
-<file path=ppt/slides/slide2.xml><?xml version="1.0" encoding="utf-8"?>
+<file path=ppt/slides/slide10.xml><?xml version="1.0" encoding="utf-8"?>
 <p:sld xmlns:a="http://schemas.openxmlformats.org/drawingml/2006/main" xmlns:r="http://schemas.openxmlformats.org/officeDocument/2006/relationships" xmlns:p="http://schemas.openxmlformats.org/presentationml/2006/main">
-  <p:cSld name="Slide 2">
+  <p:cSld name="Slide 10">
     <p:bg>
       <p:bgPr>
         <a:solidFill>
-          <a:srgbClr val="FFFFFF"/>
+          <a:srgbClr val="1B1E24"/>
         </a:solidFill>
+        <a:effectLst/>
       </p:bgPr>
     </p:bg>
     <p:spTree>
@@ -1694,7 +2057,7 @@
         </p:nvSpPr>
         <p:spPr>
           <a:xfrm>
-            <a:off x="640080" y="566928"/>
+            <a:off x="640080" y="502920"/>
             <a:ext cx="292608" cy="292608"/>
           </a:xfrm>
           <a:prstGeom prst="ellipse">
@@ -1714,8 +2077,8 @@
         </p:nvSpPr>
         <p:spPr>
           <a:xfrm>
-            <a:off x="1097280" y="384048"/>
-            <a:ext cx="9601200" cy="640080"/>
+            <a:off x="1097280" y="320040"/>
+            <a:ext cx="7680960" cy="594360"/>
           </a:xfrm>
           <a:prstGeom prst="rect">
             <a:avLst/>
@@ -1727,21 +2090,21 @@
           <a:bodyPr wrap="square" lIns="0" tIns="0" rIns="0" bIns="0" rtlCol="0" anchor="ctr"/>
           <a:lstStyle/>
           <a:p>
-            <a:pPr algn="l" indent="0" marL="0">
-              <a:buNone/>
-            </a:pPr>
-            <a:r>
-              <a:rPr lang="en-US" sz="3000" b="1" dirty="0">
-                <a:solidFill>
-                  <a:srgbClr val="1B1E24"/>
+            <a:pPr marL="0" indent="0" algn="l">
+              <a:buNone/>
+            </a:pPr>
+            <a:r>
+              <a:rPr lang="en-US" sz="2700" b="1" dirty="0">
+                <a:solidFill>
+                  <a:srgbClr val="FFFFFF"/>
                 </a:solidFill>
                 <a:latin typeface="Bookman Old Style" pitchFamily="34" charset="0"/>
                 <a:ea typeface="Bookman Old Style" pitchFamily="34" charset="-122"/>
                 <a:cs typeface="Bookman Old Style" pitchFamily="34" charset="-120"/>
               </a:rPr>
-              <a:t>O Problema</a:t>
-            </a:r>
-            <a:endParaRPr lang="en-US" sz="3000" dirty="0"/>
+              <a:t>Protótipo — Fale Conosco</a:t>
+            </a:r>
+            <a:endParaRPr lang="en-US" sz="2700" dirty="0"/>
           </a:p>
         </p:txBody>
       </p:sp>
@@ -1753,8 +2116,8 @@
         </p:nvSpPr>
         <p:spPr>
           <a:xfrm>
-            <a:off x="640080" y="1078992"/>
-            <a:ext cx="10881360" cy="411480"/>
+            <a:off x="1097280" y="896112"/>
+            <a:ext cx="7680960" cy="365760"/>
           </a:xfrm>
           <a:prstGeom prst="rect">
             <a:avLst/>
@@ -1766,21 +2129,21 @@
           <a:bodyPr wrap="square" lIns="0" tIns="0" rIns="0" bIns="0" rtlCol="0" anchor="t"/>
           <a:lstStyle/>
           <a:p>
-            <a:pPr algn="l" indent="0" marL="0">
-              <a:buNone/>
-            </a:pPr>
-            <a:r>
-              <a:rPr lang="en-US" sz="1400" i="1" dirty="0">
-                <a:solidFill>
-                  <a:srgbClr val="5B6472"/>
+            <a:pPr marL="0" indent="0" algn="l">
+              <a:buNone/>
+            </a:pPr>
+            <a:r>
+              <a:rPr lang="en-US" sz="1300" i="1" dirty="0">
+                <a:solidFill>
+                  <a:srgbClr val="A9AFB8"/>
                 </a:solidFill>
                 <a:latin typeface="Calibri" pitchFamily="34" charset="0"/>
                 <a:ea typeface="Calibri" pitchFamily="34" charset="-122"/>
                 <a:cs typeface="Calibri" pitchFamily="34" charset="-120"/>
               </a:rPr>
-              <a:t>Retomando o cenário identificado nas Práticas 1 e 2</a:t>
-            </a:r>
-            <a:endParaRPr lang="en-US" sz="1400" dirty="0"/>
+              <a:t>Formulário de contato com os desenvolvedores da solução.</a:t>
+            </a:r>
+            <a:endParaRPr lang="en-US" sz="1300" dirty="0"/>
           </a:p>
         </p:txBody>
       </p:sp>
@@ -1792,20 +2155,81 @@
         </p:nvSpPr>
         <p:spPr>
           <a:xfrm>
-            <a:off x="640080" y="1554480"/>
-            <a:ext cx="5280660" cy="2011680"/>
+            <a:off x="9189720" y="457200"/>
+            <a:ext cx="2331720" cy="502920"/>
           </a:xfrm>
           <a:prstGeom prst="roundRect">
             <a:avLst>
-              <a:gd name="adj" fmla="val 3636"/>
+              <a:gd name="adj" fmla="val 49091"/>
             </a:avLst>
           </a:prstGeom>
           <a:solidFill>
-            <a:srgbClr val="F4F5F6"/>
+            <a:srgbClr val="FBE7DA"/>
+          </a:solidFill>
+          <a:ln/>
+        </p:spPr>
+      </p:sp>
+      <p:sp>
+        <p:nvSpPr>
+          <p:cNvPr id="6" name="Text 4"/>
+          <p:cNvSpPr/>
+          <p:nvPr/>
+        </p:nvSpPr>
+        <p:spPr>
+          <a:xfrm>
+            <a:off x="9189720" y="457200"/>
+            <a:ext cx="2331720" cy="502920"/>
+          </a:xfrm>
+          <a:prstGeom prst="rect">
+            <a:avLst/>
+          </a:prstGeom>
+          <a:noFill/>
+          <a:ln/>
+        </p:spPr>
+        <p:txBody>
+          <a:bodyPr wrap="square" lIns="0" tIns="0" rIns="0" bIns="0" rtlCol="0" anchor="ctr"/>
+          <a:lstStyle/>
+          <a:p>
+            <a:pPr marL="0" indent="0" algn="ctr">
+              <a:buNone/>
+            </a:pPr>
+            <a:r>
+              <a:rPr lang="en-US" sz="1150" b="1" dirty="0">
+                <a:solidFill>
+                  <a:srgbClr val="E8590C"/>
+                </a:solidFill>
+                <a:latin typeface="Calibri" pitchFamily="34" charset="0"/>
+                <a:ea typeface="Calibri" pitchFamily="34" charset="-122"/>
+                <a:cs typeface="Calibri" pitchFamily="34" charset="-120"/>
+              </a:rPr>
+              <a:t>4 · Contato</a:t>
+            </a:r>
+            <a:endParaRPr lang="en-US" sz="1150" dirty="0"/>
+          </a:p>
+        </p:txBody>
+      </p:sp>
+      <p:sp>
+        <p:nvSpPr>
+          <p:cNvPr id="7" name="Shape 5"/>
+          <p:cNvSpPr/>
+          <p:nvPr/>
+        </p:nvSpPr>
+        <p:spPr>
+          <a:xfrm>
+            <a:off x="1261157" y="1399032"/>
+            <a:ext cx="9669380" cy="5111496"/>
+          </a:xfrm>
+          <a:prstGeom prst="roundRect">
+            <a:avLst>
+              <a:gd name="adj" fmla="val 894"/>
+            </a:avLst>
+          </a:prstGeom>
+          <a:solidFill>
+            <a:srgbClr val="262B34"/>
           </a:solidFill>
           <a:ln/>
           <a:effectLst>
-            <a:outerShdw sx="100000" sy="100000" kx="0" ky="0" algn="bl" rotWithShape="0" blurRad="101600" dist="38100" dir="2700000">
+            <a:outerShdw blurRad="101600" dist="38100" dir="2700000" algn="bl" rotWithShape="0">
               <a:srgbClr val="000000">
                 <a:alpha val="15000"/>
               </a:srgbClr>
@@ -1813,653 +2237,29 @@
           </a:effectLst>
         </p:spPr>
       </p:sp>
-      <p:sp>
-        <p:nvSpPr>
-          <p:cNvPr id="6" name="Shape 4"/>
-          <p:cNvSpPr/>
-          <p:nvPr/>
-        </p:nvSpPr>
-        <p:spPr>
-          <a:xfrm>
-            <a:off x="868680" y="1783080"/>
-            <a:ext cx="457200" cy="457200"/>
-          </a:xfrm>
-          <a:prstGeom prst="ellipse">
-            <a:avLst/>
-          </a:prstGeom>
-          <a:solidFill>
-            <a:srgbClr val="E8590C"/>
-          </a:solidFill>
-          <a:ln/>
-        </p:spPr>
-      </p:sp>
-      <p:sp>
-        <p:nvSpPr>
-          <p:cNvPr id="7" name="Text 5"/>
-          <p:cNvSpPr/>
-          <p:nvPr/>
-        </p:nvSpPr>
-        <p:spPr>
-          <a:xfrm>
-            <a:off x="868680" y="1783080"/>
-            <a:ext cx="457200" cy="457200"/>
-          </a:xfrm>
-          <a:prstGeom prst="rect">
-            <a:avLst/>
-          </a:prstGeom>
-          <a:noFill/>
-          <a:ln/>
-        </p:spPr>
-        <p:txBody>
-          <a:bodyPr wrap="square" lIns="0" tIns="0" rIns="0" bIns="0" rtlCol="0" anchor="ctr"/>
-          <a:lstStyle/>
-          <a:p>
-            <a:pPr algn="ctr" indent="0" marL="0">
-              <a:buNone/>
-            </a:pPr>
-            <a:r>
-              <a:rPr lang="en-US" sz="1800" b="1" dirty="0">
-                <a:solidFill>
-                  <a:srgbClr val="FFFFFF"/>
-                </a:solidFill>
-                <a:latin typeface="Calibri" pitchFamily="34" charset="0"/>
-                <a:ea typeface="Calibri" pitchFamily="34" charset="-122"/>
-                <a:cs typeface="Calibri" pitchFamily="34" charset="-120"/>
-              </a:rPr>
-              <a:t>1</a:t>
-            </a:r>
-            <a:endParaRPr lang="en-US" sz="1800" dirty="0"/>
-          </a:p>
-        </p:txBody>
-      </p:sp>
-      <p:sp>
-        <p:nvSpPr>
-          <p:cNvPr id="8" name="Text 6"/>
-          <p:cNvSpPr/>
-          <p:nvPr/>
-        </p:nvSpPr>
-        <p:spPr>
-          <a:xfrm>
-            <a:off x="914400" y="2331720"/>
-            <a:ext cx="4732020" cy="384048"/>
-          </a:xfrm>
-          <a:prstGeom prst="rect">
-            <a:avLst/>
-          </a:prstGeom>
-          <a:noFill/>
-          <a:ln/>
-        </p:spPr>
-        <p:txBody>
-          <a:bodyPr wrap="square" lIns="0" tIns="0" rIns="0" bIns="0" rtlCol="0" anchor="t"/>
-          <a:lstStyle/>
-          <a:p>
-            <a:pPr algn="l" indent="0" marL="0">
-              <a:buNone/>
-            </a:pPr>
-            <a:r>
-              <a:rPr lang="en-US" sz="1500" b="1" dirty="0">
-                <a:solidFill>
-                  <a:srgbClr val="1B1E24"/>
-                </a:solidFill>
-                <a:latin typeface="Calibri" pitchFamily="34" charset="0"/>
-                <a:ea typeface="Calibri" pitchFamily="34" charset="-122"/>
-                <a:cs typeface="Calibri" pitchFamily="34" charset="-120"/>
-              </a:rPr>
-              <a:t>Controle manual e disperso</a:t>
-            </a:r>
-            <a:endParaRPr lang="en-US" sz="1500" dirty="0"/>
-          </a:p>
-        </p:txBody>
-      </p:sp>
-      <p:sp>
-        <p:nvSpPr>
-          <p:cNvPr id="9" name="Text 7"/>
-          <p:cNvSpPr/>
-          <p:nvPr/>
-        </p:nvSpPr>
-        <p:spPr>
-          <a:xfrm>
-            <a:off x="914400" y="2724912"/>
-            <a:ext cx="4732020" cy="685800"/>
-          </a:xfrm>
-          <a:prstGeom prst="rect">
-            <a:avLst/>
-          </a:prstGeom>
-          <a:noFill/>
-          <a:ln/>
-        </p:spPr>
-        <p:txBody>
-          <a:bodyPr wrap="square" lIns="0" tIns="0" rIns="0" bIns="0" rtlCol="0" anchor="t"/>
-          <a:lstStyle/>
-          <a:p>
-            <a:pPr algn="l" indent="0" marL="0">
-              <a:lnSpc>
-                <a:spcPct val="100000"/>
-              </a:lnSpc>
-              <a:buNone/>
-            </a:pPr>
-            <a:r>
-              <a:rPr lang="en-US" sz="1050" dirty="0">
-                <a:solidFill>
-                  <a:srgbClr val="5B6472"/>
-                </a:solidFill>
-                <a:latin typeface="Calibri" pitchFamily="34" charset="0"/>
-                <a:ea typeface="Calibri" pitchFamily="34" charset="-122"/>
-                <a:cs typeface="Calibri" pitchFamily="34" charset="-120"/>
-              </a:rPr>
-              <a:t>Progresso da obra registrado em papel, planilhas soltas e conversas de WhatsApp, sem histórico confiável.</a:t>
-            </a:r>
-            <a:endParaRPr lang="en-US" sz="1050" dirty="0"/>
-          </a:p>
-        </p:txBody>
-      </p:sp>
-      <p:sp>
-        <p:nvSpPr>
-          <p:cNvPr id="10" name="Shape 8"/>
-          <p:cNvSpPr/>
-          <p:nvPr/>
-        </p:nvSpPr>
-        <p:spPr>
-          <a:xfrm>
-            <a:off x="6240780" y="1554480"/>
-            <a:ext cx="5280660" cy="2011680"/>
-          </a:xfrm>
-          <a:prstGeom prst="roundRect">
-            <a:avLst>
-              <a:gd name="adj" fmla="val 3636"/>
-            </a:avLst>
-          </a:prstGeom>
-          <a:solidFill>
-            <a:srgbClr val="F4F5F6"/>
-          </a:solidFill>
-          <a:ln/>
-          <a:effectLst>
-            <a:outerShdw sx="100000" sy="100000" kx="0" ky="0" algn="bl" rotWithShape="0" blurRad="101600" dist="38100" dir="2700000">
-              <a:srgbClr val="000000">
-                <a:alpha val="15000"/>
-              </a:srgbClr>
-            </a:outerShdw>
-          </a:effectLst>
-        </p:spPr>
-      </p:sp>
-      <p:sp>
-        <p:nvSpPr>
-          <p:cNvPr id="11" name="Shape 9"/>
-          <p:cNvSpPr/>
-          <p:nvPr/>
-        </p:nvSpPr>
-        <p:spPr>
-          <a:xfrm>
-            <a:off x="6469380" y="1783080"/>
-            <a:ext cx="457200" cy="457200"/>
-          </a:xfrm>
-          <a:prstGeom prst="ellipse">
-            <a:avLst/>
-          </a:prstGeom>
-          <a:solidFill>
-            <a:srgbClr val="E8590C"/>
-          </a:solidFill>
-          <a:ln/>
-        </p:spPr>
-      </p:sp>
-      <p:sp>
-        <p:nvSpPr>
-          <p:cNvPr id="12" name="Text 10"/>
-          <p:cNvSpPr/>
-          <p:nvPr/>
-        </p:nvSpPr>
-        <p:spPr>
-          <a:xfrm>
-            <a:off x="6469380" y="1783080"/>
-            <a:ext cx="457200" cy="457200"/>
-          </a:xfrm>
-          <a:prstGeom prst="rect">
-            <a:avLst/>
-          </a:prstGeom>
-          <a:noFill/>
-          <a:ln/>
-        </p:spPr>
-        <p:txBody>
-          <a:bodyPr wrap="square" lIns="0" tIns="0" rIns="0" bIns="0" rtlCol="0" anchor="ctr"/>
-          <a:lstStyle/>
-          <a:p>
-            <a:pPr algn="ctr" indent="0" marL="0">
-              <a:buNone/>
-            </a:pPr>
-            <a:r>
-              <a:rPr lang="en-US" sz="1800" b="1" dirty="0">
-                <a:solidFill>
-                  <a:srgbClr val="FFFFFF"/>
-                </a:solidFill>
-                <a:latin typeface="Calibri" pitchFamily="34" charset="0"/>
-                <a:ea typeface="Calibri" pitchFamily="34" charset="-122"/>
-                <a:cs typeface="Calibri" pitchFamily="34" charset="-120"/>
-              </a:rPr>
-              <a:t>2</a:t>
-            </a:r>
-            <a:endParaRPr lang="en-US" sz="1800" dirty="0"/>
-          </a:p>
-        </p:txBody>
-      </p:sp>
-      <p:sp>
-        <p:nvSpPr>
-          <p:cNvPr id="13" name="Text 11"/>
-          <p:cNvSpPr/>
-          <p:nvPr/>
-        </p:nvSpPr>
-        <p:spPr>
-          <a:xfrm>
-            <a:off x="6515100" y="2331720"/>
-            <a:ext cx="4732020" cy="384048"/>
-          </a:xfrm>
-          <a:prstGeom prst="rect">
-            <a:avLst/>
-          </a:prstGeom>
-          <a:noFill/>
-          <a:ln/>
-        </p:spPr>
-        <p:txBody>
-          <a:bodyPr wrap="square" lIns="0" tIns="0" rIns="0" bIns="0" rtlCol="0" anchor="t"/>
-          <a:lstStyle/>
-          <a:p>
-            <a:pPr algn="l" indent="0" marL="0">
-              <a:buNone/>
-            </a:pPr>
-            <a:r>
-              <a:rPr lang="en-US" sz="1500" b="1" dirty="0">
-                <a:solidFill>
-                  <a:srgbClr val="1B1E24"/>
-                </a:solidFill>
-                <a:latin typeface="Calibri" pitchFamily="34" charset="0"/>
-                <a:ea typeface="Calibri" pitchFamily="34" charset="-122"/>
-                <a:cs typeface="Calibri" pitchFamily="34" charset="-120"/>
-              </a:rPr>
-              <a:t>Cliente sem visibilidade</a:t>
-            </a:r>
-            <a:endParaRPr lang="en-US" sz="1500" dirty="0"/>
-          </a:p>
-        </p:txBody>
-      </p:sp>
-      <p:sp>
-        <p:nvSpPr>
-          <p:cNvPr id="14" name="Text 12"/>
-          <p:cNvSpPr/>
-          <p:nvPr/>
-        </p:nvSpPr>
-        <p:spPr>
-          <a:xfrm>
-            <a:off x="6515100" y="2724912"/>
-            <a:ext cx="4732020" cy="685800"/>
-          </a:xfrm>
-          <a:prstGeom prst="rect">
-            <a:avLst/>
-          </a:prstGeom>
-          <a:noFill/>
-          <a:ln/>
-        </p:spPr>
-        <p:txBody>
-          <a:bodyPr wrap="square" lIns="0" tIns="0" rIns="0" bIns="0" rtlCol="0" anchor="t"/>
-          <a:lstStyle/>
-          <a:p>
-            <a:pPr algn="l" indent="0" marL="0">
-              <a:lnSpc>
-                <a:spcPct val="100000"/>
-              </a:lnSpc>
-              <a:buNone/>
-            </a:pPr>
-            <a:r>
-              <a:rPr lang="en-US" sz="1050" dirty="0">
-                <a:solidFill>
-                  <a:srgbClr val="5B6472"/>
-                </a:solidFill>
-                <a:latin typeface="Calibri" pitchFamily="34" charset="0"/>
-                <a:ea typeface="Calibri" pitchFamily="34" charset="-122"/>
-                <a:cs typeface="Calibri" pitchFamily="34" charset="-120"/>
-              </a:rPr>
-              <a:t>O proprietário não acompanha o andamento real da obra e depende de repasses informais do mestre de obras.</a:t>
-            </a:r>
-            <a:endParaRPr lang="en-US" sz="1050" dirty="0"/>
-          </a:p>
-        </p:txBody>
-      </p:sp>
-      <p:sp>
-        <p:nvSpPr>
-          <p:cNvPr id="15" name="Shape 13"/>
-          <p:cNvSpPr/>
-          <p:nvPr/>
-        </p:nvSpPr>
-        <p:spPr>
-          <a:xfrm>
-            <a:off x="640080" y="3794760"/>
-            <a:ext cx="5280660" cy="2011680"/>
-          </a:xfrm>
-          <a:prstGeom prst="roundRect">
-            <a:avLst>
-              <a:gd name="adj" fmla="val 3636"/>
-            </a:avLst>
-          </a:prstGeom>
-          <a:solidFill>
-            <a:srgbClr val="F4F5F6"/>
-          </a:solidFill>
-          <a:ln/>
-          <a:effectLst>
-            <a:outerShdw sx="100000" sy="100000" kx="0" ky="0" algn="bl" rotWithShape="0" blurRad="101600" dist="38100" dir="2700000">
-              <a:srgbClr val="000000">
-                <a:alpha val="15000"/>
-              </a:srgbClr>
-            </a:outerShdw>
-          </a:effectLst>
-        </p:spPr>
-      </p:sp>
-      <p:sp>
-        <p:nvSpPr>
-          <p:cNvPr id="16" name="Shape 14"/>
-          <p:cNvSpPr/>
-          <p:nvPr/>
-        </p:nvSpPr>
-        <p:spPr>
-          <a:xfrm>
-            <a:off x="868680" y="4023360"/>
-            <a:ext cx="457200" cy="457200"/>
-          </a:xfrm>
-          <a:prstGeom prst="ellipse">
-            <a:avLst/>
-          </a:prstGeom>
-          <a:solidFill>
-            <a:srgbClr val="E8590C"/>
-          </a:solidFill>
-          <a:ln/>
-        </p:spPr>
-      </p:sp>
-      <p:sp>
-        <p:nvSpPr>
-          <p:cNvPr id="17" name="Text 15"/>
-          <p:cNvSpPr/>
-          <p:nvPr/>
-        </p:nvSpPr>
-        <p:spPr>
-          <a:xfrm>
-            <a:off x="868680" y="4023360"/>
-            <a:ext cx="457200" cy="457200"/>
-          </a:xfrm>
-          <a:prstGeom prst="rect">
-            <a:avLst/>
-          </a:prstGeom>
-          <a:noFill/>
-          <a:ln/>
-        </p:spPr>
-        <p:txBody>
-          <a:bodyPr wrap="square" lIns="0" tIns="0" rIns="0" bIns="0" rtlCol="0" anchor="ctr"/>
-          <a:lstStyle/>
-          <a:p>
-            <a:pPr algn="ctr" indent="0" marL="0">
-              <a:buNone/>
-            </a:pPr>
-            <a:r>
-              <a:rPr lang="en-US" sz="1800" b="1" dirty="0">
-                <a:solidFill>
-                  <a:srgbClr val="FFFFFF"/>
-                </a:solidFill>
-                <a:latin typeface="Calibri" pitchFamily="34" charset="0"/>
-                <a:ea typeface="Calibri" pitchFamily="34" charset="-122"/>
-                <a:cs typeface="Calibri" pitchFamily="34" charset="-120"/>
-              </a:rPr>
-              <a:t>3</a:t>
-            </a:r>
-            <a:endParaRPr lang="en-US" sz="1800" dirty="0"/>
-          </a:p>
-        </p:txBody>
-      </p:sp>
-      <p:sp>
-        <p:nvSpPr>
-          <p:cNvPr id="18" name="Text 16"/>
-          <p:cNvSpPr/>
-          <p:nvPr/>
-        </p:nvSpPr>
-        <p:spPr>
-          <a:xfrm>
-            <a:off x="914400" y="4572000"/>
-            <a:ext cx="4732020" cy="384048"/>
-          </a:xfrm>
-          <a:prstGeom prst="rect">
-            <a:avLst/>
-          </a:prstGeom>
-          <a:noFill/>
-          <a:ln/>
-        </p:spPr>
-        <p:txBody>
-          <a:bodyPr wrap="square" lIns="0" tIns="0" rIns="0" bIns="0" rtlCol="0" anchor="t"/>
-          <a:lstStyle/>
-          <a:p>
-            <a:pPr algn="l" indent="0" marL="0">
-              <a:buNone/>
-            </a:pPr>
-            <a:r>
-              <a:rPr lang="en-US" sz="1500" b="1" dirty="0">
-                <a:solidFill>
-                  <a:srgbClr val="1B1E24"/>
-                </a:solidFill>
-                <a:latin typeface="Calibri" pitchFamily="34" charset="0"/>
-                <a:ea typeface="Calibri" pitchFamily="34" charset="-122"/>
-                <a:cs typeface="Calibri" pitchFamily="34" charset="-120"/>
-              </a:rPr>
-              <a:t>Problemas detectados tarde</a:t>
-            </a:r>
-            <a:endParaRPr lang="en-US" sz="1500" dirty="0"/>
-          </a:p>
-        </p:txBody>
-      </p:sp>
-      <p:sp>
-        <p:nvSpPr>
-          <p:cNvPr id="19" name="Text 17"/>
-          <p:cNvSpPr/>
-          <p:nvPr/>
-        </p:nvSpPr>
-        <p:spPr>
-          <a:xfrm>
-            <a:off x="914400" y="4965192"/>
-            <a:ext cx="4732020" cy="685800"/>
-          </a:xfrm>
-          <a:prstGeom prst="rect">
-            <a:avLst/>
-          </a:prstGeom>
-          <a:noFill/>
-          <a:ln/>
-        </p:spPr>
-        <p:txBody>
-          <a:bodyPr wrap="square" lIns="0" tIns="0" rIns="0" bIns="0" rtlCol="0" anchor="t"/>
-          <a:lstStyle/>
-          <a:p>
-            <a:pPr algn="l" indent="0" marL="0">
-              <a:lnSpc>
-                <a:spcPct val="100000"/>
-              </a:lnSpc>
-              <a:buNone/>
-            </a:pPr>
-            <a:r>
-              <a:rPr lang="en-US" sz="1050" dirty="0">
-                <a:solidFill>
-                  <a:srgbClr val="5B6472"/>
-                </a:solidFill>
-                <a:latin typeface="Calibri" pitchFamily="34" charset="0"/>
-                <a:ea typeface="Calibri" pitchFamily="34" charset="-122"/>
-                <a:cs typeface="Calibri" pitchFamily="34" charset="-120"/>
-              </a:rPr>
-              <a:t>Sem dados estruturados, atrasos e falhas de execução só aparecem quando já geraram retrabalho.</a:t>
-            </a:r>
-            <a:endParaRPr lang="en-US" sz="1050" dirty="0"/>
-          </a:p>
-        </p:txBody>
-      </p:sp>
-      <p:sp>
-        <p:nvSpPr>
-          <p:cNvPr id="20" name="Shape 18"/>
-          <p:cNvSpPr/>
-          <p:nvPr/>
-        </p:nvSpPr>
-        <p:spPr>
-          <a:xfrm>
-            <a:off x="6240780" y="3794760"/>
-            <a:ext cx="5280660" cy="2011680"/>
-          </a:xfrm>
-          <a:prstGeom prst="roundRect">
-            <a:avLst>
-              <a:gd name="adj" fmla="val 3636"/>
-            </a:avLst>
-          </a:prstGeom>
-          <a:solidFill>
-            <a:srgbClr val="F4F5F6"/>
-          </a:solidFill>
-          <a:ln/>
-          <a:effectLst>
-            <a:outerShdw sx="100000" sy="100000" kx="0" ky="0" algn="bl" rotWithShape="0" blurRad="101600" dist="38100" dir="2700000">
-              <a:srgbClr val="000000">
-                <a:alpha val="15000"/>
-              </a:srgbClr>
-            </a:outerShdw>
-          </a:effectLst>
-        </p:spPr>
-      </p:sp>
-      <p:sp>
-        <p:nvSpPr>
-          <p:cNvPr id="21" name="Shape 19"/>
-          <p:cNvSpPr/>
-          <p:nvPr/>
-        </p:nvSpPr>
-        <p:spPr>
-          <a:xfrm>
-            <a:off x="6469380" y="4023360"/>
-            <a:ext cx="457200" cy="457200"/>
-          </a:xfrm>
-          <a:prstGeom prst="ellipse">
-            <a:avLst/>
-          </a:prstGeom>
-          <a:solidFill>
-            <a:srgbClr val="E8590C"/>
-          </a:solidFill>
-          <a:ln/>
-        </p:spPr>
-      </p:sp>
-      <p:sp>
-        <p:nvSpPr>
-          <p:cNvPr id="22" name="Text 20"/>
-          <p:cNvSpPr/>
-          <p:nvPr/>
-        </p:nvSpPr>
-        <p:spPr>
-          <a:xfrm>
-            <a:off x="6469380" y="4023360"/>
-            <a:ext cx="457200" cy="457200"/>
-          </a:xfrm>
-          <a:prstGeom prst="rect">
-            <a:avLst/>
-          </a:prstGeom>
-          <a:noFill/>
-          <a:ln/>
-        </p:spPr>
-        <p:txBody>
-          <a:bodyPr wrap="square" lIns="0" tIns="0" rIns="0" bIns="0" rtlCol="0" anchor="ctr"/>
-          <a:lstStyle/>
-          <a:p>
-            <a:pPr algn="ctr" indent="0" marL="0">
-              <a:buNone/>
-            </a:pPr>
-            <a:r>
-              <a:rPr lang="en-US" sz="1800" b="1" dirty="0">
-                <a:solidFill>
-                  <a:srgbClr val="FFFFFF"/>
-                </a:solidFill>
-                <a:latin typeface="Calibri" pitchFamily="34" charset="0"/>
-                <a:ea typeface="Calibri" pitchFamily="34" charset="-122"/>
-                <a:cs typeface="Calibri" pitchFamily="34" charset="-120"/>
-              </a:rPr>
-              <a:t>4</a:t>
-            </a:r>
-            <a:endParaRPr lang="en-US" sz="1800" dirty="0"/>
-          </a:p>
-        </p:txBody>
-      </p:sp>
-      <p:sp>
-        <p:nvSpPr>
-          <p:cNvPr id="23" name="Text 21"/>
-          <p:cNvSpPr/>
-          <p:nvPr/>
-        </p:nvSpPr>
-        <p:spPr>
-          <a:xfrm>
-            <a:off x="6515100" y="4572000"/>
-            <a:ext cx="4732020" cy="384048"/>
-          </a:xfrm>
-          <a:prstGeom prst="rect">
-            <a:avLst/>
-          </a:prstGeom>
-          <a:noFill/>
-          <a:ln/>
-        </p:spPr>
-        <p:txBody>
-          <a:bodyPr wrap="square" lIns="0" tIns="0" rIns="0" bIns="0" rtlCol="0" anchor="t"/>
-          <a:lstStyle/>
-          <a:p>
-            <a:pPr algn="l" indent="0" marL="0">
-              <a:buNone/>
-            </a:pPr>
-            <a:r>
-              <a:rPr lang="en-US" sz="1500" b="1" dirty="0">
-                <a:solidFill>
-                  <a:srgbClr val="1B1E24"/>
-                </a:solidFill>
-                <a:latin typeface="Calibri" pitchFamily="34" charset="0"/>
-                <a:ea typeface="Calibri" pitchFamily="34" charset="-122"/>
-                <a:cs typeface="Calibri" pitchFamily="34" charset="-120"/>
-              </a:rPr>
-              <a:t>Desperdício e orçamento impreciso</a:t>
-            </a:r>
-            <a:endParaRPr lang="en-US" sz="1500" dirty="0"/>
-          </a:p>
-        </p:txBody>
-      </p:sp>
-      <p:sp>
-        <p:nvSpPr>
-          <p:cNvPr id="24" name="Text 22"/>
-          <p:cNvSpPr/>
-          <p:nvPr/>
-        </p:nvSpPr>
-        <p:spPr>
-          <a:xfrm>
-            <a:off x="6515100" y="4965192"/>
-            <a:ext cx="4732020" cy="685800"/>
-          </a:xfrm>
-          <a:prstGeom prst="rect">
-            <a:avLst/>
-          </a:prstGeom>
-          <a:noFill/>
-          <a:ln/>
-        </p:spPr>
-        <p:txBody>
-          <a:bodyPr wrap="square" lIns="0" tIns="0" rIns="0" bIns="0" rtlCol="0" anchor="t"/>
-          <a:lstStyle/>
-          <a:p>
-            <a:pPr algn="l" indent="0" marL="0">
-              <a:lnSpc>
-                <a:spcPct val="100000"/>
-              </a:lnSpc>
-              <a:buNone/>
-            </a:pPr>
-            <a:r>
-              <a:rPr lang="en-US" sz="1050" dirty="0">
-                <a:solidFill>
-                  <a:srgbClr val="5B6472"/>
-                </a:solidFill>
-                <a:latin typeface="Calibri" pitchFamily="34" charset="0"/>
-                <a:ea typeface="Calibri" pitchFamily="34" charset="-122"/>
-                <a:cs typeface="Calibri" pitchFamily="34" charset="-120"/>
-              </a:rPr>
-              <a:t>Sobras de material mal aproveitadas e preços desatualizados encarecem e atrasam a obra.</a:t>
-            </a:r>
-            <a:endParaRPr lang="en-US" sz="1050" dirty="0"/>
-          </a:p>
-        </p:txBody>
-      </p:sp>
+      <p:pic>
+        <p:nvPicPr>
+          <p:cNvPr id="8" name="Image 0" descr="C:/Users/wagner/Desktop/CIENCIA DE DADOS/IAOBRAS/doc/prints/06_contato.png"/>
+          <p:cNvPicPr>
+            <a:picLocks noChangeAspect="1"/>
+          </p:cNvPicPr>
+          <p:nvPr/>
+        </p:nvPicPr>
+        <p:blipFill>
+          <a:blip r:embed="rId3"/>
+          <a:srcRect/>
+          <a:stretch/>
+        </p:blipFill>
+        <p:spPr>
+          <a:xfrm>
+            <a:off x="1370885" y="1508760"/>
+            <a:ext cx="9449924" cy="4892040"/>
+          </a:xfrm>
+          <a:prstGeom prst="rect">
+            <a:avLst/>
+          </a:prstGeom>
+        </p:spPr>
+      </p:pic>
     </p:spTree>
   </p:cSld>
   <p:clrMapOvr>
@@ -2468,14 +2268,15 @@
 </p:sld>
 </file>
 
-<file path=ppt/slides/slide3.xml><?xml version="1.0" encoding="utf-8"?>
+<file path=ppt/slides/slide11.xml><?xml version="1.0" encoding="utf-8"?>
 <p:sld xmlns:a="http://schemas.openxmlformats.org/drawingml/2006/main" xmlns:r="http://schemas.openxmlformats.org/officeDocument/2006/relationships" xmlns:p="http://schemas.openxmlformats.org/presentationml/2006/main">
-  <p:cSld name="Slide 3">
+  <p:cSld name="Slide 11">
     <p:bg>
       <p:bgPr>
         <a:solidFill>
-          <a:srgbClr val="FFFFFF"/>
+          <a:srgbClr val="1B1E24"/>
         </a:solidFill>
+        <a:effectLst/>
       </p:bgPr>
     </p:bg>
     <p:spTree>
@@ -2500,14 +2301,16 @@
         </p:nvSpPr>
         <p:spPr>
           <a:xfrm>
-            <a:off x="640080" y="566928"/>
-            <a:ext cx="292608" cy="292608"/>
+            <a:off x="8961120" y="-2286000"/>
+            <a:ext cx="5486400" cy="5486400"/>
           </a:xfrm>
           <a:prstGeom prst="ellipse">
             <a:avLst/>
           </a:prstGeom>
           <a:solidFill>
-            <a:srgbClr val="E8590C"/>
+            <a:srgbClr val="E8590C">
+              <a:alpha val="12000"/>
+            </a:srgbClr>
           </a:solidFill>
           <a:ln/>
         </p:spPr>
@@ -2520,8 +2323,8 @@
         </p:nvSpPr>
         <p:spPr>
           <a:xfrm>
-            <a:off x="1097280" y="384048"/>
-            <a:ext cx="9601200" cy="640080"/>
+            <a:off x="822960" y="2286000"/>
+            <a:ext cx="8686800" cy="1097280"/>
           </a:xfrm>
           <a:prstGeom prst="rect">
             <a:avLst/>
@@ -2533,21 +2336,21 @@
           <a:bodyPr wrap="square" lIns="0" tIns="0" rIns="0" bIns="0" rtlCol="0" anchor="ctr"/>
           <a:lstStyle/>
           <a:p>
-            <a:pPr algn="l" indent="0" marL="0">
-              <a:buNone/>
-            </a:pPr>
-            <a:r>
-              <a:rPr lang="en-US" sz="3000" b="1" dirty="0">
-                <a:solidFill>
-                  <a:srgbClr val="1B1E24"/>
+            <a:pPr marL="0" indent="0" algn="l">
+              <a:buNone/>
+            </a:pPr>
+            <a:r>
+              <a:rPr lang="en-US" sz="5400" b="1" dirty="0">
+                <a:solidFill>
+                  <a:srgbClr val="FFFFFF"/>
                 </a:solidFill>
                 <a:latin typeface="Bookman Old Style" pitchFamily="34" charset="0"/>
                 <a:ea typeface="Bookman Old Style" pitchFamily="34" charset="-122"/>
                 <a:cs typeface="Bookman Old Style" pitchFamily="34" charset="-120"/>
               </a:rPr>
-              <a:t>Proposta de Solução</a:t>
-            </a:r>
-            <a:endParaRPr lang="en-US" sz="3000" dirty="0"/>
+              <a:t>Obrigado!</a:t>
+            </a:r>
+            <a:endParaRPr lang="en-US" sz="5400" dirty="0"/>
           </a:p>
         </p:txBody>
       </p:sp>
@@ -2559,8 +2362,8 @@
         </p:nvSpPr>
         <p:spPr>
           <a:xfrm>
-            <a:off x="640080" y="1078992"/>
-            <a:ext cx="10881360" cy="411480"/>
+            <a:off x="868680" y="3291840"/>
+            <a:ext cx="8686800" cy="548640"/>
           </a:xfrm>
           <a:prstGeom prst="rect">
             <a:avLst/>
@@ -2569,24 +2372,24 @@
           <a:ln/>
         </p:spPr>
         <p:txBody>
-          <a:bodyPr wrap="square" lIns="0" tIns="0" rIns="0" bIns="0" rtlCol="0" anchor="t"/>
-          <a:lstStyle/>
-          <a:p>
-            <a:pPr algn="l" indent="0" marL="0">
-              <a:buNone/>
-            </a:pPr>
-            <a:r>
-              <a:rPr lang="en-US" sz="1400" i="1" dirty="0">
-                <a:solidFill>
-                  <a:srgbClr val="5B6472"/>
+          <a:bodyPr wrap="square" lIns="0" tIns="0" rIns="0" bIns="0" rtlCol="0" anchor="ctr"/>
+          <a:lstStyle/>
+          <a:p>
+            <a:pPr marL="0" indent="0" algn="l">
+              <a:buNone/>
+            </a:pPr>
+            <a:r>
+              <a:rPr lang="en-US" sz="1800" dirty="0">
+                <a:solidFill>
+                  <a:srgbClr val="A9AFB8"/>
                 </a:solidFill>
                 <a:latin typeface="Calibri" pitchFamily="34" charset="0"/>
                 <a:ea typeface="Calibri" pitchFamily="34" charset="-122"/>
                 <a:cs typeface="Calibri" pitchFamily="34" charset="-120"/>
               </a:rPr>
-              <a:t>IAOBRA: plataforma web com IA integrada para digitalizar o dia a dia da obra</a:t>
-            </a:r>
-            <a:endParaRPr lang="en-US" sz="1400" dirty="0"/>
+              <a:t>Perguntas são bem-vindas.</a:t>
+            </a:r>
+            <a:endParaRPr lang="en-US" sz="1800" dirty="0"/>
           </a:p>
         </p:txBody>
       </p:sp>
@@ -2598,25 +2401,18 @@
         </p:nvSpPr>
         <p:spPr>
           <a:xfrm>
-            <a:off x="640080" y="1691640"/>
-            <a:ext cx="2514600" cy="3246120"/>
+            <a:off x="822960" y="4297680"/>
+            <a:ext cx="6583680" cy="1234440"/>
           </a:xfrm>
           <a:prstGeom prst="roundRect">
             <a:avLst>
-              <a:gd name="adj" fmla="val 2909"/>
+              <a:gd name="adj" fmla="val 5926"/>
             </a:avLst>
           </a:prstGeom>
           <a:solidFill>
-            <a:srgbClr val="F4F5F6"/>
-          </a:solidFill>
-          <a:ln/>
-          <a:effectLst>
-            <a:outerShdw sx="100000" sy="100000" kx="0" ky="0" algn="bl" rotWithShape="0" blurRad="101600" dist="38100" dir="2700000">
-              <a:srgbClr val="000000">
-                <a:alpha val="15000"/>
-              </a:srgbClr>
-            </a:outerShdw>
-          </a:effectLst>
+            <a:srgbClr val="262B34"/>
+          </a:solidFill>
+          <a:ln/>
         </p:spPr>
       </p:sp>
       <p:sp>
@@ -2627,7 +2423,7 @@
         </p:nvSpPr>
         <p:spPr>
           <a:xfrm>
-            <a:off x="868680" y="1920240"/>
+            <a:off x="1051560" y="4526280"/>
             <a:ext cx="457200" cy="457200"/>
           </a:xfrm>
           <a:prstGeom prst="ellipse">
@@ -2647,7 +2443,7 @@
         </p:nvSpPr>
         <p:spPr>
           <a:xfrm>
-            <a:off x="868680" y="1920240"/>
+            <a:off x="1051560" y="4526280"/>
             <a:ext cx="457200" cy="457200"/>
           </a:xfrm>
           <a:prstGeom prst="rect">
@@ -2660,11 +2456,11 @@
           <a:bodyPr wrap="square" lIns="0" tIns="0" rIns="0" bIns="0" rtlCol="0" anchor="ctr"/>
           <a:lstStyle/>
           <a:p>
-            <a:pPr algn="ctr" indent="0" marL="0">
-              <a:buNone/>
-            </a:pPr>
-            <a:r>
-              <a:rPr lang="en-US" sz="1800" b="1" dirty="0">
+            <a:pPr marL="0" indent="0" algn="ctr">
+              <a:buNone/>
+            </a:pPr>
+            <a:r>
+              <a:rPr lang="en-US" sz="1600" b="1" dirty="0">
                 <a:solidFill>
                   <a:srgbClr val="FFFFFF"/>
                 </a:solidFill>
@@ -2672,9 +2468,9 @@
                 <a:ea typeface="Calibri" pitchFamily="34" charset="-122"/>
                 <a:cs typeface="Calibri" pitchFamily="34" charset="-120"/>
               </a:rPr>
-              <a:t>1</a:t>
-            </a:r>
-            <a:endParaRPr lang="en-US" sz="1800" dirty="0"/>
+              <a:t>W</a:t>
+            </a:r>
+            <a:endParaRPr lang="en-US" sz="1600" dirty="0"/>
           </a:p>
         </p:txBody>
       </p:sp>
@@ -2686,8 +2482,8 @@
         </p:nvSpPr>
         <p:spPr>
           <a:xfrm>
-            <a:off x="914400" y="2468880"/>
-            <a:ext cx="1965960" cy="384048"/>
+            <a:off x="1691640" y="4526280"/>
+            <a:ext cx="5394960" cy="914400"/>
           </a:xfrm>
           <a:prstGeom prst="rect">
             <a:avLst/>
@@ -2696,144 +2492,57 @@
           <a:ln/>
         </p:spPr>
         <p:txBody>
-          <a:bodyPr wrap="square" lIns="0" tIns="0" rIns="0" bIns="0" rtlCol="0" anchor="t"/>
-          <a:lstStyle/>
-          <a:p>
-            <a:pPr algn="l" indent="0" marL="0">
+          <a:bodyPr wrap="square" lIns="0" tIns="0" rIns="0" bIns="0" rtlCol="0" anchor="ctr"/>
+          <a:lstStyle/>
+          <a:p>
+            <a:pPr marL="0" indent="0" algn="l">
+              <a:spcAft>
+                <a:spcPts val="200"/>
+              </a:spcAft>
               <a:buNone/>
             </a:pPr>
             <a:r>
               <a:rPr lang="en-US" sz="1500" b="1" dirty="0">
                 <a:solidFill>
-                  <a:srgbClr val="1B1E24"/>
+                  <a:srgbClr val="FFFFFF"/>
                 </a:solidFill>
                 <a:latin typeface="Calibri" pitchFamily="34" charset="0"/>
                 <a:ea typeface="Calibri" pitchFamily="34" charset="-122"/>
                 <a:cs typeface="Calibri" pitchFamily="34" charset="-120"/>
               </a:rPr>
-              <a:t>Diário digital</a:t>
+              <a:t>Wagner Machado dos Santos</a:t>
             </a:r>
             <a:endParaRPr lang="en-US" sz="1500" dirty="0"/>
           </a:p>
-        </p:txBody>
-      </p:sp>
-      <p:sp>
-        <p:nvSpPr>
-          <p:cNvPr id="9" name="Text 7"/>
-          <p:cNvSpPr/>
-          <p:nvPr/>
-        </p:nvSpPr>
-        <p:spPr>
-          <a:xfrm>
-            <a:off x="914400" y="2862072"/>
-            <a:ext cx="1965960" cy="1920240"/>
-          </a:xfrm>
-          <a:prstGeom prst="rect">
-            <a:avLst/>
-          </a:prstGeom>
-          <a:noFill/>
-          <a:ln/>
-        </p:spPr>
-        <p:txBody>
-          <a:bodyPr wrap="square" lIns="0" tIns="0" rIns="0" bIns="0" rtlCol="0" anchor="t"/>
-          <a:lstStyle/>
-          <a:p>
-            <a:pPr algn="l" indent="0" marL="0">
-              <a:lnSpc>
-                <a:spcPct val="100000"/>
-              </a:lnSpc>
-              <a:buNone/>
-            </a:pPr>
-            <a:r>
-              <a:rPr lang="en-US" sz="1050" dirty="0">
-                <a:solidFill>
-                  <a:srgbClr val="5B6472"/>
+          <a:p>
+            <a:pPr marL="0" indent="0" algn="l">
+              <a:spcAft>
+                <a:spcPts val="200"/>
+              </a:spcAft>
+              <a:buNone/>
+            </a:pPr>
+            <a:r>
+              <a:rPr lang="en-US" sz="1300" dirty="0">
+                <a:solidFill>
+                  <a:srgbClr val="FFFFFF"/>
                 </a:solidFill>
                 <a:latin typeface="Calibri" pitchFamily="34" charset="0"/>
                 <a:ea typeface="Calibri" pitchFamily="34" charset="-122"/>
                 <a:cs typeface="Calibri" pitchFamily="34" charset="-120"/>
               </a:rPr>
-              <a:t>Mestre de obras registra o progresso diário com texto, fotos, vídeos e áudio.</a:t>
-            </a:r>
-            <a:endParaRPr lang="en-US" sz="1050" dirty="0"/>
-          </a:p>
-        </p:txBody>
-      </p:sp>
-      <p:sp>
-        <p:nvSpPr>
-          <p:cNvPr id="10" name="Shape 8"/>
-          <p:cNvSpPr/>
-          <p:nvPr/>
-        </p:nvSpPr>
-        <p:spPr>
-          <a:xfrm>
-            <a:off x="3429000" y="1691640"/>
-            <a:ext cx="2514600" cy="3246120"/>
-          </a:xfrm>
-          <a:prstGeom prst="roundRect">
-            <a:avLst>
-              <a:gd name="adj" fmla="val 2909"/>
-            </a:avLst>
-          </a:prstGeom>
-          <a:solidFill>
-            <a:srgbClr val="F4F5F6"/>
-          </a:solidFill>
-          <a:ln/>
-          <a:effectLst>
-            <a:outerShdw sx="100000" sy="100000" kx="0" ky="0" algn="bl" rotWithShape="0" blurRad="101600" dist="38100" dir="2700000">
-              <a:srgbClr val="000000">
-                <a:alpha val="15000"/>
-              </a:srgbClr>
-            </a:outerShdw>
-          </a:effectLst>
-        </p:spPr>
-      </p:sp>
-      <p:sp>
-        <p:nvSpPr>
-          <p:cNvPr id="11" name="Shape 9"/>
-          <p:cNvSpPr/>
-          <p:nvPr/>
-        </p:nvSpPr>
-        <p:spPr>
-          <a:xfrm>
-            <a:off x="3657600" y="1920240"/>
-            <a:ext cx="457200" cy="457200"/>
-          </a:xfrm>
-          <a:prstGeom prst="ellipse">
-            <a:avLst/>
-          </a:prstGeom>
-          <a:solidFill>
-            <a:srgbClr val="E8590C"/>
-          </a:solidFill>
-          <a:ln/>
-        </p:spPr>
-      </p:sp>
-      <p:sp>
-        <p:nvSpPr>
-          <p:cNvPr id="12" name="Text 10"/>
-          <p:cNvSpPr/>
-          <p:nvPr/>
-        </p:nvSpPr>
-        <p:spPr>
-          <a:xfrm>
-            <a:off x="3657600" y="1920240"/>
-            <a:ext cx="457200" cy="457200"/>
-          </a:xfrm>
-          <a:prstGeom prst="rect">
-            <a:avLst/>
-          </a:prstGeom>
-          <a:noFill/>
-          <a:ln/>
-        </p:spPr>
-        <p:txBody>
-          <a:bodyPr wrap="square" lIns="0" tIns="0" rIns="0" bIns="0" rtlCol="0" anchor="ctr"/>
-          <a:lstStyle/>
-          <a:p>
-            <a:pPr algn="ctr" indent="0" marL="0">
-              <a:buNone/>
-            </a:pPr>
-            <a:r>
-              <a:rPr lang="en-US" sz="1800" b="1" dirty="0">
+              <a:t>machadinho94@hotmail.com</a:t>
+            </a:r>
+            <a:endParaRPr lang="en-US" sz="1500" dirty="0"/>
+          </a:p>
+          <a:p>
+            <a:pPr marL="0" indent="0" algn="l">
+              <a:spcAft>
+                <a:spcPts val="200"/>
+              </a:spcAft>
+              <a:buNone/>
+            </a:pPr>
+            <a:r>
+              <a:rPr lang="en-US" sz="1200" i="1" dirty="0">
                 <a:solidFill>
                   <a:srgbClr val="FFFFFF"/>
                 </a:solidFill>
@@ -2841,467 +2550,9 @@
                 <a:ea typeface="Calibri" pitchFamily="34" charset="-122"/>
                 <a:cs typeface="Calibri" pitchFamily="34" charset="-120"/>
               </a:rPr>
-              <a:t>2</a:t>
-            </a:r>
-            <a:endParaRPr lang="en-US" sz="1800" dirty="0"/>
-          </a:p>
-        </p:txBody>
-      </p:sp>
-      <p:sp>
-        <p:nvSpPr>
-          <p:cNvPr id="13" name="Text 11"/>
-          <p:cNvSpPr/>
-          <p:nvPr/>
-        </p:nvSpPr>
-        <p:spPr>
-          <a:xfrm>
-            <a:off x="3703320" y="2468880"/>
-            <a:ext cx="1965960" cy="384048"/>
-          </a:xfrm>
-          <a:prstGeom prst="rect">
-            <a:avLst/>
-          </a:prstGeom>
-          <a:noFill/>
-          <a:ln/>
-        </p:spPr>
-        <p:txBody>
-          <a:bodyPr wrap="square" lIns="0" tIns="0" rIns="0" bIns="0" rtlCol="0" anchor="t"/>
-          <a:lstStyle/>
-          <a:p>
-            <a:pPr algn="l" indent="0" marL="0">
-              <a:buNone/>
-            </a:pPr>
-            <a:r>
-              <a:rPr lang="en-US" sz="1500" b="1" dirty="0">
-                <a:solidFill>
-                  <a:srgbClr val="1B1E24"/>
-                </a:solidFill>
-                <a:latin typeface="Calibri" pitchFamily="34" charset="0"/>
-                <a:ea typeface="Calibri" pitchFamily="34" charset="-122"/>
-                <a:cs typeface="Calibri" pitchFamily="34" charset="-120"/>
-              </a:rPr>
-              <a:t>IA analisa e planeja</a:t>
+              <a:t>Projeto IAOBRA — Práticas Extensionistas III</a:t>
             </a:r>
             <a:endParaRPr lang="en-US" sz="1500" dirty="0"/>
-          </a:p>
-        </p:txBody>
-      </p:sp>
-      <p:sp>
-        <p:nvSpPr>
-          <p:cNvPr id="14" name="Text 12"/>
-          <p:cNvSpPr/>
-          <p:nvPr/>
-        </p:nvSpPr>
-        <p:spPr>
-          <a:xfrm>
-            <a:off x="3703320" y="2862072"/>
-            <a:ext cx="1965960" cy="1920240"/>
-          </a:xfrm>
-          <a:prstGeom prst="rect">
-            <a:avLst/>
-          </a:prstGeom>
-          <a:noFill/>
-          <a:ln/>
-        </p:spPr>
-        <p:txBody>
-          <a:bodyPr wrap="square" lIns="0" tIns="0" rIns="0" bIns="0" rtlCol="0" anchor="t"/>
-          <a:lstStyle/>
-          <a:p>
-            <a:pPr algn="l" indent="0" marL="0">
-              <a:lnSpc>
-                <a:spcPct val="100000"/>
-              </a:lnSpc>
-              <a:buNone/>
-            </a:pPr>
-            <a:r>
-              <a:rPr lang="en-US" sz="1050" dirty="0">
-                <a:solidFill>
-                  <a:srgbClr val="5B6472"/>
-                </a:solidFill>
-                <a:latin typeface="Calibri" pitchFamily="34" charset="0"/>
-                <a:ea typeface="Calibri" pitchFamily="34" charset="-122"/>
-                <a:cs typeface="Calibri" pitchFamily="34" charset="-120"/>
-              </a:rPr>
-              <a:t>A IA lê os registros, gera cronograma automático e aponta possíveis problemas.</a:t>
-            </a:r>
-            <a:endParaRPr lang="en-US" sz="1050" dirty="0"/>
-          </a:p>
-        </p:txBody>
-      </p:sp>
-      <p:sp>
-        <p:nvSpPr>
-          <p:cNvPr id="15" name="Shape 13"/>
-          <p:cNvSpPr/>
-          <p:nvPr/>
-        </p:nvSpPr>
-        <p:spPr>
-          <a:xfrm>
-            <a:off x="6217920" y="1691640"/>
-            <a:ext cx="2514600" cy="3246120"/>
-          </a:xfrm>
-          <a:prstGeom prst="roundRect">
-            <a:avLst>
-              <a:gd name="adj" fmla="val 2909"/>
-            </a:avLst>
-          </a:prstGeom>
-          <a:solidFill>
-            <a:srgbClr val="F4F5F6"/>
-          </a:solidFill>
-          <a:ln/>
-          <a:effectLst>
-            <a:outerShdw sx="100000" sy="100000" kx="0" ky="0" algn="bl" rotWithShape="0" blurRad="101600" dist="38100" dir="2700000">
-              <a:srgbClr val="000000">
-                <a:alpha val="15000"/>
-              </a:srgbClr>
-            </a:outerShdw>
-          </a:effectLst>
-        </p:spPr>
-      </p:sp>
-      <p:sp>
-        <p:nvSpPr>
-          <p:cNvPr id="16" name="Shape 14"/>
-          <p:cNvSpPr/>
-          <p:nvPr/>
-        </p:nvSpPr>
-        <p:spPr>
-          <a:xfrm>
-            <a:off x="6446520" y="1920240"/>
-            <a:ext cx="457200" cy="457200"/>
-          </a:xfrm>
-          <a:prstGeom prst="ellipse">
-            <a:avLst/>
-          </a:prstGeom>
-          <a:solidFill>
-            <a:srgbClr val="E8590C"/>
-          </a:solidFill>
-          <a:ln/>
-        </p:spPr>
-      </p:sp>
-      <p:sp>
-        <p:nvSpPr>
-          <p:cNvPr id="17" name="Text 15"/>
-          <p:cNvSpPr/>
-          <p:nvPr/>
-        </p:nvSpPr>
-        <p:spPr>
-          <a:xfrm>
-            <a:off x="6446520" y="1920240"/>
-            <a:ext cx="457200" cy="457200"/>
-          </a:xfrm>
-          <a:prstGeom prst="rect">
-            <a:avLst/>
-          </a:prstGeom>
-          <a:noFill/>
-          <a:ln/>
-        </p:spPr>
-        <p:txBody>
-          <a:bodyPr wrap="square" lIns="0" tIns="0" rIns="0" bIns="0" rtlCol="0" anchor="ctr"/>
-          <a:lstStyle/>
-          <a:p>
-            <a:pPr algn="ctr" indent="0" marL="0">
-              <a:buNone/>
-            </a:pPr>
-            <a:r>
-              <a:rPr lang="en-US" sz="1800" b="1" dirty="0">
-                <a:solidFill>
-                  <a:srgbClr val="FFFFFF"/>
-                </a:solidFill>
-                <a:latin typeface="Calibri" pitchFamily="34" charset="0"/>
-                <a:ea typeface="Calibri" pitchFamily="34" charset="-122"/>
-                <a:cs typeface="Calibri" pitchFamily="34" charset="-120"/>
-              </a:rPr>
-              <a:t>3</a:t>
-            </a:r>
-            <a:endParaRPr lang="en-US" sz="1800" dirty="0"/>
-          </a:p>
-        </p:txBody>
-      </p:sp>
-      <p:sp>
-        <p:nvSpPr>
-          <p:cNvPr id="18" name="Text 16"/>
-          <p:cNvSpPr/>
-          <p:nvPr/>
-        </p:nvSpPr>
-        <p:spPr>
-          <a:xfrm>
-            <a:off x="6492240" y="2468880"/>
-            <a:ext cx="1965960" cy="384048"/>
-          </a:xfrm>
-          <a:prstGeom prst="rect">
-            <a:avLst/>
-          </a:prstGeom>
-          <a:noFill/>
-          <a:ln/>
-        </p:spPr>
-        <p:txBody>
-          <a:bodyPr wrap="square" lIns="0" tIns="0" rIns="0" bIns="0" rtlCol="0" anchor="t"/>
-          <a:lstStyle/>
-          <a:p>
-            <a:pPr algn="l" indent="0" marL="0">
-              <a:buNone/>
-            </a:pPr>
-            <a:r>
-              <a:rPr lang="en-US" sz="1500" b="1" dirty="0">
-                <a:solidFill>
-                  <a:srgbClr val="1B1E24"/>
-                </a:solidFill>
-                <a:latin typeface="Calibri" pitchFamily="34" charset="0"/>
-                <a:ea typeface="Calibri" pitchFamily="34" charset="-122"/>
-                <a:cs typeface="Calibri" pitchFamily="34" charset="-120"/>
-              </a:rPr>
-              <a:t>Orçamento inteligente</a:t>
-            </a:r>
-            <a:endParaRPr lang="en-US" sz="1500" dirty="0"/>
-          </a:p>
-        </p:txBody>
-      </p:sp>
-      <p:sp>
-        <p:nvSpPr>
-          <p:cNvPr id="19" name="Text 17"/>
-          <p:cNvSpPr/>
-          <p:nvPr/>
-        </p:nvSpPr>
-        <p:spPr>
-          <a:xfrm>
-            <a:off x="6492240" y="2862072"/>
-            <a:ext cx="1965960" cy="1920240"/>
-          </a:xfrm>
-          <a:prstGeom prst="rect">
-            <a:avLst/>
-          </a:prstGeom>
-          <a:noFill/>
-          <a:ln/>
-        </p:spPr>
-        <p:txBody>
-          <a:bodyPr wrap="square" lIns="0" tIns="0" rIns="0" bIns="0" rtlCol="0" anchor="t"/>
-          <a:lstStyle/>
-          <a:p>
-            <a:pPr algn="l" indent="0" marL="0">
-              <a:lnSpc>
-                <a:spcPct val="100000"/>
-              </a:lnSpc>
-              <a:buNone/>
-            </a:pPr>
-            <a:r>
-              <a:rPr lang="en-US" sz="1050" dirty="0">
-                <a:solidFill>
-                  <a:srgbClr val="5B6472"/>
-                </a:solidFill>
-                <a:latin typeface="Calibri" pitchFamily="34" charset="0"/>
-                <a:ea typeface="Calibri" pitchFamily="34" charset="-122"/>
-                <a:cs typeface="Calibri" pitchFamily="34" charset="-120"/>
-              </a:rPr>
-              <a:t>Consulta de preços de materiais por IA e controle de orçamento da obra.</a:t>
-            </a:r>
-            <a:endParaRPr lang="en-US" sz="1050" dirty="0"/>
-          </a:p>
-        </p:txBody>
-      </p:sp>
-      <p:sp>
-        <p:nvSpPr>
-          <p:cNvPr id="20" name="Shape 18"/>
-          <p:cNvSpPr/>
-          <p:nvPr/>
-        </p:nvSpPr>
-        <p:spPr>
-          <a:xfrm>
-            <a:off x="9006840" y="1691640"/>
-            <a:ext cx="2514600" cy="3246120"/>
-          </a:xfrm>
-          <a:prstGeom prst="roundRect">
-            <a:avLst>
-              <a:gd name="adj" fmla="val 2909"/>
-            </a:avLst>
-          </a:prstGeom>
-          <a:solidFill>
-            <a:srgbClr val="F4F5F6"/>
-          </a:solidFill>
-          <a:ln/>
-          <a:effectLst>
-            <a:outerShdw sx="100000" sy="100000" kx="0" ky="0" algn="bl" rotWithShape="0" blurRad="101600" dist="38100" dir="2700000">
-              <a:srgbClr val="000000">
-                <a:alpha val="15000"/>
-              </a:srgbClr>
-            </a:outerShdw>
-          </a:effectLst>
-        </p:spPr>
-      </p:sp>
-      <p:sp>
-        <p:nvSpPr>
-          <p:cNvPr id="21" name="Shape 19"/>
-          <p:cNvSpPr/>
-          <p:nvPr/>
-        </p:nvSpPr>
-        <p:spPr>
-          <a:xfrm>
-            <a:off x="9235440" y="1920240"/>
-            <a:ext cx="457200" cy="457200"/>
-          </a:xfrm>
-          <a:prstGeom prst="ellipse">
-            <a:avLst/>
-          </a:prstGeom>
-          <a:solidFill>
-            <a:srgbClr val="E8590C"/>
-          </a:solidFill>
-          <a:ln/>
-        </p:spPr>
-      </p:sp>
-      <p:sp>
-        <p:nvSpPr>
-          <p:cNvPr id="22" name="Text 20"/>
-          <p:cNvSpPr/>
-          <p:nvPr/>
-        </p:nvSpPr>
-        <p:spPr>
-          <a:xfrm>
-            <a:off x="9235440" y="1920240"/>
-            <a:ext cx="457200" cy="457200"/>
-          </a:xfrm>
-          <a:prstGeom prst="rect">
-            <a:avLst/>
-          </a:prstGeom>
-          <a:noFill/>
-          <a:ln/>
-        </p:spPr>
-        <p:txBody>
-          <a:bodyPr wrap="square" lIns="0" tIns="0" rIns="0" bIns="0" rtlCol="0" anchor="ctr"/>
-          <a:lstStyle/>
-          <a:p>
-            <a:pPr algn="ctr" indent="0" marL="0">
-              <a:buNone/>
-            </a:pPr>
-            <a:r>
-              <a:rPr lang="en-US" sz="1800" b="1" dirty="0">
-                <a:solidFill>
-                  <a:srgbClr val="FFFFFF"/>
-                </a:solidFill>
-                <a:latin typeface="Calibri" pitchFamily="34" charset="0"/>
-                <a:ea typeface="Calibri" pitchFamily="34" charset="-122"/>
-                <a:cs typeface="Calibri" pitchFamily="34" charset="-120"/>
-              </a:rPr>
-              <a:t>4</a:t>
-            </a:r>
-            <a:endParaRPr lang="en-US" sz="1800" dirty="0"/>
-          </a:p>
-        </p:txBody>
-      </p:sp>
-      <p:sp>
-        <p:nvSpPr>
-          <p:cNvPr id="23" name="Text 21"/>
-          <p:cNvSpPr/>
-          <p:nvPr/>
-        </p:nvSpPr>
-        <p:spPr>
-          <a:xfrm>
-            <a:off x="9281160" y="2468880"/>
-            <a:ext cx="1965960" cy="384048"/>
-          </a:xfrm>
-          <a:prstGeom prst="rect">
-            <a:avLst/>
-          </a:prstGeom>
-          <a:noFill/>
-          <a:ln/>
-        </p:spPr>
-        <p:txBody>
-          <a:bodyPr wrap="square" lIns="0" tIns="0" rIns="0" bIns="0" rtlCol="0" anchor="t"/>
-          <a:lstStyle/>
-          <a:p>
-            <a:pPr algn="l" indent="0" marL="0">
-              <a:buNone/>
-            </a:pPr>
-            <a:r>
-              <a:rPr lang="en-US" sz="1500" b="1" dirty="0">
-                <a:solidFill>
-                  <a:srgbClr val="1B1E24"/>
-                </a:solidFill>
-                <a:latin typeface="Calibri" pitchFamily="34" charset="0"/>
-                <a:ea typeface="Calibri" pitchFamily="34" charset="-122"/>
-                <a:cs typeface="Calibri" pitchFamily="34" charset="-120"/>
-              </a:rPr>
-              <a:t>Painel do cliente</a:t>
-            </a:r>
-            <a:endParaRPr lang="en-US" sz="1500" dirty="0"/>
-          </a:p>
-        </p:txBody>
-      </p:sp>
-      <p:sp>
-        <p:nvSpPr>
-          <p:cNvPr id="24" name="Text 22"/>
-          <p:cNvSpPr/>
-          <p:nvPr/>
-        </p:nvSpPr>
-        <p:spPr>
-          <a:xfrm>
-            <a:off x="9281160" y="2862072"/>
-            <a:ext cx="1965960" cy="1920240"/>
-          </a:xfrm>
-          <a:prstGeom prst="rect">
-            <a:avLst/>
-          </a:prstGeom>
-          <a:noFill/>
-          <a:ln/>
-        </p:spPr>
-        <p:txBody>
-          <a:bodyPr wrap="square" lIns="0" tIns="0" rIns="0" bIns="0" rtlCol="0" anchor="t"/>
-          <a:lstStyle/>
-          <a:p>
-            <a:pPr algn="l" indent="0" marL="0">
-              <a:lnSpc>
-                <a:spcPct val="100000"/>
-              </a:lnSpc>
-              <a:buNone/>
-            </a:pPr>
-            <a:r>
-              <a:rPr lang="en-US" sz="1050" dirty="0">
-                <a:solidFill>
-                  <a:srgbClr val="5B6472"/>
-                </a:solidFill>
-                <a:latin typeface="Calibri" pitchFamily="34" charset="0"/>
-                <a:ea typeface="Calibri" pitchFamily="34" charset="-122"/>
-                <a:cs typeface="Calibri" pitchFamily="34" charset="-120"/>
-              </a:rPr>
-              <a:t>Cliente acompanha tudo em tempo real; mercado de sobras dá destino ao material excedente.</a:t>
-            </a:r>
-            <a:endParaRPr lang="en-US" sz="1050" dirty="0"/>
-          </a:p>
-        </p:txBody>
-      </p:sp>
-      <p:sp>
-        <p:nvSpPr>
-          <p:cNvPr id="25" name="Text 23"/>
-          <p:cNvSpPr/>
-          <p:nvPr/>
-        </p:nvSpPr>
-        <p:spPr>
-          <a:xfrm>
-            <a:off x="640080" y="5166360"/>
-            <a:ext cx="10881360" cy="365760"/>
-          </a:xfrm>
-          <a:prstGeom prst="rect">
-            <a:avLst/>
-          </a:prstGeom>
-          <a:noFill/>
-          <a:ln/>
-        </p:spPr>
-        <p:txBody>
-          <a:bodyPr wrap="square" lIns="0" tIns="0" rIns="0" bIns="0" rtlCol="0" anchor="ctr"/>
-          <a:lstStyle/>
-          <a:p>
-            <a:pPr algn="l" indent="0" marL="0">
-              <a:buNone/>
-            </a:pPr>
-            <a:r>
-              <a:rPr lang="en-US" sz="1250" i="1" dirty="0">
-                <a:solidFill>
-                  <a:srgbClr val="5B6472"/>
-                </a:solidFill>
-                <a:latin typeface="Calibri" pitchFamily="34" charset="0"/>
-                <a:ea typeface="Calibri" pitchFamily="34" charset="-122"/>
-                <a:cs typeface="Calibri" pitchFamily="34" charset="-120"/>
-              </a:rPr>
-              <a:t>Stack: Python + Streamlit  ·  PostgreSQL  ·  IA (Gemini via OpenRouter)  ·  Docker + Nginx</a:t>
-            </a:r>
-            <a:endParaRPr lang="en-US" sz="1250" dirty="0"/>
           </a:p>
         </p:txBody>
       </p:sp>
@@ -3313,14 +2564,15 @@
 </p:sld>
 </file>
 
-<file path=ppt/slides/slide4.xml><?xml version="1.0" encoding="utf-8"?>
+<file path=ppt/slides/slide2.xml><?xml version="1.0" encoding="utf-8"?>
 <p:sld xmlns:a="http://schemas.openxmlformats.org/drawingml/2006/main" xmlns:r="http://schemas.openxmlformats.org/officeDocument/2006/relationships" xmlns:p="http://schemas.openxmlformats.org/presentationml/2006/main">
-  <p:cSld name="Slide 4">
+  <p:cSld name="Slide 2">
     <p:bg>
       <p:bgPr>
         <a:solidFill>
-          <a:srgbClr val="FFFFFF"/>
+          <a:srgbClr val="1B1E24"/>
         </a:solidFill>
+        <a:effectLst/>
       </p:bgPr>
     </p:bg>
     <p:spTree>
@@ -3378,19 +2630,19 @@
           <a:bodyPr wrap="square" lIns="0" tIns="0" rIns="0" bIns="0" rtlCol="0" anchor="ctr"/>
           <a:lstStyle/>
           <a:p>
-            <a:pPr algn="l" indent="0" marL="0">
+            <a:pPr marL="0" indent="0" algn="l">
               <a:buNone/>
             </a:pPr>
             <a:r>
               <a:rPr lang="en-US" sz="3000" b="1" dirty="0">
                 <a:solidFill>
-                  <a:srgbClr val="1B1E24"/>
+                  <a:srgbClr val="FFFFFF"/>
                 </a:solidFill>
                 <a:latin typeface="Bookman Old Style" pitchFamily="34" charset="0"/>
                 <a:ea typeface="Bookman Old Style" pitchFamily="34" charset="-122"/>
                 <a:cs typeface="Bookman Old Style" pitchFamily="34" charset="-120"/>
               </a:rPr>
-              <a:t>Modelo Entidade-Relacionamento</a:t>
+              <a:t>O Problema</a:t>
             </a:r>
             <a:endParaRPr lang="en-US" sz="3000" dirty="0"/>
           </a:p>
@@ -3417,19 +2669,19 @@
           <a:bodyPr wrap="square" lIns="0" tIns="0" rIns="0" bIns="0" rtlCol="0" anchor="t"/>
           <a:lstStyle/>
           <a:p>
-            <a:pPr algn="l" indent="0" marL="0">
+            <a:pPr marL="0" indent="0" algn="l">
               <a:buNone/>
             </a:pPr>
             <a:r>
               <a:rPr lang="en-US" sz="1400" i="1" dirty="0">
                 <a:solidFill>
-                  <a:srgbClr val="5B6472"/>
+                  <a:srgbClr val="A9AFB8"/>
                 </a:solidFill>
                 <a:latin typeface="Calibri" pitchFamily="34" charset="0"/>
                 <a:ea typeface="Calibri" pitchFamily="34" charset="-122"/>
                 <a:cs typeface="Calibri" pitchFamily="34" charset="-120"/>
               </a:rPr>
-              <a:t>Banco de dados atualizado após a Entrega 1 — usuários, obras, diário, orçamento, cronograma e sobras</a:t>
+              <a:t>Retomando o cenário identificado nas Práticas 1 e 2</a:t>
             </a:r>
             <a:endParaRPr lang="en-US" sz="1400" dirty="0"/>
           </a:p>
@@ -3443,20 +2695,20 @@
         </p:nvSpPr>
         <p:spPr>
           <a:xfrm>
-            <a:off x="1347239" y="1554480"/>
-            <a:ext cx="9497217" cy="4709160"/>
+            <a:off x="640080" y="1554480"/>
+            <a:ext cx="5280660" cy="2011680"/>
           </a:xfrm>
           <a:prstGeom prst="roundRect">
             <a:avLst>
-              <a:gd name="adj" fmla="val 1165"/>
+              <a:gd name="adj" fmla="val 3636"/>
             </a:avLst>
           </a:prstGeom>
           <a:solidFill>
-            <a:srgbClr val="F4F5F6"/>
+            <a:srgbClr val="262B34"/>
           </a:solidFill>
           <a:ln/>
           <a:effectLst>
-            <a:outerShdw sx="100000" sy="100000" kx="0" ky="0" algn="bl" rotWithShape="0" blurRad="101600" dist="38100" dir="2700000">
+            <a:outerShdw blurRad="101600" dist="38100" dir="2700000" algn="bl" rotWithShape="0">
               <a:srgbClr val="000000">
                 <a:alpha val="15000"/>
               </a:srgbClr>
@@ -3464,29 +2716,653 @@
           </a:effectLst>
         </p:spPr>
       </p:sp>
-      <p:pic>
-        <p:nvPicPr>
-          <p:cNvPr id="6" name="Image 0" descr="C:/Users/wagner/Desktop/CIENCIA DE DADOS/IAOBRAS/Diagramas/Diagrama Entidade-Relacionamento (DER).png">    </p:cNvPr>
-          <p:cNvPicPr>
-            <a:picLocks noChangeAspect="1"/>
-          </p:cNvPicPr>
-          <p:nvPr/>
-        </p:nvPicPr>
-        <p:blipFill>
-          <a:blip r:embed="rId1"/>
-          <a:srcRect l="0" r="0" t="0" b="0"/>
-          <a:stretch/>
-        </p:blipFill>
-        <p:spPr>
-          <a:xfrm>
-            <a:off x="1484399" y="1691640"/>
-            <a:ext cx="9222897" cy="4434840"/>
-          </a:xfrm>
-          <a:prstGeom prst="rect">
-            <a:avLst/>
-          </a:prstGeom>
-        </p:spPr>
-      </p:pic>
+      <p:sp>
+        <p:nvSpPr>
+          <p:cNvPr id="6" name="Shape 4"/>
+          <p:cNvSpPr/>
+          <p:nvPr/>
+        </p:nvSpPr>
+        <p:spPr>
+          <a:xfrm>
+            <a:off x="868680" y="1783080"/>
+            <a:ext cx="457200" cy="457200"/>
+          </a:xfrm>
+          <a:prstGeom prst="ellipse">
+            <a:avLst/>
+          </a:prstGeom>
+          <a:solidFill>
+            <a:srgbClr val="E8590C"/>
+          </a:solidFill>
+          <a:ln/>
+        </p:spPr>
+      </p:sp>
+      <p:sp>
+        <p:nvSpPr>
+          <p:cNvPr id="7" name="Text 5"/>
+          <p:cNvSpPr/>
+          <p:nvPr/>
+        </p:nvSpPr>
+        <p:spPr>
+          <a:xfrm>
+            <a:off x="868680" y="1783080"/>
+            <a:ext cx="457200" cy="457200"/>
+          </a:xfrm>
+          <a:prstGeom prst="rect">
+            <a:avLst/>
+          </a:prstGeom>
+          <a:noFill/>
+          <a:ln/>
+        </p:spPr>
+        <p:txBody>
+          <a:bodyPr wrap="square" lIns="0" tIns="0" rIns="0" bIns="0" rtlCol="0" anchor="ctr"/>
+          <a:lstStyle/>
+          <a:p>
+            <a:pPr marL="0" indent="0" algn="ctr">
+              <a:buNone/>
+            </a:pPr>
+            <a:r>
+              <a:rPr lang="en-US" sz="1800" b="1" dirty="0">
+                <a:solidFill>
+                  <a:srgbClr val="FFFFFF"/>
+                </a:solidFill>
+                <a:latin typeface="Calibri" pitchFamily="34" charset="0"/>
+                <a:ea typeface="Calibri" pitchFamily="34" charset="-122"/>
+                <a:cs typeface="Calibri" pitchFamily="34" charset="-120"/>
+              </a:rPr>
+              <a:t>1</a:t>
+            </a:r>
+            <a:endParaRPr lang="en-US" sz="1800" dirty="0"/>
+          </a:p>
+        </p:txBody>
+      </p:sp>
+      <p:sp>
+        <p:nvSpPr>
+          <p:cNvPr id="8" name="Text 6"/>
+          <p:cNvSpPr/>
+          <p:nvPr/>
+        </p:nvSpPr>
+        <p:spPr>
+          <a:xfrm>
+            <a:off x="914400" y="2331720"/>
+            <a:ext cx="4732020" cy="384048"/>
+          </a:xfrm>
+          <a:prstGeom prst="rect">
+            <a:avLst/>
+          </a:prstGeom>
+          <a:noFill/>
+          <a:ln/>
+        </p:spPr>
+        <p:txBody>
+          <a:bodyPr wrap="square" lIns="0" tIns="0" rIns="0" bIns="0" rtlCol="0" anchor="t"/>
+          <a:lstStyle/>
+          <a:p>
+            <a:pPr marL="0" indent="0" algn="l">
+              <a:buNone/>
+            </a:pPr>
+            <a:r>
+              <a:rPr lang="en-US" sz="1500" b="1" dirty="0">
+                <a:solidFill>
+                  <a:srgbClr val="FFFFFF"/>
+                </a:solidFill>
+                <a:latin typeface="Calibri" pitchFamily="34" charset="0"/>
+                <a:ea typeface="Calibri" pitchFamily="34" charset="-122"/>
+                <a:cs typeface="Calibri" pitchFamily="34" charset="-120"/>
+              </a:rPr>
+              <a:t>Controle manual e disperso</a:t>
+            </a:r>
+            <a:endParaRPr lang="en-US" sz="1500" dirty="0"/>
+          </a:p>
+        </p:txBody>
+      </p:sp>
+      <p:sp>
+        <p:nvSpPr>
+          <p:cNvPr id="9" name="Text 7"/>
+          <p:cNvSpPr/>
+          <p:nvPr/>
+        </p:nvSpPr>
+        <p:spPr>
+          <a:xfrm>
+            <a:off x="914400" y="2724912"/>
+            <a:ext cx="4732020" cy="685800"/>
+          </a:xfrm>
+          <a:prstGeom prst="rect">
+            <a:avLst/>
+          </a:prstGeom>
+          <a:noFill/>
+          <a:ln/>
+        </p:spPr>
+        <p:txBody>
+          <a:bodyPr wrap="square" lIns="0" tIns="0" rIns="0" bIns="0" rtlCol="0" anchor="t"/>
+          <a:lstStyle/>
+          <a:p>
+            <a:pPr marL="0" indent="0" algn="l">
+              <a:lnSpc>
+                <a:spcPct val="100000"/>
+              </a:lnSpc>
+              <a:buNone/>
+            </a:pPr>
+            <a:r>
+              <a:rPr lang="en-US" sz="1050" dirty="0">
+                <a:solidFill>
+                  <a:srgbClr val="A9AFB8"/>
+                </a:solidFill>
+                <a:latin typeface="Calibri" pitchFamily="34" charset="0"/>
+                <a:ea typeface="Calibri" pitchFamily="34" charset="-122"/>
+                <a:cs typeface="Calibri" pitchFamily="34" charset="-120"/>
+              </a:rPr>
+              <a:t>Progresso da obra registrado em papel, planilhas soltas e conversas de WhatsApp, sem histórico confiável.</a:t>
+            </a:r>
+            <a:endParaRPr lang="en-US" sz="1050" dirty="0"/>
+          </a:p>
+        </p:txBody>
+      </p:sp>
+      <p:sp>
+        <p:nvSpPr>
+          <p:cNvPr id="10" name="Shape 8"/>
+          <p:cNvSpPr/>
+          <p:nvPr/>
+        </p:nvSpPr>
+        <p:spPr>
+          <a:xfrm>
+            <a:off x="6240780" y="1554480"/>
+            <a:ext cx="5280660" cy="2011680"/>
+          </a:xfrm>
+          <a:prstGeom prst="roundRect">
+            <a:avLst>
+              <a:gd name="adj" fmla="val 3636"/>
+            </a:avLst>
+          </a:prstGeom>
+          <a:solidFill>
+            <a:srgbClr val="262B34"/>
+          </a:solidFill>
+          <a:ln/>
+          <a:effectLst>
+            <a:outerShdw blurRad="101600" dist="38100" dir="2700000" algn="bl" rotWithShape="0">
+              <a:srgbClr val="000000">
+                <a:alpha val="15000"/>
+              </a:srgbClr>
+            </a:outerShdw>
+          </a:effectLst>
+        </p:spPr>
+      </p:sp>
+      <p:sp>
+        <p:nvSpPr>
+          <p:cNvPr id="11" name="Shape 9"/>
+          <p:cNvSpPr/>
+          <p:nvPr/>
+        </p:nvSpPr>
+        <p:spPr>
+          <a:xfrm>
+            <a:off x="6469380" y="1783080"/>
+            <a:ext cx="457200" cy="457200"/>
+          </a:xfrm>
+          <a:prstGeom prst="ellipse">
+            <a:avLst/>
+          </a:prstGeom>
+          <a:solidFill>
+            <a:srgbClr val="E8590C"/>
+          </a:solidFill>
+          <a:ln/>
+        </p:spPr>
+      </p:sp>
+      <p:sp>
+        <p:nvSpPr>
+          <p:cNvPr id="12" name="Text 10"/>
+          <p:cNvSpPr/>
+          <p:nvPr/>
+        </p:nvSpPr>
+        <p:spPr>
+          <a:xfrm>
+            <a:off x="6469380" y="1783080"/>
+            <a:ext cx="457200" cy="457200"/>
+          </a:xfrm>
+          <a:prstGeom prst="rect">
+            <a:avLst/>
+          </a:prstGeom>
+          <a:noFill/>
+          <a:ln/>
+        </p:spPr>
+        <p:txBody>
+          <a:bodyPr wrap="square" lIns="0" tIns="0" rIns="0" bIns="0" rtlCol="0" anchor="ctr"/>
+          <a:lstStyle/>
+          <a:p>
+            <a:pPr marL="0" indent="0" algn="ctr">
+              <a:buNone/>
+            </a:pPr>
+            <a:r>
+              <a:rPr lang="en-US" sz="1800" b="1" dirty="0">
+                <a:solidFill>
+                  <a:srgbClr val="FFFFFF"/>
+                </a:solidFill>
+                <a:latin typeface="Calibri" pitchFamily="34" charset="0"/>
+                <a:ea typeface="Calibri" pitchFamily="34" charset="-122"/>
+                <a:cs typeface="Calibri" pitchFamily="34" charset="-120"/>
+              </a:rPr>
+              <a:t>2</a:t>
+            </a:r>
+            <a:endParaRPr lang="en-US" sz="1800" dirty="0"/>
+          </a:p>
+        </p:txBody>
+      </p:sp>
+      <p:sp>
+        <p:nvSpPr>
+          <p:cNvPr id="13" name="Text 11"/>
+          <p:cNvSpPr/>
+          <p:nvPr/>
+        </p:nvSpPr>
+        <p:spPr>
+          <a:xfrm>
+            <a:off x="6515100" y="2331720"/>
+            <a:ext cx="4732020" cy="384048"/>
+          </a:xfrm>
+          <a:prstGeom prst="rect">
+            <a:avLst/>
+          </a:prstGeom>
+          <a:noFill/>
+          <a:ln/>
+        </p:spPr>
+        <p:txBody>
+          <a:bodyPr wrap="square" lIns="0" tIns="0" rIns="0" bIns="0" rtlCol="0" anchor="t"/>
+          <a:lstStyle/>
+          <a:p>
+            <a:pPr marL="0" indent="0" algn="l">
+              <a:buNone/>
+            </a:pPr>
+            <a:r>
+              <a:rPr lang="en-US" sz="1500" b="1" dirty="0">
+                <a:solidFill>
+                  <a:srgbClr val="FFFFFF"/>
+                </a:solidFill>
+                <a:latin typeface="Calibri" pitchFamily="34" charset="0"/>
+                <a:ea typeface="Calibri" pitchFamily="34" charset="-122"/>
+                <a:cs typeface="Calibri" pitchFamily="34" charset="-120"/>
+              </a:rPr>
+              <a:t>Cliente sem visibilidade</a:t>
+            </a:r>
+            <a:endParaRPr lang="en-US" sz="1500" dirty="0"/>
+          </a:p>
+        </p:txBody>
+      </p:sp>
+      <p:sp>
+        <p:nvSpPr>
+          <p:cNvPr id="14" name="Text 12"/>
+          <p:cNvSpPr/>
+          <p:nvPr/>
+        </p:nvSpPr>
+        <p:spPr>
+          <a:xfrm>
+            <a:off x="6515100" y="2724912"/>
+            <a:ext cx="4732020" cy="685800"/>
+          </a:xfrm>
+          <a:prstGeom prst="rect">
+            <a:avLst/>
+          </a:prstGeom>
+          <a:noFill/>
+          <a:ln/>
+        </p:spPr>
+        <p:txBody>
+          <a:bodyPr wrap="square" lIns="0" tIns="0" rIns="0" bIns="0" rtlCol="0" anchor="t"/>
+          <a:lstStyle/>
+          <a:p>
+            <a:pPr marL="0" indent="0" algn="l">
+              <a:lnSpc>
+                <a:spcPct val="100000"/>
+              </a:lnSpc>
+              <a:buNone/>
+            </a:pPr>
+            <a:r>
+              <a:rPr lang="en-US" sz="1050" dirty="0">
+                <a:solidFill>
+                  <a:srgbClr val="A9AFB8"/>
+                </a:solidFill>
+                <a:latin typeface="Calibri" pitchFamily="34" charset="0"/>
+                <a:ea typeface="Calibri" pitchFamily="34" charset="-122"/>
+                <a:cs typeface="Calibri" pitchFamily="34" charset="-120"/>
+              </a:rPr>
+              <a:t>O proprietário não acompanha o andamento real da obra e depende de repasses informais do mestre de obras.</a:t>
+            </a:r>
+            <a:endParaRPr lang="en-US" sz="1050" dirty="0"/>
+          </a:p>
+        </p:txBody>
+      </p:sp>
+      <p:sp>
+        <p:nvSpPr>
+          <p:cNvPr id="15" name="Shape 13"/>
+          <p:cNvSpPr/>
+          <p:nvPr/>
+        </p:nvSpPr>
+        <p:spPr>
+          <a:xfrm>
+            <a:off x="640080" y="3794760"/>
+            <a:ext cx="5280660" cy="2011680"/>
+          </a:xfrm>
+          <a:prstGeom prst="roundRect">
+            <a:avLst>
+              <a:gd name="adj" fmla="val 3636"/>
+            </a:avLst>
+          </a:prstGeom>
+          <a:solidFill>
+            <a:srgbClr val="262B34"/>
+          </a:solidFill>
+          <a:ln/>
+          <a:effectLst>
+            <a:outerShdw blurRad="101600" dist="38100" dir="2700000" algn="bl" rotWithShape="0">
+              <a:srgbClr val="000000">
+                <a:alpha val="15000"/>
+              </a:srgbClr>
+            </a:outerShdw>
+          </a:effectLst>
+        </p:spPr>
+      </p:sp>
+      <p:sp>
+        <p:nvSpPr>
+          <p:cNvPr id="16" name="Shape 14"/>
+          <p:cNvSpPr/>
+          <p:nvPr/>
+        </p:nvSpPr>
+        <p:spPr>
+          <a:xfrm>
+            <a:off x="868680" y="4023360"/>
+            <a:ext cx="457200" cy="457200"/>
+          </a:xfrm>
+          <a:prstGeom prst="ellipse">
+            <a:avLst/>
+          </a:prstGeom>
+          <a:solidFill>
+            <a:srgbClr val="E8590C"/>
+          </a:solidFill>
+          <a:ln/>
+        </p:spPr>
+      </p:sp>
+      <p:sp>
+        <p:nvSpPr>
+          <p:cNvPr id="17" name="Text 15"/>
+          <p:cNvSpPr/>
+          <p:nvPr/>
+        </p:nvSpPr>
+        <p:spPr>
+          <a:xfrm>
+            <a:off x="868680" y="4023360"/>
+            <a:ext cx="457200" cy="457200"/>
+          </a:xfrm>
+          <a:prstGeom prst="rect">
+            <a:avLst/>
+          </a:prstGeom>
+          <a:noFill/>
+          <a:ln/>
+        </p:spPr>
+        <p:txBody>
+          <a:bodyPr wrap="square" lIns="0" tIns="0" rIns="0" bIns="0" rtlCol="0" anchor="ctr"/>
+          <a:lstStyle/>
+          <a:p>
+            <a:pPr marL="0" indent="0" algn="ctr">
+              <a:buNone/>
+            </a:pPr>
+            <a:r>
+              <a:rPr lang="en-US" sz="1800" b="1" dirty="0">
+                <a:solidFill>
+                  <a:srgbClr val="FFFFFF"/>
+                </a:solidFill>
+                <a:latin typeface="Calibri" pitchFamily="34" charset="0"/>
+                <a:ea typeface="Calibri" pitchFamily="34" charset="-122"/>
+                <a:cs typeface="Calibri" pitchFamily="34" charset="-120"/>
+              </a:rPr>
+              <a:t>3</a:t>
+            </a:r>
+            <a:endParaRPr lang="en-US" sz="1800" dirty="0"/>
+          </a:p>
+        </p:txBody>
+      </p:sp>
+      <p:sp>
+        <p:nvSpPr>
+          <p:cNvPr id="18" name="Text 16"/>
+          <p:cNvSpPr/>
+          <p:nvPr/>
+        </p:nvSpPr>
+        <p:spPr>
+          <a:xfrm>
+            <a:off x="914400" y="4572000"/>
+            <a:ext cx="4732020" cy="384048"/>
+          </a:xfrm>
+          <a:prstGeom prst="rect">
+            <a:avLst/>
+          </a:prstGeom>
+          <a:noFill/>
+          <a:ln/>
+        </p:spPr>
+        <p:txBody>
+          <a:bodyPr wrap="square" lIns="0" tIns="0" rIns="0" bIns="0" rtlCol="0" anchor="t"/>
+          <a:lstStyle/>
+          <a:p>
+            <a:pPr marL="0" indent="0" algn="l">
+              <a:buNone/>
+            </a:pPr>
+            <a:r>
+              <a:rPr lang="en-US" sz="1500" b="1" dirty="0">
+                <a:solidFill>
+                  <a:srgbClr val="FFFFFF"/>
+                </a:solidFill>
+                <a:latin typeface="Calibri" pitchFamily="34" charset="0"/>
+                <a:ea typeface="Calibri" pitchFamily="34" charset="-122"/>
+                <a:cs typeface="Calibri" pitchFamily="34" charset="-120"/>
+              </a:rPr>
+              <a:t>Problemas detectados tarde</a:t>
+            </a:r>
+            <a:endParaRPr lang="en-US" sz="1500" dirty="0"/>
+          </a:p>
+        </p:txBody>
+      </p:sp>
+      <p:sp>
+        <p:nvSpPr>
+          <p:cNvPr id="19" name="Text 17"/>
+          <p:cNvSpPr/>
+          <p:nvPr/>
+        </p:nvSpPr>
+        <p:spPr>
+          <a:xfrm>
+            <a:off x="914400" y="4965192"/>
+            <a:ext cx="4732020" cy="685800"/>
+          </a:xfrm>
+          <a:prstGeom prst="rect">
+            <a:avLst/>
+          </a:prstGeom>
+          <a:noFill/>
+          <a:ln/>
+        </p:spPr>
+        <p:txBody>
+          <a:bodyPr wrap="square" lIns="0" tIns="0" rIns="0" bIns="0" rtlCol="0" anchor="t"/>
+          <a:lstStyle/>
+          <a:p>
+            <a:pPr marL="0" indent="0" algn="l">
+              <a:lnSpc>
+                <a:spcPct val="100000"/>
+              </a:lnSpc>
+              <a:buNone/>
+            </a:pPr>
+            <a:r>
+              <a:rPr lang="en-US" sz="1050" dirty="0">
+                <a:solidFill>
+                  <a:srgbClr val="A9AFB8"/>
+                </a:solidFill>
+                <a:latin typeface="Calibri" pitchFamily="34" charset="0"/>
+                <a:ea typeface="Calibri" pitchFamily="34" charset="-122"/>
+                <a:cs typeface="Calibri" pitchFamily="34" charset="-120"/>
+              </a:rPr>
+              <a:t>Sem dados estruturados, atrasos e falhas de execução só aparecem quando já geraram retrabalho.</a:t>
+            </a:r>
+            <a:endParaRPr lang="en-US" sz="1050" dirty="0"/>
+          </a:p>
+        </p:txBody>
+      </p:sp>
+      <p:sp>
+        <p:nvSpPr>
+          <p:cNvPr id="20" name="Shape 18"/>
+          <p:cNvSpPr/>
+          <p:nvPr/>
+        </p:nvSpPr>
+        <p:spPr>
+          <a:xfrm>
+            <a:off x="6240780" y="3794760"/>
+            <a:ext cx="5280660" cy="2011680"/>
+          </a:xfrm>
+          <a:prstGeom prst="roundRect">
+            <a:avLst>
+              <a:gd name="adj" fmla="val 3636"/>
+            </a:avLst>
+          </a:prstGeom>
+          <a:solidFill>
+            <a:srgbClr val="262B34"/>
+          </a:solidFill>
+          <a:ln/>
+          <a:effectLst>
+            <a:outerShdw blurRad="101600" dist="38100" dir="2700000" algn="bl" rotWithShape="0">
+              <a:srgbClr val="000000">
+                <a:alpha val="15000"/>
+              </a:srgbClr>
+            </a:outerShdw>
+          </a:effectLst>
+        </p:spPr>
+      </p:sp>
+      <p:sp>
+        <p:nvSpPr>
+          <p:cNvPr id="21" name="Shape 19"/>
+          <p:cNvSpPr/>
+          <p:nvPr/>
+        </p:nvSpPr>
+        <p:spPr>
+          <a:xfrm>
+            <a:off x="6469380" y="4023360"/>
+            <a:ext cx="457200" cy="457200"/>
+          </a:xfrm>
+          <a:prstGeom prst="ellipse">
+            <a:avLst/>
+          </a:prstGeom>
+          <a:solidFill>
+            <a:srgbClr val="E8590C"/>
+          </a:solidFill>
+          <a:ln/>
+        </p:spPr>
+      </p:sp>
+      <p:sp>
+        <p:nvSpPr>
+          <p:cNvPr id="22" name="Text 20"/>
+          <p:cNvSpPr/>
+          <p:nvPr/>
+        </p:nvSpPr>
+        <p:spPr>
+          <a:xfrm>
+            <a:off x="6469380" y="4023360"/>
+            <a:ext cx="457200" cy="457200"/>
+          </a:xfrm>
+          <a:prstGeom prst="rect">
+            <a:avLst/>
+          </a:prstGeom>
+          <a:noFill/>
+          <a:ln/>
+        </p:spPr>
+        <p:txBody>
+          <a:bodyPr wrap="square" lIns="0" tIns="0" rIns="0" bIns="0" rtlCol="0" anchor="ctr"/>
+          <a:lstStyle/>
+          <a:p>
+            <a:pPr marL="0" indent="0" algn="ctr">
+              <a:buNone/>
+            </a:pPr>
+            <a:r>
+              <a:rPr lang="en-US" sz="1800" b="1" dirty="0">
+                <a:solidFill>
+                  <a:srgbClr val="FFFFFF"/>
+                </a:solidFill>
+                <a:latin typeface="Calibri" pitchFamily="34" charset="0"/>
+                <a:ea typeface="Calibri" pitchFamily="34" charset="-122"/>
+                <a:cs typeface="Calibri" pitchFamily="34" charset="-120"/>
+              </a:rPr>
+              <a:t>4</a:t>
+            </a:r>
+            <a:endParaRPr lang="en-US" sz="1800" dirty="0"/>
+          </a:p>
+        </p:txBody>
+      </p:sp>
+      <p:sp>
+        <p:nvSpPr>
+          <p:cNvPr id="23" name="Text 21"/>
+          <p:cNvSpPr/>
+          <p:nvPr/>
+        </p:nvSpPr>
+        <p:spPr>
+          <a:xfrm>
+            <a:off x="6515100" y="4572000"/>
+            <a:ext cx="4732020" cy="384048"/>
+          </a:xfrm>
+          <a:prstGeom prst="rect">
+            <a:avLst/>
+          </a:prstGeom>
+          <a:noFill/>
+          <a:ln/>
+        </p:spPr>
+        <p:txBody>
+          <a:bodyPr wrap="square" lIns="0" tIns="0" rIns="0" bIns="0" rtlCol="0" anchor="t"/>
+          <a:lstStyle/>
+          <a:p>
+            <a:pPr marL="0" indent="0" algn="l">
+              <a:buNone/>
+            </a:pPr>
+            <a:r>
+              <a:rPr lang="en-US" sz="1500" b="1" dirty="0">
+                <a:solidFill>
+                  <a:srgbClr val="FFFFFF"/>
+                </a:solidFill>
+                <a:latin typeface="Calibri" pitchFamily="34" charset="0"/>
+                <a:ea typeface="Calibri" pitchFamily="34" charset="-122"/>
+                <a:cs typeface="Calibri" pitchFamily="34" charset="-120"/>
+              </a:rPr>
+              <a:t>Desperdício e orçamento impreciso</a:t>
+            </a:r>
+            <a:endParaRPr lang="en-US" sz="1500" dirty="0"/>
+          </a:p>
+        </p:txBody>
+      </p:sp>
+      <p:sp>
+        <p:nvSpPr>
+          <p:cNvPr id="24" name="Text 22"/>
+          <p:cNvSpPr/>
+          <p:nvPr/>
+        </p:nvSpPr>
+        <p:spPr>
+          <a:xfrm>
+            <a:off x="6515100" y="4965192"/>
+            <a:ext cx="4732020" cy="685800"/>
+          </a:xfrm>
+          <a:prstGeom prst="rect">
+            <a:avLst/>
+          </a:prstGeom>
+          <a:noFill/>
+          <a:ln/>
+        </p:spPr>
+        <p:txBody>
+          <a:bodyPr wrap="square" lIns="0" tIns="0" rIns="0" bIns="0" rtlCol="0" anchor="t"/>
+          <a:lstStyle/>
+          <a:p>
+            <a:pPr marL="0" indent="0" algn="l">
+              <a:lnSpc>
+                <a:spcPct val="100000"/>
+              </a:lnSpc>
+              <a:buNone/>
+            </a:pPr>
+            <a:r>
+              <a:rPr lang="en-US" sz="1050" dirty="0">
+                <a:solidFill>
+                  <a:srgbClr val="A9AFB8"/>
+                </a:solidFill>
+                <a:latin typeface="Calibri" pitchFamily="34" charset="0"/>
+                <a:ea typeface="Calibri" pitchFamily="34" charset="-122"/>
+                <a:cs typeface="Calibri" pitchFamily="34" charset="-120"/>
+              </a:rPr>
+              <a:t>Sobras de material mal aproveitadas e preços desatualizados encarecem e atrasam a obra.</a:t>
+            </a:r>
+            <a:endParaRPr lang="en-US" sz="1050" dirty="0"/>
+          </a:p>
+        </p:txBody>
+      </p:sp>
     </p:spTree>
   </p:cSld>
   <p:clrMapOvr>
@@ -3495,14 +3371,15 @@
 </p:sld>
 </file>
 
-<file path=ppt/slides/slide5.xml><?xml version="1.0" encoding="utf-8"?>
+<file path=ppt/slides/slide3.xml><?xml version="1.0" encoding="utf-8"?>
 <p:sld xmlns:a="http://schemas.openxmlformats.org/drawingml/2006/main" xmlns:r="http://schemas.openxmlformats.org/officeDocument/2006/relationships" xmlns:p="http://schemas.openxmlformats.org/presentationml/2006/main">
-  <p:cSld name="Slide 5">
+  <p:cSld name="Slide 3">
     <p:bg>
       <p:bgPr>
         <a:solidFill>
-          <a:srgbClr val="FFFFFF"/>
+          <a:srgbClr val="1B1E24"/>
         </a:solidFill>
+        <a:effectLst/>
       </p:bgPr>
     </p:bg>
     <p:spTree>
@@ -3560,19 +3437,19 @@
           <a:bodyPr wrap="square" lIns="0" tIns="0" rIns="0" bIns="0" rtlCol="0" anchor="ctr"/>
           <a:lstStyle/>
           <a:p>
-            <a:pPr algn="l" indent="0" marL="0">
+            <a:pPr marL="0" indent="0" algn="l">
               <a:buNone/>
             </a:pPr>
             <a:r>
               <a:rPr lang="en-US" sz="3000" b="1" dirty="0">
                 <a:solidFill>
-                  <a:srgbClr val="1B1E24"/>
+                  <a:srgbClr val="FFFFFF"/>
                 </a:solidFill>
                 <a:latin typeface="Bookman Old Style" pitchFamily="34" charset="0"/>
                 <a:ea typeface="Bookman Old Style" pitchFamily="34" charset="-122"/>
                 <a:cs typeface="Bookman Old Style" pitchFamily="34" charset="-120"/>
               </a:rPr>
-              <a:t>Diagrama de Caso de Uso</a:t>
+              <a:t>Proposta de Solução</a:t>
             </a:r>
             <a:endParaRPr lang="en-US" sz="3000" dirty="0"/>
           </a:p>
@@ -3599,19 +3476,19 @@
           <a:bodyPr wrap="square" lIns="0" tIns="0" rIns="0" bIns="0" rtlCol="0" anchor="t"/>
           <a:lstStyle/>
           <a:p>
-            <a:pPr algn="l" indent="0" marL="0">
+            <a:pPr marL="0" indent="0" algn="l">
               <a:buNone/>
             </a:pPr>
             <a:r>
               <a:rPr lang="en-US" sz="1400" i="1" dirty="0">
                 <a:solidFill>
-                  <a:srgbClr val="5B6472"/>
+                  <a:srgbClr val="A9AFB8"/>
                 </a:solidFill>
                 <a:latin typeface="Calibri" pitchFamily="34" charset="0"/>
                 <a:ea typeface="Calibri" pitchFamily="34" charset="-122"/>
                 <a:cs typeface="Calibri" pitchFamily="34" charset="-120"/>
               </a:rPr>
-              <a:t>Atores do sistema e principais funcionalidades disponíveis para cada perfil</a:t>
+              <a:t>IAOBRA: plataforma web com IA integrada para digitalizar o dia a dia da obra</a:t>
             </a:r>
             <a:endParaRPr lang="en-US" sz="1400" dirty="0"/>
           </a:p>
@@ -3625,20 +3502,20 @@
         </p:nvSpPr>
         <p:spPr>
           <a:xfrm>
-            <a:off x="2934872" y="1554480"/>
-            <a:ext cx="6321950" cy="3931920"/>
+            <a:off x="640080" y="1691640"/>
+            <a:ext cx="2514600" cy="3246120"/>
           </a:xfrm>
           <a:prstGeom prst="roundRect">
             <a:avLst>
-              <a:gd name="adj" fmla="val 1395"/>
+              <a:gd name="adj" fmla="val 2909"/>
             </a:avLst>
           </a:prstGeom>
           <a:solidFill>
-            <a:srgbClr val="F4F5F6"/>
+            <a:srgbClr val="262B34"/>
           </a:solidFill>
           <a:ln/>
           <a:effectLst>
-            <a:outerShdw sx="100000" sy="100000" kx="0" ky="0" algn="bl" rotWithShape="0" blurRad="101600" dist="38100" dir="2700000">
+            <a:outerShdw blurRad="101600" dist="38100" dir="2700000" algn="bl" rotWithShape="0">
               <a:srgbClr val="000000">
                 <a:alpha val="15000"/>
               </a:srgbClr>
@@ -3646,61 +3523,938 @@
           </a:effectLst>
         </p:spPr>
       </p:sp>
+      <p:sp>
+        <p:nvSpPr>
+          <p:cNvPr id="6" name="Shape 4"/>
+          <p:cNvSpPr/>
+          <p:nvPr/>
+        </p:nvSpPr>
+        <p:spPr>
+          <a:xfrm>
+            <a:off x="868680" y="1920240"/>
+            <a:ext cx="457200" cy="457200"/>
+          </a:xfrm>
+          <a:prstGeom prst="ellipse">
+            <a:avLst/>
+          </a:prstGeom>
+          <a:solidFill>
+            <a:srgbClr val="E8590C"/>
+          </a:solidFill>
+          <a:ln/>
+        </p:spPr>
+      </p:sp>
+      <p:sp>
+        <p:nvSpPr>
+          <p:cNvPr id="7" name="Text 5"/>
+          <p:cNvSpPr/>
+          <p:nvPr/>
+        </p:nvSpPr>
+        <p:spPr>
+          <a:xfrm>
+            <a:off x="868680" y="1920240"/>
+            <a:ext cx="457200" cy="457200"/>
+          </a:xfrm>
+          <a:prstGeom prst="rect">
+            <a:avLst/>
+          </a:prstGeom>
+          <a:noFill/>
+          <a:ln/>
+        </p:spPr>
+        <p:txBody>
+          <a:bodyPr wrap="square" lIns="0" tIns="0" rIns="0" bIns="0" rtlCol="0" anchor="ctr"/>
+          <a:lstStyle/>
+          <a:p>
+            <a:pPr marL="0" indent="0" algn="ctr">
+              <a:buNone/>
+            </a:pPr>
+            <a:r>
+              <a:rPr lang="en-US" sz="1800" b="1" dirty="0">
+                <a:solidFill>
+                  <a:srgbClr val="FFFFFF"/>
+                </a:solidFill>
+                <a:latin typeface="Calibri" pitchFamily="34" charset="0"/>
+                <a:ea typeface="Calibri" pitchFamily="34" charset="-122"/>
+                <a:cs typeface="Calibri" pitchFamily="34" charset="-120"/>
+              </a:rPr>
+              <a:t>1</a:t>
+            </a:r>
+            <a:endParaRPr lang="en-US" sz="1800" dirty="0"/>
+          </a:p>
+        </p:txBody>
+      </p:sp>
+      <p:sp>
+        <p:nvSpPr>
+          <p:cNvPr id="8" name="Text 6"/>
+          <p:cNvSpPr/>
+          <p:nvPr/>
+        </p:nvSpPr>
+        <p:spPr>
+          <a:xfrm>
+            <a:off x="914400" y="2468880"/>
+            <a:ext cx="1965960" cy="384048"/>
+          </a:xfrm>
+          <a:prstGeom prst="rect">
+            <a:avLst/>
+          </a:prstGeom>
+          <a:noFill/>
+          <a:ln/>
+        </p:spPr>
+        <p:txBody>
+          <a:bodyPr wrap="square" lIns="0" tIns="0" rIns="0" bIns="0" rtlCol="0" anchor="t"/>
+          <a:lstStyle/>
+          <a:p>
+            <a:pPr marL="0" indent="0" algn="l">
+              <a:buNone/>
+            </a:pPr>
+            <a:r>
+              <a:rPr lang="en-US" sz="1500" b="1" dirty="0">
+                <a:solidFill>
+                  <a:srgbClr val="FFFFFF"/>
+                </a:solidFill>
+                <a:latin typeface="Calibri" pitchFamily="34" charset="0"/>
+                <a:ea typeface="Calibri" pitchFamily="34" charset="-122"/>
+                <a:cs typeface="Calibri" pitchFamily="34" charset="-120"/>
+              </a:rPr>
+              <a:t>Diário digital</a:t>
+            </a:r>
+            <a:endParaRPr lang="en-US" sz="1500" dirty="0"/>
+          </a:p>
+        </p:txBody>
+      </p:sp>
+      <p:sp>
+        <p:nvSpPr>
+          <p:cNvPr id="9" name="Text 7"/>
+          <p:cNvSpPr/>
+          <p:nvPr/>
+        </p:nvSpPr>
+        <p:spPr>
+          <a:xfrm>
+            <a:off x="914400" y="2862072"/>
+            <a:ext cx="1965960" cy="1920240"/>
+          </a:xfrm>
+          <a:prstGeom prst="rect">
+            <a:avLst/>
+          </a:prstGeom>
+          <a:noFill/>
+          <a:ln/>
+        </p:spPr>
+        <p:txBody>
+          <a:bodyPr wrap="square" lIns="0" tIns="0" rIns="0" bIns="0" rtlCol="0" anchor="t"/>
+          <a:lstStyle/>
+          <a:p>
+            <a:pPr marL="0" indent="0" algn="l">
+              <a:lnSpc>
+                <a:spcPct val="100000"/>
+              </a:lnSpc>
+              <a:buNone/>
+            </a:pPr>
+            <a:r>
+              <a:rPr lang="en-US" sz="1050" dirty="0">
+                <a:solidFill>
+                  <a:srgbClr val="A9AFB8"/>
+                </a:solidFill>
+                <a:latin typeface="Calibri" pitchFamily="34" charset="0"/>
+                <a:ea typeface="Calibri" pitchFamily="34" charset="-122"/>
+                <a:cs typeface="Calibri" pitchFamily="34" charset="-120"/>
+              </a:rPr>
+              <a:t>Mestre de obras registra o progresso diário com texto, fotos, vídeos e áudio.</a:t>
+            </a:r>
+            <a:endParaRPr lang="en-US" sz="1050" dirty="0"/>
+          </a:p>
+        </p:txBody>
+      </p:sp>
+      <p:sp>
+        <p:nvSpPr>
+          <p:cNvPr id="10" name="Shape 8"/>
+          <p:cNvSpPr/>
+          <p:nvPr/>
+        </p:nvSpPr>
+        <p:spPr>
+          <a:xfrm>
+            <a:off x="3429000" y="1691640"/>
+            <a:ext cx="2514600" cy="3246120"/>
+          </a:xfrm>
+          <a:prstGeom prst="roundRect">
+            <a:avLst>
+              <a:gd name="adj" fmla="val 2909"/>
+            </a:avLst>
+          </a:prstGeom>
+          <a:solidFill>
+            <a:srgbClr val="262B34"/>
+          </a:solidFill>
+          <a:ln/>
+          <a:effectLst>
+            <a:outerShdw blurRad="101600" dist="38100" dir="2700000" algn="bl" rotWithShape="0">
+              <a:srgbClr val="000000">
+                <a:alpha val="15000"/>
+              </a:srgbClr>
+            </a:outerShdw>
+          </a:effectLst>
+        </p:spPr>
+      </p:sp>
+      <p:sp>
+        <p:nvSpPr>
+          <p:cNvPr id="11" name="Shape 9"/>
+          <p:cNvSpPr/>
+          <p:nvPr/>
+        </p:nvSpPr>
+        <p:spPr>
+          <a:xfrm>
+            <a:off x="3657600" y="1920240"/>
+            <a:ext cx="457200" cy="457200"/>
+          </a:xfrm>
+          <a:prstGeom prst="ellipse">
+            <a:avLst/>
+          </a:prstGeom>
+          <a:solidFill>
+            <a:srgbClr val="E8590C"/>
+          </a:solidFill>
+          <a:ln/>
+        </p:spPr>
+      </p:sp>
+      <p:sp>
+        <p:nvSpPr>
+          <p:cNvPr id="12" name="Text 10"/>
+          <p:cNvSpPr/>
+          <p:nvPr/>
+        </p:nvSpPr>
+        <p:spPr>
+          <a:xfrm>
+            <a:off x="3657600" y="1920240"/>
+            <a:ext cx="457200" cy="457200"/>
+          </a:xfrm>
+          <a:prstGeom prst="rect">
+            <a:avLst/>
+          </a:prstGeom>
+          <a:noFill/>
+          <a:ln/>
+        </p:spPr>
+        <p:txBody>
+          <a:bodyPr wrap="square" lIns="0" tIns="0" rIns="0" bIns="0" rtlCol="0" anchor="ctr"/>
+          <a:lstStyle/>
+          <a:p>
+            <a:pPr marL="0" indent="0" algn="ctr">
+              <a:buNone/>
+            </a:pPr>
+            <a:r>
+              <a:rPr lang="en-US" sz="1800" b="1" dirty="0">
+                <a:solidFill>
+                  <a:srgbClr val="FFFFFF"/>
+                </a:solidFill>
+                <a:latin typeface="Calibri" pitchFamily="34" charset="0"/>
+                <a:ea typeface="Calibri" pitchFamily="34" charset="-122"/>
+                <a:cs typeface="Calibri" pitchFamily="34" charset="-120"/>
+              </a:rPr>
+              <a:t>2</a:t>
+            </a:r>
+            <a:endParaRPr lang="en-US" sz="1800" dirty="0"/>
+          </a:p>
+        </p:txBody>
+      </p:sp>
+      <p:sp>
+        <p:nvSpPr>
+          <p:cNvPr id="13" name="Text 11"/>
+          <p:cNvSpPr/>
+          <p:nvPr/>
+        </p:nvSpPr>
+        <p:spPr>
+          <a:xfrm>
+            <a:off x="3703320" y="2468880"/>
+            <a:ext cx="1965960" cy="384048"/>
+          </a:xfrm>
+          <a:prstGeom prst="rect">
+            <a:avLst/>
+          </a:prstGeom>
+          <a:noFill/>
+          <a:ln/>
+        </p:spPr>
+        <p:txBody>
+          <a:bodyPr wrap="square" lIns="0" tIns="0" rIns="0" bIns="0" rtlCol="0" anchor="t"/>
+          <a:lstStyle/>
+          <a:p>
+            <a:pPr marL="0" indent="0" algn="l">
+              <a:buNone/>
+            </a:pPr>
+            <a:r>
+              <a:rPr lang="en-US" sz="1500" b="1" dirty="0">
+                <a:solidFill>
+                  <a:srgbClr val="FFFFFF"/>
+                </a:solidFill>
+                <a:latin typeface="Calibri" pitchFamily="34" charset="0"/>
+                <a:ea typeface="Calibri" pitchFamily="34" charset="-122"/>
+                <a:cs typeface="Calibri" pitchFamily="34" charset="-120"/>
+              </a:rPr>
+              <a:t>IA analisa e planeja</a:t>
+            </a:r>
+            <a:endParaRPr lang="en-US" sz="1500" dirty="0"/>
+          </a:p>
+        </p:txBody>
+      </p:sp>
+      <p:sp>
+        <p:nvSpPr>
+          <p:cNvPr id="14" name="Text 12"/>
+          <p:cNvSpPr/>
+          <p:nvPr/>
+        </p:nvSpPr>
+        <p:spPr>
+          <a:xfrm>
+            <a:off x="3703320" y="2862072"/>
+            <a:ext cx="1965960" cy="1920240"/>
+          </a:xfrm>
+          <a:prstGeom prst="rect">
+            <a:avLst/>
+          </a:prstGeom>
+          <a:noFill/>
+          <a:ln/>
+        </p:spPr>
+        <p:txBody>
+          <a:bodyPr wrap="square" lIns="0" tIns="0" rIns="0" bIns="0" rtlCol="0" anchor="t"/>
+          <a:lstStyle/>
+          <a:p>
+            <a:pPr marL="0" indent="0" algn="l">
+              <a:lnSpc>
+                <a:spcPct val="100000"/>
+              </a:lnSpc>
+              <a:buNone/>
+            </a:pPr>
+            <a:r>
+              <a:rPr lang="en-US" sz="1050" dirty="0">
+                <a:solidFill>
+                  <a:srgbClr val="A9AFB8"/>
+                </a:solidFill>
+                <a:latin typeface="Calibri" pitchFamily="34" charset="0"/>
+                <a:ea typeface="Calibri" pitchFamily="34" charset="-122"/>
+                <a:cs typeface="Calibri" pitchFamily="34" charset="-120"/>
+              </a:rPr>
+              <a:t>A IA lê os registros, gera cronograma automático e aponta possíveis problemas.</a:t>
+            </a:r>
+            <a:endParaRPr lang="en-US" sz="1050" dirty="0"/>
+          </a:p>
+        </p:txBody>
+      </p:sp>
+      <p:sp>
+        <p:nvSpPr>
+          <p:cNvPr id="15" name="Shape 13"/>
+          <p:cNvSpPr/>
+          <p:nvPr/>
+        </p:nvSpPr>
+        <p:spPr>
+          <a:xfrm>
+            <a:off x="6217920" y="1691640"/>
+            <a:ext cx="2514600" cy="3246120"/>
+          </a:xfrm>
+          <a:prstGeom prst="roundRect">
+            <a:avLst>
+              <a:gd name="adj" fmla="val 2909"/>
+            </a:avLst>
+          </a:prstGeom>
+          <a:solidFill>
+            <a:srgbClr val="262B34"/>
+          </a:solidFill>
+          <a:ln/>
+          <a:effectLst>
+            <a:outerShdw blurRad="101600" dist="38100" dir="2700000" algn="bl" rotWithShape="0">
+              <a:srgbClr val="000000">
+                <a:alpha val="15000"/>
+              </a:srgbClr>
+            </a:outerShdw>
+          </a:effectLst>
+        </p:spPr>
+      </p:sp>
+      <p:sp>
+        <p:nvSpPr>
+          <p:cNvPr id="16" name="Shape 14"/>
+          <p:cNvSpPr/>
+          <p:nvPr/>
+        </p:nvSpPr>
+        <p:spPr>
+          <a:xfrm>
+            <a:off x="6446520" y="1920240"/>
+            <a:ext cx="457200" cy="457200"/>
+          </a:xfrm>
+          <a:prstGeom prst="ellipse">
+            <a:avLst/>
+          </a:prstGeom>
+          <a:solidFill>
+            <a:srgbClr val="E8590C"/>
+          </a:solidFill>
+          <a:ln/>
+        </p:spPr>
+      </p:sp>
+      <p:sp>
+        <p:nvSpPr>
+          <p:cNvPr id="17" name="Text 15"/>
+          <p:cNvSpPr/>
+          <p:nvPr/>
+        </p:nvSpPr>
+        <p:spPr>
+          <a:xfrm>
+            <a:off x="6446520" y="1920240"/>
+            <a:ext cx="457200" cy="457200"/>
+          </a:xfrm>
+          <a:prstGeom prst="rect">
+            <a:avLst/>
+          </a:prstGeom>
+          <a:noFill/>
+          <a:ln/>
+        </p:spPr>
+        <p:txBody>
+          <a:bodyPr wrap="square" lIns="0" tIns="0" rIns="0" bIns="0" rtlCol="0" anchor="ctr"/>
+          <a:lstStyle/>
+          <a:p>
+            <a:pPr marL="0" indent="0" algn="ctr">
+              <a:buNone/>
+            </a:pPr>
+            <a:r>
+              <a:rPr lang="en-US" sz="1800" b="1" dirty="0">
+                <a:solidFill>
+                  <a:srgbClr val="FFFFFF"/>
+                </a:solidFill>
+                <a:latin typeface="Calibri" pitchFamily="34" charset="0"/>
+                <a:ea typeface="Calibri" pitchFamily="34" charset="-122"/>
+                <a:cs typeface="Calibri" pitchFamily="34" charset="-120"/>
+              </a:rPr>
+              <a:t>3</a:t>
+            </a:r>
+            <a:endParaRPr lang="en-US" sz="1800" dirty="0"/>
+          </a:p>
+        </p:txBody>
+      </p:sp>
+      <p:sp>
+        <p:nvSpPr>
+          <p:cNvPr id="18" name="Text 16"/>
+          <p:cNvSpPr/>
+          <p:nvPr/>
+        </p:nvSpPr>
+        <p:spPr>
+          <a:xfrm>
+            <a:off x="6492240" y="2468880"/>
+            <a:ext cx="1965960" cy="384048"/>
+          </a:xfrm>
+          <a:prstGeom prst="rect">
+            <a:avLst/>
+          </a:prstGeom>
+          <a:noFill/>
+          <a:ln/>
+        </p:spPr>
+        <p:txBody>
+          <a:bodyPr wrap="square" lIns="0" tIns="0" rIns="0" bIns="0" rtlCol="0" anchor="t"/>
+          <a:lstStyle/>
+          <a:p>
+            <a:pPr marL="0" indent="0" algn="l">
+              <a:buNone/>
+            </a:pPr>
+            <a:r>
+              <a:rPr lang="en-US" sz="1500" b="1" dirty="0">
+                <a:solidFill>
+                  <a:srgbClr val="FFFFFF"/>
+                </a:solidFill>
+                <a:latin typeface="Calibri" pitchFamily="34" charset="0"/>
+                <a:ea typeface="Calibri" pitchFamily="34" charset="-122"/>
+                <a:cs typeface="Calibri" pitchFamily="34" charset="-120"/>
+              </a:rPr>
+              <a:t>Orçamento inteligente</a:t>
+            </a:r>
+            <a:endParaRPr lang="en-US" sz="1500" dirty="0"/>
+          </a:p>
+        </p:txBody>
+      </p:sp>
+      <p:sp>
+        <p:nvSpPr>
+          <p:cNvPr id="19" name="Text 17"/>
+          <p:cNvSpPr/>
+          <p:nvPr/>
+        </p:nvSpPr>
+        <p:spPr>
+          <a:xfrm>
+            <a:off x="6492240" y="2862072"/>
+            <a:ext cx="1965960" cy="1920240"/>
+          </a:xfrm>
+          <a:prstGeom prst="rect">
+            <a:avLst/>
+          </a:prstGeom>
+          <a:noFill/>
+          <a:ln/>
+        </p:spPr>
+        <p:txBody>
+          <a:bodyPr wrap="square" lIns="0" tIns="0" rIns="0" bIns="0" rtlCol="0" anchor="t"/>
+          <a:lstStyle/>
+          <a:p>
+            <a:pPr marL="0" indent="0" algn="l">
+              <a:lnSpc>
+                <a:spcPct val="100000"/>
+              </a:lnSpc>
+              <a:buNone/>
+            </a:pPr>
+            <a:r>
+              <a:rPr lang="en-US" sz="1050" dirty="0">
+                <a:solidFill>
+                  <a:srgbClr val="A9AFB8"/>
+                </a:solidFill>
+                <a:latin typeface="Calibri" pitchFamily="34" charset="0"/>
+                <a:ea typeface="Calibri" pitchFamily="34" charset="-122"/>
+                <a:cs typeface="Calibri" pitchFamily="34" charset="-120"/>
+              </a:rPr>
+              <a:t>Consulta de preços de materiais por IA e controle de orçamento da obra.</a:t>
+            </a:r>
+            <a:endParaRPr lang="en-US" sz="1050" dirty="0"/>
+          </a:p>
+        </p:txBody>
+      </p:sp>
+      <p:sp>
+        <p:nvSpPr>
+          <p:cNvPr id="20" name="Shape 18"/>
+          <p:cNvSpPr/>
+          <p:nvPr/>
+        </p:nvSpPr>
+        <p:spPr>
+          <a:xfrm>
+            <a:off x="9006840" y="1691640"/>
+            <a:ext cx="2514600" cy="3246120"/>
+          </a:xfrm>
+          <a:prstGeom prst="roundRect">
+            <a:avLst>
+              <a:gd name="adj" fmla="val 2909"/>
+            </a:avLst>
+          </a:prstGeom>
+          <a:solidFill>
+            <a:srgbClr val="262B34"/>
+          </a:solidFill>
+          <a:ln/>
+          <a:effectLst>
+            <a:outerShdw blurRad="101600" dist="38100" dir="2700000" algn="bl" rotWithShape="0">
+              <a:srgbClr val="000000">
+                <a:alpha val="15000"/>
+              </a:srgbClr>
+            </a:outerShdw>
+          </a:effectLst>
+        </p:spPr>
+      </p:sp>
+      <p:sp>
+        <p:nvSpPr>
+          <p:cNvPr id="21" name="Shape 19"/>
+          <p:cNvSpPr/>
+          <p:nvPr/>
+        </p:nvSpPr>
+        <p:spPr>
+          <a:xfrm>
+            <a:off x="9235440" y="1920240"/>
+            <a:ext cx="457200" cy="457200"/>
+          </a:xfrm>
+          <a:prstGeom prst="ellipse">
+            <a:avLst/>
+          </a:prstGeom>
+          <a:solidFill>
+            <a:srgbClr val="E8590C"/>
+          </a:solidFill>
+          <a:ln/>
+        </p:spPr>
+      </p:sp>
+      <p:sp>
+        <p:nvSpPr>
+          <p:cNvPr id="22" name="Text 20"/>
+          <p:cNvSpPr/>
+          <p:nvPr/>
+        </p:nvSpPr>
+        <p:spPr>
+          <a:xfrm>
+            <a:off x="9235440" y="1920240"/>
+            <a:ext cx="457200" cy="457200"/>
+          </a:xfrm>
+          <a:prstGeom prst="rect">
+            <a:avLst/>
+          </a:prstGeom>
+          <a:noFill/>
+          <a:ln/>
+        </p:spPr>
+        <p:txBody>
+          <a:bodyPr wrap="square" lIns="0" tIns="0" rIns="0" bIns="0" rtlCol="0" anchor="ctr"/>
+          <a:lstStyle/>
+          <a:p>
+            <a:pPr marL="0" indent="0" algn="ctr">
+              <a:buNone/>
+            </a:pPr>
+            <a:r>
+              <a:rPr lang="en-US" sz="1800" b="1" dirty="0">
+                <a:solidFill>
+                  <a:srgbClr val="FFFFFF"/>
+                </a:solidFill>
+                <a:latin typeface="Calibri" pitchFamily="34" charset="0"/>
+                <a:ea typeface="Calibri" pitchFamily="34" charset="-122"/>
+                <a:cs typeface="Calibri" pitchFamily="34" charset="-120"/>
+              </a:rPr>
+              <a:t>4</a:t>
+            </a:r>
+            <a:endParaRPr lang="en-US" sz="1800" dirty="0"/>
+          </a:p>
+        </p:txBody>
+      </p:sp>
+      <p:sp>
+        <p:nvSpPr>
+          <p:cNvPr id="23" name="Text 21"/>
+          <p:cNvSpPr/>
+          <p:nvPr/>
+        </p:nvSpPr>
+        <p:spPr>
+          <a:xfrm>
+            <a:off x="9281160" y="2468880"/>
+            <a:ext cx="1965960" cy="384048"/>
+          </a:xfrm>
+          <a:prstGeom prst="rect">
+            <a:avLst/>
+          </a:prstGeom>
+          <a:noFill/>
+          <a:ln/>
+        </p:spPr>
+        <p:txBody>
+          <a:bodyPr wrap="square" lIns="0" tIns="0" rIns="0" bIns="0" rtlCol="0" anchor="t"/>
+          <a:lstStyle/>
+          <a:p>
+            <a:pPr marL="0" indent="0" algn="l">
+              <a:buNone/>
+            </a:pPr>
+            <a:r>
+              <a:rPr lang="en-US" sz="1500" b="1" dirty="0">
+                <a:solidFill>
+                  <a:srgbClr val="FFFFFF"/>
+                </a:solidFill>
+                <a:latin typeface="Calibri" pitchFamily="34" charset="0"/>
+                <a:ea typeface="Calibri" pitchFamily="34" charset="-122"/>
+                <a:cs typeface="Calibri" pitchFamily="34" charset="-120"/>
+              </a:rPr>
+              <a:t>Painel do cliente</a:t>
+            </a:r>
+            <a:endParaRPr lang="en-US" sz="1500" dirty="0"/>
+          </a:p>
+        </p:txBody>
+      </p:sp>
+      <p:sp>
+        <p:nvSpPr>
+          <p:cNvPr id="24" name="Text 22"/>
+          <p:cNvSpPr/>
+          <p:nvPr/>
+        </p:nvSpPr>
+        <p:spPr>
+          <a:xfrm>
+            <a:off x="9281160" y="2862072"/>
+            <a:ext cx="1965960" cy="1920240"/>
+          </a:xfrm>
+          <a:prstGeom prst="rect">
+            <a:avLst/>
+          </a:prstGeom>
+          <a:noFill/>
+          <a:ln/>
+        </p:spPr>
+        <p:txBody>
+          <a:bodyPr wrap="square" lIns="0" tIns="0" rIns="0" bIns="0" rtlCol="0" anchor="t"/>
+          <a:lstStyle/>
+          <a:p>
+            <a:pPr marL="0" indent="0" algn="l">
+              <a:lnSpc>
+                <a:spcPct val="100000"/>
+              </a:lnSpc>
+              <a:buNone/>
+            </a:pPr>
+            <a:r>
+              <a:rPr lang="en-US" sz="1050" dirty="0">
+                <a:solidFill>
+                  <a:srgbClr val="A9AFB8"/>
+                </a:solidFill>
+                <a:latin typeface="Calibri" pitchFamily="34" charset="0"/>
+                <a:ea typeface="Calibri" pitchFamily="34" charset="-122"/>
+                <a:cs typeface="Calibri" pitchFamily="34" charset="-120"/>
+              </a:rPr>
+              <a:t>Cliente acompanha tudo em tempo real; mercado de sobras dá destino ao material excedente.</a:t>
+            </a:r>
+            <a:endParaRPr lang="en-US" sz="1050" dirty="0"/>
+          </a:p>
+        </p:txBody>
+      </p:sp>
+      <p:sp>
+        <p:nvSpPr>
+          <p:cNvPr id="25" name="Text 23"/>
+          <p:cNvSpPr/>
+          <p:nvPr/>
+        </p:nvSpPr>
+        <p:spPr>
+          <a:xfrm>
+            <a:off x="640080" y="5166360"/>
+            <a:ext cx="10881360" cy="365760"/>
+          </a:xfrm>
+          <a:prstGeom prst="rect">
+            <a:avLst/>
+          </a:prstGeom>
+          <a:noFill/>
+          <a:ln/>
+        </p:spPr>
+        <p:txBody>
+          <a:bodyPr wrap="square" lIns="0" tIns="0" rIns="0" bIns="0" rtlCol="0" anchor="ctr"/>
+          <a:lstStyle/>
+          <a:p>
+            <a:pPr marL="0" indent="0" algn="l">
+              <a:buNone/>
+            </a:pPr>
+            <a:r>
+              <a:rPr lang="en-US" sz="1250" i="1" dirty="0">
+                <a:solidFill>
+                  <a:srgbClr val="A9AFB8"/>
+                </a:solidFill>
+                <a:latin typeface="Calibri" pitchFamily="34" charset="0"/>
+                <a:ea typeface="Calibri" pitchFamily="34" charset="-122"/>
+                <a:cs typeface="Calibri" pitchFamily="34" charset="-120"/>
+              </a:rPr>
+              <a:t>Stack: Python + Streamlit  ·  PostgreSQL  ·  IA (Gemini via OpenRouter)  ·  Docker + Nginx</a:t>
+            </a:r>
+            <a:endParaRPr lang="en-US" sz="1250" dirty="0"/>
+          </a:p>
+        </p:txBody>
+      </p:sp>
+    </p:spTree>
+  </p:cSld>
+  <p:clrMapOvr>
+    <a:masterClrMapping/>
+  </p:clrMapOvr>
+</p:sld>
+</file>
+
+<file path=ppt/slides/slide4.xml><?xml version="1.0" encoding="utf-8"?>
+<p:sld xmlns:a="http://schemas.openxmlformats.org/drawingml/2006/main" xmlns:r="http://schemas.openxmlformats.org/officeDocument/2006/relationships" xmlns:p="http://schemas.openxmlformats.org/presentationml/2006/main">
+  <p:cSld name="Slide 4">
+    <p:bg>
+      <p:bgPr>
+        <a:solidFill>
+          <a:srgbClr val="1B1E24"/>
+        </a:solidFill>
+        <a:effectLst/>
+      </p:bgPr>
+    </p:bg>
+    <p:spTree>
+      <p:nvGrpSpPr>
+        <p:cNvPr id="1" name=""/>
+        <p:cNvGrpSpPr/>
+        <p:nvPr/>
+      </p:nvGrpSpPr>
+      <p:grpSpPr>
+        <a:xfrm>
+          <a:off x="0" y="0"/>
+          <a:ext cx="0" cy="0"/>
+          <a:chOff x="0" y="0"/>
+          <a:chExt cx="0" cy="0"/>
+        </a:xfrm>
+      </p:grpSpPr>
+      <p:sp>
+        <p:nvSpPr>
+          <p:cNvPr id="2" name="Shape 0"/>
+          <p:cNvSpPr/>
+          <p:nvPr/>
+        </p:nvSpPr>
+        <p:spPr>
+          <a:xfrm>
+            <a:off x="640080" y="566928"/>
+            <a:ext cx="292608" cy="292608"/>
+          </a:xfrm>
+          <a:prstGeom prst="ellipse">
+            <a:avLst/>
+          </a:prstGeom>
+          <a:solidFill>
+            <a:srgbClr val="E8590C"/>
+          </a:solidFill>
+          <a:ln/>
+        </p:spPr>
+      </p:sp>
+      <p:sp>
+        <p:nvSpPr>
+          <p:cNvPr id="3" name="Text 1"/>
+          <p:cNvSpPr/>
+          <p:nvPr/>
+        </p:nvSpPr>
+        <p:spPr>
+          <a:xfrm>
+            <a:off x="1097280" y="384048"/>
+            <a:ext cx="9601200" cy="640080"/>
+          </a:xfrm>
+          <a:prstGeom prst="rect">
+            <a:avLst/>
+          </a:prstGeom>
+          <a:noFill/>
+          <a:ln/>
+        </p:spPr>
+        <p:txBody>
+          <a:bodyPr wrap="square" lIns="0" tIns="0" rIns="0" bIns="0" rtlCol="0" anchor="ctr"/>
+          <a:lstStyle/>
+          <a:p>
+            <a:pPr marL="0" indent="0" algn="l">
+              <a:buNone/>
+            </a:pPr>
+            <a:r>
+              <a:rPr lang="en-US" sz="3000" b="1" dirty="0">
+                <a:solidFill>
+                  <a:srgbClr val="FFFFFF"/>
+                </a:solidFill>
+                <a:latin typeface="Bookman Old Style" pitchFamily="34" charset="0"/>
+                <a:ea typeface="Bookman Old Style" pitchFamily="34" charset="-122"/>
+                <a:cs typeface="Bookman Old Style" pitchFamily="34" charset="-120"/>
+              </a:rPr>
+              <a:t>Modelo Entidade-Relacionamento</a:t>
+            </a:r>
+            <a:endParaRPr lang="en-US" sz="3000" dirty="0"/>
+          </a:p>
+        </p:txBody>
+      </p:sp>
+      <p:sp>
+        <p:nvSpPr>
+          <p:cNvPr id="4" name="Text 2"/>
+          <p:cNvSpPr/>
+          <p:nvPr/>
+        </p:nvSpPr>
+        <p:spPr>
+          <a:xfrm>
+            <a:off x="640080" y="1078992"/>
+            <a:ext cx="10881360" cy="411480"/>
+          </a:xfrm>
+          <a:prstGeom prst="rect">
+            <a:avLst/>
+          </a:prstGeom>
+          <a:noFill/>
+          <a:ln/>
+        </p:spPr>
+        <p:txBody>
+          <a:bodyPr wrap="square" lIns="0" tIns="0" rIns="0" bIns="0" rtlCol="0" anchor="t"/>
+          <a:lstStyle/>
+          <a:p>
+            <a:pPr marL="0" indent="0" algn="l">
+              <a:buNone/>
+            </a:pPr>
+            <a:r>
+              <a:rPr lang="en-US" sz="1400" i="1" dirty="0">
+                <a:solidFill>
+                  <a:srgbClr val="A9AFB8"/>
+                </a:solidFill>
+                <a:latin typeface="Calibri" pitchFamily="34" charset="0"/>
+                <a:ea typeface="Calibri" pitchFamily="34" charset="-122"/>
+                <a:cs typeface="Calibri" pitchFamily="34" charset="-120"/>
+              </a:rPr>
+              <a:t>Banco de dados atualizado após a Entrega 1 — usuários, obras, diário, orçamento, cronograma e sobras</a:t>
+            </a:r>
+            <a:endParaRPr lang="en-US" sz="1400" dirty="0"/>
+          </a:p>
+        </p:txBody>
+      </p:sp>
+      <p:sp>
+        <p:nvSpPr>
+          <p:cNvPr id="5" name="Shape 3"/>
+          <p:cNvSpPr/>
+          <p:nvPr/>
+        </p:nvSpPr>
+        <p:spPr>
+          <a:xfrm>
+            <a:off x="1347239" y="1554480"/>
+            <a:ext cx="9497217" cy="4709160"/>
+          </a:xfrm>
+          <a:prstGeom prst="roundRect">
+            <a:avLst>
+              <a:gd name="adj" fmla="val 1165"/>
+            </a:avLst>
+          </a:prstGeom>
+          <a:solidFill>
+            <a:srgbClr val="FFFFFF"/>
+          </a:solidFill>
+          <a:ln/>
+          <a:effectLst>
+            <a:outerShdw blurRad="101600" dist="38100" dir="2700000" algn="bl" rotWithShape="0">
+              <a:srgbClr val="000000">
+                <a:alpha val="15000"/>
+              </a:srgbClr>
+            </a:outerShdw>
+          </a:effectLst>
+        </p:spPr>
+      </p:sp>
       <p:pic>
         <p:nvPicPr>
-          <p:cNvPr id="6" name="Image 0" descr="C:/Users/wagner/Desktop/CIENCIA DE DADOS/IAOBRAS/Diagramas/Diagrama de Caso de Uso.png">    </p:cNvPr>
+          <p:cNvPr id="6" name="Image 0" descr="C:/Users/wagner/Desktop/CIENCIA DE DADOS/IAOBRAS/Diagramas/Diagrama Entidade-Relacionamento (DER).png"/>
           <p:cNvPicPr>
             <a:picLocks noChangeAspect="1"/>
           </p:cNvPicPr>
           <p:nvPr/>
         </p:nvPicPr>
         <p:blipFill>
-          <a:blip r:embed="rId1"/>
-          <a:srcRect l="0" r="0" t="0" b="0"/>
+          <a:blip r:embed="rId3"/>
+          <a:srcRect/>
           <a:stretch/>
         </p:blipFill>
         <p:spPr>
           <a:xfrm>
-            <a:off x="3072032" y="1691640"/>
-            <a:ext cx="6047630" cy="3657600"/>
+            <a:off x="1484399" y="1691640"/>
+            <a:ext cx="9222897" cy="4434840"/>
           </a:xfrm>
           <a:prstGeom prst="rect">
             <a:avLst/>
           </a:prstGeom>
         </p:spPr>
       </p:pic>
-      <p:sp>
-        <p:nvSpPr>
-          <p:cNvPr id="7" name="Shape 4"/>
-          <p:cNvSpPr/>
-          <p:nvPr/>
-        </p:nvSpPr>
-        <p:spPr>
-          <a:xfrm>
-            <a:off x="2118208" y="5806440"/>
-            <a:ext cx="2468880" cy="457200"/>
-          </a:xfrm>
-          <a:prstGeom prst="roundRect">
-            <a:avLst>
-              <a:gd name="adj" fmla="val 50000"/>
-            </a:avLst>
-          </a:prstGeom>
-          <a:solidFill>
-            <a:srgbClr val="FBE7DA"/>
-          </a:solidFill>
-          <a:ln/>
-        </p:spPr>
-      </p:sp>
-      <p:sp>
-        <p:nvSpPr>
-          <p:cNvPr id="8" name="Text 5"/>
-          <p:cNvSpPr/>
-          <p:nvPr/>
-        </p:nvSpPr>
-        <p:spPr>
-          <a:xfrm>
-            <a:off x="2118208" y="5806440"/>
-            <a:ext cx="2468880" cy="457200"/>
+    </p:spTree>
+  </p:cSld>
+  <p:clrMapOvr>
+    <a:masterClrMapping/>
+  </p:clrMapOvr>
+</p:sld>
+</file>
+
+<file path=ppt/slides/slide5.xml><?xml version="1.0" encoding="utf-8"?>
+<p:sld xmlns:a="http://schemas.openxmlformats.org/drawingml/2006/main" xmlns:r="http://schemas.openxmlformats.org/officeDocument/2006/relationships" xmlns:p="http://schemas.openxmlformats.org/presentationml/2006/main">
+  <p:cSld name="Slide 5">
+    <p:bg>
+      <p:bgPr>
+        <a:solidFill>
+          <a:srgbClr val="1B1E24"/>
+        </a:solidFill>
+        <a:effectLst/>
+      </p:bgPr>
+    </p:bg>
+    <p:spTree>
+      <p:nvGrpSpPr>
+        <p:cNvPr id="1" name=""/>
+        <p:cNvGrpSpPr/>
+        <p:nvPr/>
+      </p:nvGrpSpPr>
+      <p:grpSpPr>
+        <a:xfrm>
+          <a:off x="0" y="0"/>
+          <a:ext cx="0" cy="0"/>
+          <a:chOff x="0" y="0"/>
+          <a:chExt cx="0" cy="0"/>
+        </a:xfrm>
+      </p:grpSpPr>
+      <p:sp>
+        <p:nvSpPr>
+          <p:cNvPr id="2" name="Shape 0"/>
+          <p:cNvSpPr/>
+          <p:nvPr/>
+        </p:nvSpPr>
+        <p:spPr>
+          <a:xfrm>
+            <a:off x="640080" y="414528"/>
+            <a:ext cx="292608" cy="292608"/>
+          </a:xfrm>
+          <a:prstGeom prst="ellipse">
+            <a:avLst/>
+          </a:prstGeom>
+          <a:solidFill>
+            <a:srgbClr val="E8590C"/>
+          </a:solidFill>
+          <a:ln/>
+        </p:spPr>
+      </p:sp>
+      <p:sp>
+        <p:nvSpPr>
+          <p:cNvPr id="3" name="Text 1"/>
+          <p:cNvSpPr/>
+          <p:nvPr/>
+        </p:nvSpPr>
+        <p:spPr>
+          <a:xfrm>
+            <a:off x="1097280" y="231648"/>
+            <a:ext cx="9601200" cy="640080"/>
           </a:xfrm>
           <a:prstGeom prst="rect">
             <a:avLst/>
@@ -3712,146 +4466,115 @@
           <a:bodyPr wrap="square" lIns="0" tIns="0" rIns="0" bIns="0" rtlCol="0" anchor="ctr"/>
           <a:lstStyle/>
           <a:p>
-            <a:pPr algn="ctr" indent="0" marL="0">
-              <a:buNone/>
-            </a:pPr>
-            <a:r>
-              <a:rPr lang="en-US" sz="1200" b="1" dirty="0">
-                <a:solidFill>
-                  <a:srgbClr val="E8590C"/>
+            <a:pPr marL="0" indent="0" algn="l">
+              <a:buNone/>
+            </a:pPr>
+            <a:r>
+              <a:rPr lang="en-US" sz="3000" b="1" dirty="0">
+                <a:solidFill>
+                  <a:srgbClr val="FFFFFF"/>
+                </a:solidFill>
+                <a:latin typeface="Bookman Old Style" pitchFamily="34" charset="0"/>
+                <a:ea typeface="Bookman Old Style" pitchFamily="34" charset="-122"/>
+                <a:cs typeface="Bookman Old Style" pitchFamily="34" charset="-120"/>
+              </a:rPr>
+              <a:t>Diagrama de Caso de Uso</a:t>
+            </a:r>
+            <a:endParaRPr lang="en-US" sz="3000" dirty="0"/>
+          </a:p>
+        </p:txBody>
+      </p:sp>
+      <p:sp>
+        <p:nvSpPr>
+          <p:cNvPr id="4" name="Text 2"/>
+          <p:cNvSpPr/>
+          <p:nvPr/>
+        </p:nvSpPr>
+        <p:spPr>
+          <a:xfrm>
+            <a:off x="640080" y="875792"/>
+            <a:ext cx="10881360" cy="411480"/>
+          </a:xfrm>
+          <a:prstGeom prst="rect">
+            <a:avLst/>
+          </a:prstGeom>
+          <a:noFill/>
+          <a:ln/>
+        </p:spPr>
+        <p:txBody>
+          <a:bodyPr wrap="square" lIns="0" tIns="0" rIns="0" bIns="0" rtlCol="0" anchor="t"/>
+          <a:lstStyle/>
+          <a:p>
+            <a:pPr marL="0" indent="0" algn="l">
+              <a:buNone/>
+            </a:pPr>
+            <a:r>
+              <a:rPr lang="en-US" sz="1400" i="1" dirty="0">
+                <a:solidFill>
+                  <a:srgbClr val="A9AFB8"/>
                 </a:solidFill>
                 <a:latin typeface="Calibri" pitchFamily="34" charset="0"/>
                 <a:ea typeface="Calibri" pitchFamily="34" charset="-122"/>
                 <a:cs typeface="Calibri" pitchFamily="34" charset="-120"/>
               </a:rPr>
-              <a:t>Mestre de Obras</a:t>
-            </a:r>
-            <a:endParaRPr lang="en-US" sz="1200" dirty="0"/>
-          </a:p>
-        </p:txBody>
-      </p:sp>
-      <p:sp>
-        <p:nvSpPr>
-          <p:cNvPr id="9" name="Shape 6"/>
-          <p:cNvSpPr/>
-          <p:nvPr/>
-        </p:nvSpPr>
-        <p:spPr>
-          <a:xfrm>
-            <a:off x="4861408" y="5806440"/>
-            <a:ext cx="2468880" cy="457200"/>
+              <a:t>Atores do sistema e principais funcionalidades disponíveis para cada perfil</a:t>
+            </a:r>
+            <a:endParaRPr lang="en-US" sz="1400" dirty="0"/>
+          </a:p>
+        </p:txBody>
+      </p:sp>
+      <p:sp>
+        <p:nvSpPr>
+          <p:cNvPr id="5" name="Shape 3"/>
+          <p:cNvSpPr/>
+          <p:nvPr/>
+        </p:nvSpPr>
+        <p:spPr>
+          <a:xfrm>
+            <a:off x="1079680" y="1122536"/>
+            <a:ext cx="9633194" cy="5675374"/>
           </a:xfrm>
           <a:prstGeom prst="roundRect">
             <a:avLst>
-              <a:gd name="adj" fmla="val 50000"/>
+              <a:gd name="adj" fmla="val 1083"/>
             </a:avLst>
           </a:prstGeom>
           <a:solidFill>
-            <a:srgbClr val="FBE7DA"/>
-          </a:solidFill>
-          <a:ln/>
-        </p:spPr>
-      </p:sp>
-      <p:sp>
-        <p:nvSpPr>
-          <p:cNvPr id="10" name="Text 7"/>
-          <p:cNvSpPr/>
-          <p:nvPr/>
-        </p:nvSpPr>
-        <p:spPr>
-          <a:xfrm>
-            <a:off x="4861408" y="5806440"/>
-            <a:ext cx="2468880" cy="457200"/>
-          </a:xfrm>
-          <a:prstGeom prst="rect">
-            <a:avLst/>
-          </a:prstGeom>
-          <a:noFill/>
-          <a:ln/>
-        </p:spPr>
-        <p:txBody>
-          <a:bodyPr wrap="square" lIns="0" tIns="0" rIns="0" bIns="0" rtlCol="0" anchor="ctr"/>
-          <a:lstStyle/>
-          <a:p>
-            <a:pPr algn="ctr" indent="0" marL="0">
-              <a:buNone/>
-            </a:pPr>
-            <a:r>
-              <a:rPr lang="en-US" sz="1200" b="1" dirty="0">
-                <a:solidFill>
-                  <a:srgbClr val="E8590C"/>
-                </a:solidFill>
-                <a:latin typeface="Calibri" pitchFamily="34" charset="0"/>
-                <a:ea typeface="Calibri" pitchFamily="34" charset="-122"/>
-                <a:cs typeface="Calibri" pitchFamily="34" charset="-120"/>
-              </a:rPr>
-              <a:t>Cliente / Proprietário</a:t>
-            </a:r>
-            <a:endParaRPr lang="en-US" sz="1200" dirty="0"/>
-          </a:p>
-        </p:txBody>
-      </p:sp>
-      <p:sp>
-        <p:nvSpPr>
-          <p:cNvPr id="11" name="Shape 8"/>
-          <p:cNvSpPr/>
-          <p:nvPr/>
-        </p:nvSpPr>
-        <p:spPr>
-          <a:xfrm>
-            <a:off x="7604608" y="5806440"/>
-            <a:ext cx="2468880" cy="457200"/>
-          </a:xfrm>
-          <a:prstGeom prst="roundRect">
-            <a:avLst>
-              <a:gd name="adj" fmla="val 50000"/>
-            </a:avLst>
-          </a:prstGeom>
-          <a:solidFill>
-            <a:srgbClr val="FBE7DA"/>
-          </a:solidFill>
-          <a:ln/>
-        </p:spPr>
-      </p:sp>
-      <p:sp>
-        <p:nvSpPr>
-          <p:cNvPr id="12" name="Text 9"/>
-          <p:cNvSpPr/>
-          <p:nvPr/>
-        </p:nvSpPr>
-        <p:spPr>
-          <a:xfrm>
-            <a:off x="7604608" y="5806440"/>
-            <a:ext cx="2468880" cy="457200"/>
-          </a:xfrm>
-          <a:prstGeom prst="rect">
-            <a:avLst/>
-          </a:prstGeom>
-          <a:noFill/>
-          <a:ln/>
-        </p:spPr>
-        <p:txBody>
-          <a:bodyPr wrap="square" lIns="0" tIns="0" rIns="0" bIns="0" rtlCol="0" anchor="ctr"/>
-          <a:lstStyle/>
-          <a:p>
-            <a:pPr algn="ctr" indent="0" marL="0">
-              <a:buNone/>
-            </a:pPr>
-            <a:r>
-              <a:rPr lang="en-US" sz="1200" b="1" dirty="0">
-                <a:solidFill>
-                  <a:srgbClr val="E8590C"/>
-                </a:solidFill>
-                <a:latin typeface="Calibri" pitchFamily="34" charset="0"/>
-                <a:ea typeface="Calibri" pitchFamily="34" charset="-122"/>
-                <a:cs typeface="Calibri" pitchFamily="34" charset="-120"/>
-              </a:rPr>
-              <a:t>Comprador de Sobras</a:t>
-            </a:r>
-            <a:endParaRPr lang="en-US" sz="1200" dirty="0"/>
-          </a:p>
-        </p:txBody>
-      </p:sp>
+            <a:srgbClr val="FFFFFF"/>
+          </a:solidFill>
+          <a:ln/>
+          <a:effectLst>
+            <a:outerShdw blurRad="101600" dist="38100" dir="2700000" algn="bl" rotWithShape="0">
+              <a:srgbClr val="000000">
+                <a:alpha val="15000"/>
+              </a:srgbClr>
+            </a:outerShdw>
+          </a:effectLst>
+        </p:spPr>
+      </p:sp>
+      <p:pic>
+        <p:nvPicPr>
+          <p:cNvPr id="6" name="Image 0" descr="C:/Users/wagner/Desktop/CIENCIA DE DADOS/IAOBRAS/Diagramas/Diagrama de Caso de Uso.png"/>
+          <p:cNvPicPr>
+            <a:picLocks noChangeAspect="1"/>
+          </p:cNvPicPr>
+          <p:nvPr/>
+        </p:nvPicPr>
+        <p:blipFill>
+          <a:blip r:embed="rId3"/>
+          <a:srcRect/>
+          <a:stretch/>
+        </p:blipFill>
+        <p:spPr>
+          <a:xfrm>
+            <a:off x="1232951" y="1130663"/>
+            <a:ext cx="9384709" cy="5673634"/>
+          </a:xfrm>
+          <a:prstGeom prst="rect">
+            <a:avLst/>
+          </a:prstGeom>
+        </p:spPr>
+      </p:pic>
     </p:spTree>
   </p:cSld>
   <p:clrMapOvr>
@@ -3868,6 +4591,7 @@
         <a:solidFill>
           <a:srgbClr val="1B1E24"/>
         </a:solidFill>
+        <a:effectLst/>
       </p:bgPr>
     </p:bg>
     <p:spTree>
@@ -3947,7 +4671,7 @@
           <a:bodyPr wrap="square" lIns="0" tIns="0" rIns="0" bIns="0" rtlCol="0" anchor="ctr"/>
           <a:lstStyle/>
           <a:p>
-            <a:pPr algn="l" indent="0" marL="0">
+            <a:pPr marL="0" indent="0" algn="l">
               <a:buNone/>
             </a:pPr>
             <a:r>
@@ -3986,7 +4710,7 @@
           <a:bodyPr wrap="square" lIns="0" tIns="0" rIns="0" bIns="0" rtlCol="0" anchor="ctr"/>
           <a:lstStyle/>
           <a:p>
-            <a:pPr algn="l" indent="0" marL="0">
+            <a:pPr marL="0" indent="0" algn="l">
               <a:buNone/>
             </a:pPr>
             <a:r>
@@ -4025,7 +4749,7 @@
           </a:solidFill>
           <a:ln/>
           <a:effectLst>
-            <a:outerShdw sx="100000" sy="100000" kx="0" ky="0" algn="bl" rotWithShape="0" blurRad="101600" dist="38100" dir="2700000">
+            <a:outerShdw blurRad="101600" dist="38100" dir="2700000" algn="bl" rotWithShape="0">
               <a:srgbClr val="000000">
                 <a:alpha val="15000"/>
               </a:srgbClr>
@@ -4074,7 +4798,7 @@
           <a:bodyPr wrap="square" lIns="0" tIns="0" rIns="0" bIns="0" rtlCol="0" anchor="ctr"/>
           <a:lstStyle/>
           <a:p>
-            <a:pPr algn="ctr" indent="0" marL="0">
+            <a:pPr marL="0" indent="0" algn="ctr">
               <a:buNone/>
             </a:pPr>
             <a:r>
@@ -4113,7 +4837,7 @@
           <a:bodyPr wrap="square" lIns="0" tIns="0" rIns="0" bIns="0" rtlCol="0" anchor="t"/>
           <a:lstStyle/>
           <a:p>
-            <a:pPr algn="l" indent="0" marL="0">
+            <a:pPr marL="0" indent="0" algn="l">
               <a:buNone/>
             </a:pPr>
             <a:r>
@@ -4152,7 +4876,7 @@
           <a:bodyPr wrap="square" lIns="0" tIns="0" rIns="0" bIns="0" rtlCol="0" anchor="t"/>
           <a:lstStyle/>
           <a:p>
-            <a:pPr algn="l" indent="0" marL="0">
+            <a:pPr marL="0" indent="0" algn="l">
               <a:lnSpc>
                 <a:spcPct val="100000"/>
               </a:lnSpc>
@@ -4194,7 +4918,7 @@
           </a:solidFill>
           <a:ln/>
           <a:effectLst>
-            <a:outerShdw sx="100000" sy="100000" kx="0" ky="0" algn="bl" rotWithShape="0" blurRad="101600" dist="38100" dir="2700000">
+            <a:outerShdw blurRad="101600" dist="38100" dir="2700000" algn="bl" rotWithShape="0">
               <a:srgbClr val="000000">
                 <a:alpha val="15000"/>
               </a:srgbClr>
@@ -4243,7 +4967,7 @@
           <a:bodyPr wrap="square" lIns="0" tIns="0" rIns="0" bIns="0" rtlCol="0" anchor="ctr"/>
           <a:lstStyle/>
           <a:p>
-            <a:pPr algn="ctr" indent="0" marL="0">
+            <a:pPr marL="0" indent="0" algn="ctr">
               <a:buNone/>
             </a:pPr>
             <a:r>
@@ -4282,7 +5006,7 @@
           <a:bodyPr wrap="square" lIns="0" tIns="0" rIns="0" bIns="0" rtlCol="0" anchor="t"/>
           <a:lstStyle/>
           <a:p>
-            <a:pPr algn="l" indent="0" marL="0">
+            <a:pPr marL="0" indent="0" algn="l">
               <a:buNone/>
             </a:pPr>
             <a:r>
@@ -4321,7 +5045,7 @@
           <a:bodyPr wrap="square" lIns="0" tIns="0" rIns="0" bIns="0" rtlCol="0" anchor="t"/>
           <a:lstStyle/>
           <a:p>
-            <a:pPr algn="l" indent="0" marL="0">
+            <a:pPr marL="0" indent="0" algn="l">
               <a:lnSpc>
                 <a:spcPct val="100000"/>
               </a:lnSpc>
@@ -4363,7 +5087,7 @@
           </a:solidFill>
           <a:ln/>
           <a:effectLst>
-            <a:outerShdw sx="100000" sy="100000" kx="0" ky="0" algn="bl" rotWithShape="0" blurRad="101600" dist="38100" dir="2700000">
+            <a:outerShdw blurRad="101600" dist="38100" dir="2700000" algn="bl" rotWithShape="0">
               <a:srgbClr val="000000">
                 <a:alpha val="15000"/>
               </a:srgbClr>
@@ -4412,7 +5136,7 @@
           <a:bodyPr wrap="square" lIns="0" tIns="0" rIns="0" bIns="0" rtlCol="0" anchor="ctr"/>
           <a:lstStyle/>
           <a:p>
-            <a:pPr algn="ctr" indent="0" marL="0">
+            <a:pPr marL="0" indent="0" algn="ctr">
               <a:buNone/>
             </a:pPr>
             <a:r>
@@ -4451,7 +5175,7 @@
           <a:bodyPr wrap="square" lIns="0" tIns="0" rIns="0" bIns="0" rtlCol="0" anchor="t"/>
           <a:lstStyle/>
           <a:p>
-            <a:pPr algn="l" indent="0" marL="0">
+            <a:pPr marL="0" indent="0" algn="l">
               <a:buNone/>
             </a:pPr>
             <a:r>
@@ -4490,7 +5214,7 @@
           <a:bodyPr wrap="square" lIns="0" tIns="0" rIns="0" bIns="0" rtlCol="0" anchor="t"/>
           <a:lstStyle/>
           <a:p>
-            <a:pPr algn="l" indent="0" marL="0">
+            <a:pPr marL="0" indent="0" algn="l">
               <a:lnSpc>
                 <a:spcPct val="100000"/>
               </a:lnSpc>
@@ -4532,7 +5256,7 @@
           </a:solidFill>
           <a:ln/>
           <a:effectLst>
-            <a:outerShdw sx="100000" sy="100000" kx="0" ky="0" algn="bl" rotWithShape="0" blurRad="101600" dist="38100" dir="2700000">
+            <a:outerShdw blurRad="101600" dist="38100" dir="2700000" algn="bl" rotWithShape="0">
               <a:srgbClr val="000000">
                 <a:alpha val="15000"/>
               </a:srgbClr>
@@ -4581,7 +5305,7 @@
           <a:bodyPr wrap="square" lIns="0" tIns="0" rIns="0" bIns="0" rtlCol="0" anchor="ctr"/>
           <a:lstStyle/>
           <a:p>
-            <a:pPr algn="ctr" indent="0" marL="0">
+            <a:pPr marL="0" indent="0" algn="ctr">
               <a:buNone/>
             </a:pPr>
             <a:r>
@@ -4620,7 +5344,7 @@
           <a:bodyPr wrap="square" lIns="0" tIns="0" rIns="0" bIns="0" rtlCol="0" anchor="t"/>
           <a:lstStyle/>
           <a:p>
-            <a:pPr algn="l" indent="0" marL="0">
+            <a:pPr marL="0" indent="0" algn="l">
               <a:buNone/>
             </a:pPr>
             <a:r>
@@ -4659,7 +5383,7 @@
           <a:bodyPr wrap="square" lIns="0" tIns="0" rIns="0" bIns="0" rtlCol="0" anchor="t"/>
           <a:lstStyle/>
           <a:p>
-            <a:pPr algn="l" indent="0" marL="0">
+            <a:pPr marL="0" indent="0" algn="l">
               <a:lnSpc>
                 <a:spcPct val="100000"/>
               </a:lnSpc>
@@ -4696,6 +5420,7 @@
         <a:solidFill>
           <a:srgbClr val="1B1E24"/>
         </a:solidFill>
+        <a:effectLst/>
       </p:bgPr>
     </p:bg>
     <p:spTree>
@@ -4720,16 +5445,14 @@
         </p:nvSpPr>
         <p:spPr>
           <a:xfrm>
-            <a:off x="8961120" y="-2286000"/>
-            <a:ext cx="5486400" cy="5486400"/>
+            <a:off x="640080" y="502920"/>
+            <a:ext cx="292608" cy="292608"/>
           </a:xfrm>
           <a:prstGeom prst="ellipse">
             <a:avLst/>
           </a:prstGeom>
           <a:solidFill>
-            <a:srgbClr val="E8590C">
-              <a:alpha val="12000"/>
-            </a:srgbClr>
+            <a:srgbClr val="E8590C"/>
           </a:solidFill>
           <a:ln/>
         </p:spPr>
@@ -4742,8 +5465,8 @@
         </p:nvSpPr>
         <p:spPr>
           <a:xfrm>
-            <a:off x="822960" y="2286000"/>
-            <a:ext cx="8686800" cy="1097280"/>
+            <a:off x="1097280" y="320040"/>
+            <a:ext cx="7680960" cy="594360"/>
           </a:xfrm>
           <a:prstGeom prst="rect">
             <a:avLst/>
@@ -4755,11 +5478,11 @@
           <a:bodyPr wrap="square" lIns="0" tIns="0" rIns="0" bIns="0" rtlCol="0" anchor="ctr"/>
           <a:lstStyle/>
           <a:p>
-            <a:pPr algn="l" indent="0" marL="0">
-              <a:buNone/>
-            </a:pPr>
-            <a:r>
-              <a:rPr lang="en-US" sz="5400" b="1" dirty="0">
+            <a:pPr marL="0" indent="0" algn="l">
+              <a:buNone/>
+            </a:pPr>
+            <a:r>
+              <a:rPr lang="en-US" sz="2700" b="1" dirty="0">
                 <a:solidFill>
                   <a:srgbClr val="FFFFFF"/>
                 </a:solidFill>
@@ -4767,9 +5490,9 @@
                 <a:ea typeface="Bookman Old Style" pitchFamily="34" charset="-122"/>
                 <a:cs typeface="Bookman Old Style" pitchFamily="34" charset="-120"/>
               </a:rPr>
-              <a:t>Obrigado!</a:t>
-            </a:r>
-            <a:endParaRPr lang="en-US" sz="5400" dirty="0"/>
+              <a:t>Protótipo — Interface Principal</a:t>
+            </a:r>
+            <a:endParaRPr lang="en-US" sz="2700" dirty="0"/>
           </a:p>
         </p:txBody>
       </p:sp>
@@ -4781,8 +5504,8 @@
         </p:nvSpPr>
         <p:spPr>
           <a:xfrm>
-            <a:off x="868680" y="3291840"/>
-            <a:ext cx="8686800" cy="548640"/>
+            <a:off x="1097280" y="896112"/>
+            <a:ext cx="7680960" cy="365760"/>
           </a:xfrm>
           <a:prstGeom prst="rect">
             <a:avLst/>
@@ -4791,14 +5514,14 @@
           <a:ln/>
         </p:spPr>
         <p:txBody>
-          <a:bodyPr wrap="square" lIns="0" tIns="0" rIns="0" bIns="0" rtlCol="0" anchor="ctr"/>
-          <a:lstStyle/>
-          <a:p>
-            <a:pPr algn="l" indent="0" marL="0">
-              <a:buNone/>
-            </a:pPr>
-            <a:r>
-              <a:rPr lang="en-US" sz="1800" dirty="0">
+          <a:bodyPr wrap="square" lIns="0" tIns="0" rIns="0" bIns="0" rtlCol="0" anchor="t"/>
+          <a:lstStyle/>
+          <a:p>
+            <a:pPr marL="0" indent="0" algn="l">
+              <a:buNone/>
+            </a:pPr>
+            <a:r>
+              <a:rPr lang="en-US" sz="1300" i="1" dirty="0">
                 <a:solidFill>
                   <a:srgbClr val="A9AFB8"/>
                 </a:solidFill>
@@ -4806,9 +5529,9 @@
                 <a:ea typeface="Calibri" pitchFamily="34" charset="-122"/>
                 <a:cs typeface="Calibri" pitchFamily="34" charset="-120"/>
               </a:rPr>
-              <a:t>Perguntas são bem-vindas.</a:t>
-            </a:r>
-            <a:endParaRPr lang="en-US" sz="1800" dirty="0"/>
+              <a:t>Dashboard inicial: status das obras, métricas e menu de navegação da plataforma.</a:t>
+            </a:r>
+            <a:endParaRPr lang="en-US" sz="1300" dirty="0"/>
           </a:p>
         </p:txBody>
       </p:sp>
@@ -4820,50 +5543,30 @@
         </p:nvSpPr>
         <p:spPr>
           <a:xfrm>
-            <a:off x="822960" y="4297680"/>
-            <a:ext cx="6583680" cy="1234440"/>
+            <a:off x="9189720" y="457200"/>
+            <a:ext cx="2331720" cy="502920"/>
           </a:xfrm>
           <a:prstGeom prst="roundRect">
             <a:avLst>
-              <a:gd name="adj" fmla="val 5926"/>
+              <a:gd name="adj" fmla="val 49091"/>
             </a:avLst>
           </a:prstGeom>
           <a:solidFill>
-            <a:srgbClr val="262B34"/>
-          </a:solidFill>
-          <a:ln/>
-        </p:spPr>
-      </p:sp>
-      <p:sp>
-        <p:nvSpPr>
-          <p:cNvPr id="6" name="Shape 4"/>
-          <p:cNvSpPr/>
-          <p:nvPr/>
-        </p:nvSpPr>
-        <p:spPr>
-          <a:xfrm>
-            <a:off x="1051560" y="4526280"/>
-            <a:ext cx="457200" cy="457200"/>
-          </a:xfrm>
-          <a:prstGeom prst="ellipse">
-            <a:avLst/>
-          </a:prstGeom>
-          <a:solidFill>
-            <a:srgbClr val="E8590C"/>
-          </a:solidFill>
-          <a:ln/>
-        </p:spPr>
-      </p:sp>
-      <p:sp>
-        <p:nvSpPr>
-          <p:cNvPr id="7" name="Text 5"/>
-          <p:cNvSpPr/>
-          <p:nvPr/>
-        </p:nvSpPr>
-        <p:spPr>
-          <a:xfrm>
-            <a:off x="1051560" y="4526280"/>
-            <a:ext cx="457200" cy="457200"/>
+            <a:srgbClr val="FBE7DA"/>
+          </a:solidFill>
+          <a:ln/>
+        </p:spPr>
+      </p:sp>
+      <p:sp>
+        <p:nvSpPr>
+          <p:cNvPr id="6" name="Text 4"/>
+          <p:cNvSpPr/>
+          <p:nvPr/>
+        </p:nvSpPr>
+        <p:spPr>
+          <a:xfrm>
+            <a:off x="9189720" y="457200"/>
+            <a:ext cx="2331720" cy="502920"/>
           </a:xfrm>
           <a:prstGeom prst="rect">
             <a:avLst/>
@@ -4875,34 +5578,139 @@
           <a:bodyPr wrap="square" lIns="0" tIns="0" rIns="0" bIns="0" rtlCol="0" anchor="ctr"/>
           <a:lstStyle/>
           <a:p>
-            <a:pPr algn="ctr" indent="0" marL="0">
-              <a:buNone/>
-            </a:pPr>
-            <a:r>
-              <a:rPr lang="en-US" sz="1600" b="1" dirty="0">
-                <a:solidFill>
-                  <a:srgbClr val="FFFFFF"/>
+            <a:pPr marL="0" indent="0" algn="ctr">
+              <a:buNone/>
+            </a:pPr>
+            <a:r>
+              <a:rPr lang="en-US" sz="1150" b="1" dirty="0">
+                <a:solidFill>
+                  <a:srgbClr val="E8590C"/>
                 </a:solidFill>
                 <a:latin typeface="Calibri" pitchFamily="34" charset="0"/>
                 <a:ea typeface="Calibri" pitchFamily="34" charset="-122"/>
                 <a:cs typeface="Calibri" pitchFamily="34" charset="-120"/>
               </a:rPr>
-              <a:t>W</a:t>
-            </a:r>
-            <a:endParaRPr lang="en-US" sz="1600" dirty="0"/>
-          </a:p>
-        </p:txBody>
-      </p:sp>
-      <p:sp>
-        <p:nvSpPr>
-          <p:cNvPr id="8" name="Text 6"/>
-          <p:cNvSpPr/>
-          <p:nvPr/>
-        </p:nvSpPr>
-        <p:spPr>
-          <a:xfrm>
-            <a:off x="1691640" y="4526280"/>
-            <a:ext cx="5394960" cy="914400"/>
+              <a:t>1 · Interface principal</a:t>
+            </a:r>
+            <a:endParaRPr lang="en-US" sz="1150" dirty="0"/>
+          </a:p>
+        </p:txBody>
+      </p:sp>
+      <p:sp>
+        <p:nvSpPr>
+          <p:cNvPr id="7" name="Shape 5"/>
+          <p:cNvSpPr/>
+          <p:nvPr/>
+        </p:nvSpPr>
+        <p:spPr>
+          <a:xfrm>
+            <a:off x="1261157" y="1399032"/>
+            <a:ext cx="9669380" cy="5111496"/>
+          </a:xfrm>
+          <a:prstGeom prst="roundRect">
+            <a:avLst>
+              <a:gd name="adj" fmla="val 894"/>
+            </a:avLst>
+          </a:prstGeom>
+          <a:solidFill>
+            <a:srgbClr val="262B34"/>
+          </a:solidFill>
+          <a:ln/>
+          <a:effectLst>
+            <a:outerShdw blurRad="101600" dist="38100" dir="2700000" algn="bl" rotWithShape="0">
+              <a:srgbClr val="000000">
+                <a:alpha val="15000"/>
+              </a:srgbClr>
+            </a:outerShdw>
+          </a:effectLst>
+        </p:spPr>
+      </p:sp>
+      <p:pic>
+        <p:nvPicPr>
+          <p:cNvPr id="8" name="Image 0" descr="C:/Users/wagner/Desktop/CIENCIA DE DADOS/IAOBRAS/doc/prints/01_home.png"/>
+          <p:cNvPicPr>
+            <a:picLocks noChangeAspect="1"/>
+          </p:cNvPicPr>
+          <p:nvPr/>
+        </p:nvPicPr>
+        <p:blipFill>
+          <a:blip r:embed="rId3"/>
+          <a:srcRect/>
+          <a:stretch/>
+        </p:blipFill>
+        <p:spPr>
+          <a:xfrm>
+            <a:off x="1370885" y="1508760"/>
+            <a:ext cx="9449924" cy="4892040"/>
+          </a:xfrm>
+          <a:prstGeom prst="rect">
+            <a:avLst/>
+          </a:prstGeom>
+        </p:spPr>
+      </p:pic>
+    </p:spTree>
+  </p:cSld>
+  <p:clrMapOvr>
+    <a:masterClrMapping/>
+  </p:clrMapOvr>
+</p:sld>
+</file>
+
+<file path=ppt/slides/slide8.xml><?xml version="1.0" encoding="utf-8"?>
+<p:sld xmlns:a="http://schemas.openxmlformats.org/drawingml/2006/main" xmlns:r="http://schemas.openxmlformats.org/officeDocument/2006/relationships" xmlns:p="http://schemas.openxmlformats.org/presentationml/2006/main">
+  <p:cSld name="Slide 8">
+    <p:bg>
+      <p:bgPr>
+        <a:solidFill>
+          <a:srgbClr val="1B1E24"/>
+        </a:solidFill>
+        <a:effectLst/>
+      </p:bgPr>
+    </p:bg>
+    <p:spTree>
+      <p:nvGrpSpPr>
+        <p:cNvPr id="1" name=""/>
+        <p:cNvGrpSpPr/>
+        <p:nvPr/>
+      </p:nvGrpSpPr>
+      <p:grpSpPr>
+        <a:xfrm>
+          <a:off x="0" y="0"/>
+          <a:ext cx="0" cy="0"/>
+          <a:chOff x="0" y="0"/>
+          <a:chExt cx="0" cy="0"/>
+        </a:xfrm>
+      </p:grpSpPr>
+      <p:sp>
+        <p:nvSpPr>
+          <p:cNvPr id="2" name="Shape 0"/>
+          <p:cNvSpPr/>
+          <p:nvPr/>
+        </p:nvSpPr>
+        <p:spPr>
+          <a:xfrm>
+            <a:off x="640080" y="502920"/>
+            <a:ext cx="292608" cy="292608"/>
+          </a:xfrm>
+          <a:prstGeom prst="ellipse">
+            <a:avLst/>
+          </a:prstGeom>
+          <a:solidFill>
+            <a:srgbClr val="E8590C"/>
+          </a:solidFill>
+          <a:ln/>
+        </p:spPr>
+      </p:sp>
+      <p:sp>
+        <p:nvSpPr>
+          <p:cNvPr id="3" name="Text 1"/>
+          <p:cNvSpPr/>
+          <p:nvPr/>
+        </p:nvSpPr>
+        <p:spPr>
+          <a:xfrm>
+            <a:off x="1097280" y="320040"/>
+            <a:ext cx="7680960" cy="594360"/>
           </a:xfrm>
           <a:prstGeom prst="rect">
             <a:avLst/>
@@ -4914,67 +5722,420 @@
           <a:bodyPr wrap="square" lIns="0" tIns="0" rIns="0" bIns="0" rtlCol="0" anchor="ctr"/>
           <a:lstStyle/>
           <a:p>
-            <a:pPr algn="l" indent="0" marL="0">
-              <a:spcAft>
-                <a:spcPts val="200"/>
-              </a:spcAft>
-              <a:buNone/>
-            </a:pPr>
-            <a:r>
-              <a:rPr lang="en-US" sz="1500" b="1" dirty="0">
+            <a:pPr marL="0" indent="0" algn="l">
+              <a:buNone/>
+            </a:pPr>
+            <a:r>
+              <a:rPr lang="en-US" sz="2700" b="1" dirty="0">
                 <a:solidFill>
                   <a:srgbClr val="FFFFFF"/>
+                </a:solidFill>
+                <a:latin typeface="Bookman Old Style" pitchFamily="34" charset="0"/>
+                <a:ea typeface="Bookman Old Style" pitchFamily="34" charset="-122"/>
+                <a:cs typeface="Bookman Old Style" pitchFamily="34" charset="-120"/>
+              </a:rPr>
+              <a:t>Protótipo — CRUD de Obras</a:t>
+            </a:r>
+            <a:endParaRPr lang="en-US" sz="2700" dirty="0"/>
+          </a:p>
+        </p:txBody>
+      </p:sp>
+      <p:sp>
+        <p:nvSpPr>
+          <p:cNvPr id="4" name="Text 2"/>
+          <p:cNvSpPr/>
+          <p:nvPr/>
+        </p:nvSpPr>
+        <p:spPr>
+          <a:xfrm>
+            <a:off x="1097280" y="896112"/>
+            <a:ext cx="7680960" cy="365760"/>
+          </a:xfrm>
+          <a:prstGeom prst="rect">
+            <a:avLst/>
+          </a:prstGeom>
+          <a:noFill/>
+          <a:ln/>
+        </p:spPr>
+        <p:txBody>
+          <a:bodyPr wrap="square" lIns="0" tIns="0" rIns="0" bIns="0" rtlCol="0" anchor="t"/>
+          <a:lstStyle/>
+          <a:p>
+            <a:pPr marL="0" indent="0" algn="l">
+              <a:buNone/>
+            </a:pPr>
+            <a:r>
+              <a:rPr lang="en-US" sz="1300" i="1" dirty="0">
+                <a:solidFill>
+                  <a:srgbClr val="A9AFB8"/>
                 </a:solidFill>
                 <a:latin typeface="Calibri" pitchFamily="34" charset="0"/>
                 <a:ea typeface="Calibri" pitchFamily="34" charset="-122"/>
                 <a:cs typeface="Calibri" pitchFamily="34" charset="-120"/>
               </a:rPr>
-              <a:t>Wagner Machado dos Santos</a:t>
-            </a:r>
-            <a:endParaRPr lang="en-US" sz="1500" dirty="0"/>
-          </a:p>
-          <a:p>
-            <a:pPr algn="l" indent="0" marL="0">
-              <a:spcAft>
-                <a:spcPts val="200"/>
-              </a:spcAft>
-              <a:buNone/>
-            </a:pPr>
-            <a:r>
-              <a:rPr lang="en-US" sz="1300" dirty="0">
-                <a:solidFill>
-                  <a:srgbClr val="FFFFFF"/>
+              <a:t>Cadastro de obras pelo Mestre de Obras (criar, editar e listar registros).</a:t>
+            </a:r>
+            <a:endParaRPr lang="en-US" sz="1300" dirty="0"/>
+          </a:p>
+        </p:txBody>
+      </p:sp>
+      <p:sp>
+        <p:nvSpPr>
+          <p:cNvPr id="5" name="Shape 3"/>
+          <p:cNvSpPr/>
+          <p:nvPr/>
+        </p:nvSpPr>
+        <p:spPr>
+          <a:xfrm>
+            <a:off x="9189720" y="457200"/>
+            <a:ext cx="2331720" cy="502920"/>
+          </a:xfrm>
+          <a:prstGeom prst="roundRect">
+            <a:avLst>
+              <a:gd name="adj" fmla="val 49091"/>
+            </a:avLst>
+          </a:prstGeom>
+          <a:solidFill>
+            <a:srgbClr val="FBE7DA"/>
+          </a:solidFill>
+          <a:ln/>
+        </p:spPr>
+      </p:sp>
+      <p:sp>
+        <p:nvSpPr>
+          <p:cNvPr id="6" name="Text 4"/>
+          <p:cNvSpPr/>
+          <p:nvPr/>
+        </p:nvSpPr>
+        <p:spPr>
+          <a:xfrm>
+            <a:off x="9189720" y="457200"/>
+            <a:ext cx="2331720" cy="502920"/>
+          </a:xfrm>
+          <a:prstGeom prst="rect">
+            <a:avLst/>
+          </a:prstGeom>
+          <a:noFill/>
+          <a:ln/>
+        </p:spPr>
+        <p:txBody>
+          <a:bodyPr wrap="square" lIns="0" tIns="0" rIns="0" bIns="0" rtlCol="0" anchor="ctr"/>
+          <a:lstStyle/>
+          <a:p>
+            <a:pPr marL="0" indent="0" algn="ctr">
+              <a:buNone/>
+            </a:pPr>
+            <a:r>
+              <a:rPr lang="en-US" sz="1150" b="1" dirty="0">
+                <a:solidFill>
+                  <a:srgbClr val="E8590C"/>
                 </a:solidFill>
                 <a:latin typeface="Calibri" pitchFamily="34" charset="0"/>
                 <a:ea typeface="Calibri" pitchFamily="34" charset="-122"/>
                 <a:cs typeface="Calibri" pitchFamily="34" charset="-120"/>
               </a:rPr>
-              <a:t>machadinho94@hotmail.com</a:t>
-            </a:r>
-            <a:endParaRPr lang="en-US" sz="1500" dirty="0"/>
-          </a:p>
-          <a:p>
-            <a:pPr algn="l" indent="0" marL="0">
-              <a:spcAft>
-                <a:spcPts val="200"/>
-              </a:spcAft>
-              <a:buNone/>
-            </a:pPr>
-            <a:r>
-              <a:rPr lang="en-US" sz="1200" i="1" dirty="0">
+              <a:t>2 · CRUD</a:t>
+            </a:r>
+            <a:endParaRPr lang="en-US" sz="1150" dirty="0"/>
+          </a:p>
+        </p:txBody>
+      </p:sp>
+      <p:sp>
+        <p:nvSpPr>
+          <p:cNvPr id="7" name="Shape 5"/>
+          <p:cNvSpPr/>
+          <p:nvPr/>
+        </p:nvSpPr>
+        <p:spPr>
+          <a:xfrm>
+            <a:off x="1261157" y="1399032"/>
+            <a:ext cx="9669380" cy="5111496"/>
+          </a:xfrm>
+          <a:prstGeom prst="roundRect">
+            <a:avLst>
+              <a:gd name="adj" fmla="val 894"/>
+            </a:avLst>
+          </a:prstGeom>
+          <a:solidFill>
+            <a:srgbClr val="262B34"/>
+          </a:solidFill>
+          <a:ln/>
+          <a:effectLst>
+            <a:outerShdw blurRad="101600" dist="38100" dir="2700000" algn="bl" rotWithShape="0">
+              <a:srgbClr val="000000">
+                <a:alpha val="15000"/>
+              </a:srgbClr>
+            </a:outerShdw>
+          </a:effectLst>
+        </p:spPr>
+      </p:sp>
+      <p:pic>
+        <p:nvPicPr>
+          <p:cNvPr id="8" name="Image 0" descr="C:/Users/wagner/Desktop/CIENCIA DE DADOS/IAOBRAS/doc/prints/02_obras_cadastro.png"/>
+          <p:cNvPicPr>
+            <a:picLocks noChangeAspect="1"/>
+          </p:cNvPicPr>
+          <p:nvPr/>
+        </p:nvPicPr>
+        <p:blipFill>
+          <a:blip r:embed="rId3"/>
+          <a:srcRect/>
+          <a:stretch/>
+        </p:blipFill>
+        <p:spPr>
+          <a:xfrm>
+            <a:off x="1370885" y="1508760"/>
+            <a:ext cx="9449924" cy="4892040"/>
+          </a:xfrm>
+          <a:prstGeom prst="rect">
+            <a:avLst/>
+          </a:prstGeom>
+        </p:spPr>
+      </p:pic>
+    </p:spTree>
+  </p:cSld>
+  <p:clrMapOvr>
+    <a:masterClrMapping/>
+  </p:clrMapOvr>
+</p:sld>
+</file>
+
+<file path=ppt/slides/slide9.xml><?xml version="1.0" encoding="utf-8"?>
+<p:sld xmlns:a="http://schemas.openxmlformats.org/drawingml/2006/main" xmlns:r="http://schemas.openxmlformats.org/officeDocument/2006/relationships" xmlns:p="http://schemas.openxmlformats.org/presentationml/2006/main">
+  <p:cSld name="Slide 9">
+    <p:bg>
+      <p:bgPr>
+        <a:solidFill>
+          <a:srgbClr val="1B1E24"/>
+        </a:solidFill>
+        <a:effectLst/>
+      </p:bgPr>
+    </p:bg>
+    <p:spTree>
+      <p:nvGrpSpPr>
+        <p:cNvPr id="1" name=""/>
+        <p:cNvGrpSpPr/>
+        <p:nvPr/>
+      </p:nvGrpSpPr>
+      <p:grpSpPr>
+        <a:xfrm>
+          <a:off x="0" y="0"/>
+          <a:ext cx="0" cy="0"/>
+          <a:chOff x="0" y="0"/>
+          <a:chExt cx="0" cy="0"/>
+        </a:xfrm>
+      </p:grpSpPr>
+      <p:sp>
+        <p:nvSpPr>
+          <p:cNvPr id="2" name="Shape 0"/>
+          <p:cNvSpPr/>
+          <p:nvPr/>
+        </p:nvSpPr>
+        <p:spPr>
+          <a:xfrm>
+            <a:off x="640080" y="502920"/>
+            <a:ext cx="292608" cy="292608"/>
+          </a:xfrm>
+          <a:prstGeom prst="ellipse">
+            <a:avLst/>
+          </a:prstGeom>
+          <a:solidFill>
+            <a:srgbClr val="E8590C"/>
+          </a:solidFill>
+          <a:ln/>
+        </p:spPr>
+      </p:sp>
+      <p:sp>
+        <p:nvSpPr>
+          <p:cNvPr id="3" name="Text 1"/>
+          <p:cNvSpPr/>
+          <p:nvPr/>
+        </p:nvSpPr>
+        <p:spPr>
+          <a:xfrm>
+            <a:off x="1097280" y="320040"/>
+            <a:ext cx="7680960" cy="594360"/>
+          </a:xfrm>
+          <a:prstGeom prst="rect">
+            <a:avLst/>
+          </a:prstGeom>
+          <a:noFill/>
+          <a:ln/>
+        </p:spPr>
+        <p:txBody>
+          <a:bodyPr wrap="square" lIns="0" tIns="0" rIns="0" bIns="0" rtlCol="0" anchor="ctr"/>
+          <a:lstStyle/>
+          <a:p>
+            <a:pPr marL="0" indent="0" algn="l">
+              <a:buNone/>
+            </a:pPr>
+            <a:r>
+              <a:rPr lang="en-US" sz="2700" b="1" dirty="0">
                 <a:solidFill>
                   <a:srgbClr val="FFFFFF"/>
+                </a:solidFill>
+                <a:latin typeface="Bookman Old Style" pitchFamily="34" charset="0"/>
+                <a:ea typeface="Bookman Old Style" pitchFamily="34" charset="-122"/>
+                <a:cs typeface="Bookman Old Style" pitchFamily="34" charset="-120"/>
+              </a:rPr>
+              <a:t>Protótipo — Consulta e Relatório</a:t>
+            </a:r>
+            <a:endParaRPr lang="en-US" sz="2700" dirty="0"/>
+          </a:p>
+        </p:txBody>
+      </p:sp>
+      <p:sp>
+        <p:nvSpPr>
+          <p:cNvPr id="4" name="Text 2"/>
+          <p:cNvSpPr/>
+          <p:nvPr/>
+        </p:nvSpPr>
+        <p:spPr>
+          <a:xfrm>
+            <a:off x="1097280" y="896112"/>
+            <a:ext cx="7680960" cy="365760"/>
+          </a:xfrm>
+          <a:prstGeom prst="rect">
+            <a:avLst/>
+          </a:prstGeom>
+          <a:noFill/>
+          <a:ln/>
+        </p:spPr>
+        <p:txBody>
+          <a:bodyPr wrap="square" lIns="0" tIns="0" rIns="0" bIns="0" rtlCol="0" anchor="t"/>
+          <a:lstStyle/>
+          <a:p>
+            <a:pPr marL="0" indent="0" algn="l">
+              <a:buNone/>
+            </a:pPr>
+            <a:r>
+              <a:rPr lang="en-US" sz="1300" i="1" dirty="0">
+                <a:solidFill>
+                  <a:srgbClr val="A9AFB8"/>
                 </a:solidFill>
                 <a:latin typeface="Calibri" pitchFamily="34" charset="0"/>
                 <a:ea typeface="Calibri" pitchFamily="34" charset="-122"/>
                 <a:cs typeface="Calibri" pitchFamily="34" charset="-120"/>
               </a:rPr>
-              <a:t>Projeto IAOBRA — Práticas Extensionistas III</a:t>
-            </a:r>
-            <a:endParaRPr lang="en-US" sz="1500" dirty="0"/>
-          </a:p>
-        </p:txBody>
-      </p:sp>
+              <a:t>Orçamento da obra: total consolidado e itens de material com preços.</a:t>
+            </a:r>
+            <a:endParaRPr lang="en-US" sz="1300" dirty="0"/>
+          </a:p>
+        </p:txBody>
+      </p:sp>
+      <p:sp>
+        <p:nvSpPr>
+          <p:cNvPr id="5" name="Shape 3"/>
+          <p:cNvSpPr/>
+          <p:nvPr/>
+        </p:nvSpPr>
+        <p:spPr>
+          <a:xfrm>
+            <a:off x="9189720" y="457200"/>
+            <a:ext cx="2331720" cy="502920"/>
+          </a:xfrm>
+          <a:prstGeom prst="roundRect">
+            <a:avLst>
+              <a:gd name="adj" fmla="val 49091"/>
+            </a:avLst>
+          </a:prstGeom>
+          <a:solidFill>
+            <a:srgbClr val="FBE7DA"/>
+          </a:solidFill>
+          <a:ln/>
+        </p:spPr>
+      </p:sp>
+      <p:sp>
+        <p:nvSpPr>
+          <p:cNvPr id="6" name="Text 4"/>
+          <p:cNvSpPr/>
+          <p:nvPr/>
+        </p:nvSpPr>
+        <p:spPr>
+          <a:xfrm>
+            <a:off x="9189720" y="457200"/>
+            <a:ext cx="2331720" cy="502920"/>
+          </a:xfrm>
+          <a:prstGeom prst="rect">
+            <a:avLst/>
+          </a:prstGeom>
+          <a:noFill/>
+          <a:ln/>
+        </p:spPr>
+        <p:txBody>
+          <a:bodyPr wrap="square" lIns="0" tIns="0" rIns="0" bIns="0" rtlCol="0" anchor="ctr"/>
+          <a:lstStyle/>
+          <a:p>
+            <a:pPr marL="0" indent="0" algn="ctr">
+              <a:buNone/>
+            </a:pPr>
+            <a:r>
+              <a:rPr lang="en-US" sz="1150" b="1" dirty="0">
+                <a:solidFill>
+                  <a:srgbClr val="E8590C"/>
+                </a:solidFill>
+                <a:latin typeface="Calibri" pitchFamily="34" charset="0"/>
+                <a:ea typeface="Calibri" pitchFamily="34" charset="-122"/>
+                <a:cs typeface="Calibri" pitchFamily="34" charset="-120"/>
+              </a:rPr>
+              <a:t>3 · Consulta / Relatório</a:t>
+            </a:r>
+            <a:endParaRPr lang="en-US" sz="1150" dirty="0"/>
+          </a:p>
+        </p:txBody>
+      </p:sp>
+      <p:sp>
+        <p:nvSpPr>
+          <p:cNvPr id="7" name="Shape 5"/>
+          <p:cNvSpPr/>
+          <p:nvPr/>
+        </p:nvSpPr>
+        <p:spPr>
+          <a:xfrm>
+            <a:off x="1261157" y="1399032"/>
+            <a:ext cx="9669380" cy="5111496"/>
+          </a:xfrm>
+          <a:prstGeom prst="roundRect">
+            <a:avLst>
+              <a:gd name="adj" fmla="val 894"/>
+            </a:avLst>
+          </a:prstGeom>
+          <a:solidFill>
+            <a:srgbClr val="262B34"/>
+          </a:solidFill>
+          <a:ln/>
+          <a:effectLst>
+            <a:outerShdw blurRad="101600" dist="38100" dir="2700000" algn="bl" rotWithShape="0">
+              <a:srgbClr val="000000">
+                <a:alpha val="15000"/>
+              </a:srgbClr>
+            </a:outerShdw>
+          </a:effectLst>
+        </p:spPr>
+      </p:sp>
+      <p:pic>
+        <p:nvPicPr>
+          <p:cNvPr id="8" name="Image 0" descr="C:/Users/wagner/Desktop/CIENCIA DE DADOS/IAOBRAS/doc/prints/04_orcamento_relatorio.png"/>
+          <p:cNvPicPr>
+            <a:picLocks noChangeAspect="1"/>
+          </p:cNvPicPr>
+          <p:nvPr/>
+        </p:nvPicPr>
+        <p:blipFill>
+          <a:blip r:embed="rId3"/>
+          <a:srcRect/>
+          <a:stretch/>
+        </p:blipFill>
+        <p:spPr>
+          <a:xfrm>
+            <a:off x="1370885" y="1508760"/>
+            <a:ext cx="9449924" cy="4892040"/>
+          </a:xfrm>
+          <a:prstGeom prst="rect">
+            <a:avLst/>
+          </a:prstGeom>
+        </p:spPr>
+      </p:pic>
     </p:spTree>
   </p:cSld>
   <p:clrMapOvr>
@@ -5276,4 +6437,299 @@
     </a:ext>
   </a:extLst>
 </a:theme>
+</file>
+
+<file path=ppt/theme/theme2.xml><?xml version="1.0" encoding="utf-8"?>
+<a:theme xmlns:a="http://schemas.openxmlformats.org/drawingml/2006/main" name="Tema do Office">
+  <a:themeElements>
+    <a:clrScheme name="Office">
+      <a:dk1>
+        <a:sysClr val="windowText" lastClr="000000"/>
+      </a:dk1>
+      <a:lt1>
+        <a:sysClr val="window" lastClr="FFFFFF"/>
+      </a:lt1>
+      <a:dk2>
+        <a:srgbClr val="44546A"/>
+      </a:dk2>
+      <a:lt2>
+        <a:srgbClr val="E7E6E6"/>
+      </a:lt2>
+      <a:accent1>
+        <a:srgbClr val="4472C4"/>
+      </a:accent1>
+      <a:accent2>
+        <a:srgbClr val="ED7D31"/>
+      </a:accent2>
+      <a:accent3>
+        <a:srgbClr val="A5A5A5"/>
+      </a:accent3>
+      <a:accent4>
+        <a:srgbClr val="FFC000"/>
+      </a:accent4>
+      <a:accent5>
+        <a:srgbClr val="5B9BD5"/>
+      </a:accent5>
+      <a:accent6>
+        <a:srgbClr val="70AD47"/>
+      </a:accent6>
+      <a:hlink>
+        <a:srgbClr val="0563C1"/>
+      </a:hlink>
+      <a:folHlink>
+        <a:srgbClr val="954F72"/>
+      </a:folHlink>
+    </a:clrScheme>
+    <a:fontScheme name="Office">
+      <a:majorFont>
+        <a:latin typeface="Calibri Light" panose="020F0302020204030204"/>
+        <a:ea typeface=""/>
+        <a:cs typeface=""/>
+        <a:font script="Jpan" typeface="游ゴシック Light"/>
+        <a:font script="Hang" typeface="맑은 고딕"/>
+        <a:font script="Hans" typeface="等线 Light"/>
+        <a:font script="Hant" typeface="新細明體"/>
+        <a:font script="Arab" typeface="Times New Roman"/>
+        <a:font script="Hebr" typeface="Times New Roman"/>
+        <a:font script="Thai" typeface="Angsana New"/>
+        <a:font script="Ethi" typeface="Nyala"/>
+        <a:font script="Beng" typeface="Vrinda"/>
+        <a:font script="Gujr" typeface="Shruti"/>
+        <a:font script="Khmr" typeface="MoolBoran"/>
+        <a:font script="Knda" typeface="Tunga"/>
+        <a:font script="Guru" typeface="Raavi"/>
+        <a:font script="Cans" typeface="Euphemia"/>
+        <a:font script="Cher" typeface="Plantagenet Cherokee"/>
+        <a:font script="Yiii" typeface="Microsoft Yi Baiti"/>
+        <a:font script="Tibt" typeface="Microsoft Himalaya"/>
+        <a:font script="Thaa" typeface="MV Boli"/>
+        <a:font script="Deva" typeface="Mangal"/>
+        <a:font script="Telu" typeface="Gautami"/>
+        <a:font script="Taml" typeface="Latha"/>
+        <a:font script="Syrc" typeface="Estrangelo Edessa"/>
+        <a:font script="Orya" typeface="Kalinga"/>
+        <a:font script="Mlym" typeface="Kartika"/>
+        <a:font script="Laoo" typeface="DokChampa"/>
+        <a:font script="Sinh" typeface="Iskoola Pota"/>
+        <a:font script="Mong" typeface="Mongolian Baiti"/>
+        <a:font script="Viet" typeface="Times New Roman"/>
+        <a:font script="Uigh" typeface="Microsoft Uighur"/>
+        <a:font script="Geor" typeface="Sylfaen"/>
+        <a:font script="Armn" typeface="Arial"/>
+        <a:font script="Bugi" typeface="Leelawadee UI"/>
+        <a:font script="Bopo" typeface="Microsoft JhengHei"/>
+        <a:font script="Java" typeface="Javanese Text"/>
+        <a:font script="Lisu" typeface="Segoe UI"/>
+        <a:font script="Mymr" typeface="Myanmar Text"/>
+        <a:font script="Nkoo" typeface="Ebrima"/>
+        <a:font script="Olck" typeface="Nirmala UI"/>
+        <a:font script="Osma" typeface="Ebrima"/>
+        <a:font script="Phag" typeface="Phagspa"/>
+        <a:font script="Syrn" typeface="Estrangelo Edessa"/>
+        <a:font script="Syrj" typeface="Estrangelo Edessa"/>
+        <a:font script="Syre" typeface="Estrangelo Edessa"/>
+        <a:font script="Sora" typeface="Nirmala UI"/>
+        <a:font script="Tale" typeface="Microsoft Tai Le"/>
+        <a:font script="Talu" typeface="Microsoft New Tai Lue"/>
+        <a:font script="Tfng" typeface="Ebrima"/>
+      </a:majorFont>
+      <a:minorFont>
+        <a:latin typeface="Calibri" panose="020F0502020204030204"/>
+        <a:ea typeface=""/>
+        <a:cs typeface=""/>
+        <a:font script="Jpan" typeface="游ゴシック"/>
+        <a:font script="Hang" typeface="맑은 고딕"/>
+        <a:font script="Hans" typeface="等线"/>
+        <a:font script="Hant" typeface="新細明體"/>
+        <a:font script="Arab" typeface="Arial"/>
+        <a:font script="Hebr" typeface="Arial"/>
+        <a:font script="Thai" typeface="Cordia New"/>
+        <a:font script="Ethi" typeface="Nyala"/>
+        <a:font script="Beng" typeface="Vrinda"/>
+        <a:font script="Gujr" typeface="Shruti"/>
+        <a:font script="Khmr" typeface="DaunPenh"/>
+        <a:font script="Knda" typeface="Tunga"/>
+        <a:font script="Guru" typeface="Raavi"/>
+        <a:font script="Cans" typeface="Euphemia"/>
+        <a:font script="Cher" typeface="Plantagenet Cherokee"/>
+        <a:font script="Yiii" typeface="Microsoft Yi Baiti"/>
+        <a:font script="Tibt" typeface="Microsoft Himalaya"/>
+        <a:font script="Thaa" typeface="MV Boli"/>
+        <a:font script="Deva" typeface="Mangal"/>
+        <a:font script="Telu" typeface="Gautami"/>
+        <a:font script="Taml" typeface="Latha"/>
+        <a:font script="Syrc" typeface="Estrangelo Edessa"/>
+        <a:font script="Orya" typeface="Kalinga"/>
+        <a:font script="Mlym" typeface="Kartika"/>
+        <a:font script="Laoo" typeface="DokChampa"/>
+        <a:font script="Sinh" typeface="Iskoola Pota"/>
+        <a:font script="Mong" typeface="Mongolian Baiti"/>
+        <a:font script="Viet" typeface="Arial"/>
+        <a:font script="Uigh" typeface="Microsoft Uighur"/>
+        <a:font script="Geor" typeface="Sylfaen"/>
+        <a:font script="Armn" typeface="Arial"/>
+        <a:font script="Bugi" typeface="Leelawadee UI"/>
+        <a:font script="Bopo" typeface="Microsoft JhengHei"/>
+        <a:font script="Java" typeface="Javanese Text"/>
+        <a:font script="Lisu" typeface="Segoe UI"/>
+        <a:font script="Mymr" typeface="Myanmar Text"/>
+        <a:font script="Nkoo" typeface="Ebrima"/>
+        <a:font script="Olck" typeface="Nirmala UI"/>
+        <a:font script="Osma" typeface="Ebrima"/>
+        <a:font script="Phag" typeface="Phagspa"/>
+        <a:font script="Syrn" typeface="Estrangelo Edessa"/>
+        <a:font script="Syrj" typeface="Estrangelo Edessa"/>
+        <a:font script="Syre" typeface="Estrangelo Edessa"/>
+        <a:font script="Sora" typeface="Nirmala UI"/>
+        <a:font script="Tale" typeface="Microsoft Tai Le"/>
+        <a:font script="Talu" typeface="Microsoft New Tai Lue"/>
+        <a:font script="Tfng" typeface="Ebrima"/>
+      </a:minorFont>
+    </a:fontScheme>
+    <a:fmtScheme name="Office">
+      <a:fillStyleLst>
+        <a:solidFill>
+          <a:schemeClr val="phClr"/>
+        </a:solidFill>
+        <a:gradFill rotWithShape="1">
+          <a:gsLst>
+            <a:gs pos="0">
+              <a:schemeClr val="phClr">
+                <a:lumMod val="110000"/>
+                <a:satMod val="105000"/>
+                <a:tint val="67000"/>
+              </a:schemeClr>
+            </a:gs>
+            <a:gs pos="50000">
+              <a:schemeClr val="phClr">
+                <a:lumMod val="105000"/>
+                <a:satMod val="103000"/>
+                <a:tint val="73000"/>
+              </a:schemeClr>
+            </a:gs>
+            <a:gs pos="100000">
+              <a:schemeClr val="phClr">
+                <a:lumMod val="105000"/>
+                <a:satMod val="109000"/>
+                <a:tint val="81000"/>
+              </a:schemeClr>
+            </a:gs>
+          </a:gsLst>
+          <a:lin ang="5400000" scaled="0"/>
+        </a:gradFill>
+        <a:gradFill rotWithShape="1">
+          <a:gsLst>
+            <a:gs pos="0">
+              <a:schemeClr val="phClr">
+                <a:satMod val="103000"/>
+                <a:lumMod val="102000"/>
+                <a:tint val="94000"/>
+              </a:schemeClr>
+            </a:gs>
+            <a:gs pos="50000">
+              <a:schemeClr val="phClr">
+                <a:satMod val="110000"/>
+                <a:lumMod val="100000"/>
+                <a:shade val="100000"/>
+              </a:schemeClr>
+            </a:gs>
+            <a:gs pos="100000">
+              <a:schemeClr val="phClr">
+                <a:lumMod val="99000"/>
+                <a:satMod val="120000"/>
+                <a:shade val="78000"/>
+              </a:schemeClr>
+            </a:gs>
+          </a:gsLst>
+          <a:lin ang="5400000" scaled="0"/>
+        </a:gradFill>
+      </a:fillStyleLst>
+      <a:lnStyleLst>
+        <a:ln w="6350" cap="flat" cmpd="sng" algn="ctr">
+          <a:solidFill>
+            <a:schemeClr val="phClr"/>
+          </a:solidFill>
+          <a:prstDash val="solid"/>
+          <a:miter lim="800000"/>
+        </a:ln>
+        <a:ln w="12700" cap="flat" cmpd="sng" algn="ctr">
+          <a:solidFill>
+            <a:schemeClr val="phClr"/>
+          </a:solidFill>
+          <a:prstDash val="solid"/>
+          <a:miter lim="800000"/>
+        </a:ln>
+        <a:ln w="19050" cap="flat" cmpd="sng" algn="ctr">
+          <a:solidFill>
+            <a:schemeClr val="phClr"/>
+          </a:solidFill>
+          <a:prstDash val="solid"/>
+          <a:miter lim="800000"/>
+        </a:ln>
+      </a:lnStyleLst>
+      <a:effectStyleLst>
+        <a:effectStyle>
+          <a:effectLst/>
+        </a:effectStyle>
+        <a:effectStyle>
+          <a:effectLst/>
+        </a:effectStyle>
+        <a:effectStyle>
+          <a:effectLst>
+            <a:outerShdw blurRad="57150" dist="19050" dir="5400000" algn="ctr" rotWithShape="0">
+              <a:srgbClr val="000000">
+                <a:alpha val="63000"/>
+              </a:srgbClr>
+            </a:outerShdw>
+          </a:effectLst>
+        </a:effectStyle>
+      </a:effectStyleLst>
+      <a:bgFillStyleLst>
+        <a:solidFill>
+          <a:schemeClr val="phClr"/>
+        </a:solidFill>
+        <a:solidFill>
+          <a:schemeClr val="phClr">
+            <a:tint val="95000"/>
+            <a:satMod val="170000"/>
+          </a:schemeClr>
+        </a:solidFill>
+        <a:gradFill rotWithShape="1">
+          <a:gsLst>
+            <a:gs pos="0">
+              <a:schemeClr val="phClr">
+                <a:tint val="93000"/>
+                <a:satMod val="150000"/>
+                <a:shade val="98000"/>
+                <a:lumMod val="102000"/>
+              </a:schemeClr>
+            </a:gs>
+            <a:gs pos="50000">
+              <a:schemeClr val="phClr">
+                <a:tint val="98000"/>
+                <a:satMod val="130000"/>
+                <a:shade val="90000"/>
+                <a:lumMod val="103000"/>
+              </a:schemeClr>
+            </a:gs>
+            <a:gs pos="100000">
+              <a:schemeClr val="phClr">
+                <a:shade val="63000"/>
+                <a:satMod val="120000"/>
+              </a:schemeClr>
+            </a:gs>
+          </a:gsLst>
+          <a:lin ang="5400000" scaled="0"/>
+        </a:gradFill>
+      </a:bgFillStyleLst>
+    </a:fmtScheme>
+  </a:themeElements>
+  <a:objectDefaults/>
+  <a:extraClrSchemeLst/>
+  <a:extLst>
+    <a:ext uri="{05A4C25C-085E-4340-85A3-A5531E510DB2}">
+      <thm15:themeFamily xmlns:thm15="http://schemas.microsoft.com/office/thememl/2012/main" name="Office Theme" id="{62F939B6-93AF-4DB8-9C6B-D6C7DFDC589F}" vid="{4A3C46E8-61CC-4603-A589-7422A47A8E4A}"/>
+    </a:ext>
+  </a:extLst>
+</a:theme>
 </file>